--- a/.lessons/29 Fundamental Authorization ( Yalnız öz yazısını silə bilər A sayılır )/4 Authorization - Policy/1.pptx
+++ b/.lessons/29 Fundamental Authorization ( Yalnız öz yazısını silə bilər A sayılır )/4 Authorization - Policy/1.pptx
@@ -5,9 +5,19 @@
     <p:sldMasterId id="2147483648" r:id="rId1"/>
   </p:sldMasterIdLst>
   <p:sldIdLst>
-    <p:sldId id="402" r:id="rId2"/>
-    <p:sldId id="403" r:id="rId3"/>
+    <p:sldId id="403" r:id="rId2"/>
+    <p:sldId id="402" r:id="rId3"/>
     <p:sldId id="400" r:id="rId4"/>
+    <p:sldId id="406" r:id="rId5"/>
+    <p:sldId id="404" r:id="rId6"/>
+    <p:sldId id="405" r:id="rId7"/>
+    <p:sldId id="407" r:id="rId8"/>
+    <p:sldId id="408" r:id="rId9"/>
+    <p:sldId id="411" r:id="rId10"/>
+    <p:sldId id="409" r:id="rId11"/>
+    <p:sldId id="412" r:id="rId12"/>
+    <p:sldId id="413" r:id="rId13"/>
+    <p:sldId id="410" r:id="rId14"/>
   </p:sldIdLst>
   <p:sldSz cx="12192000" cy="6858000"/>
   <p:notesSz cx="6858000" cy="9144000"/>
@@ -261,7 +271,7 @@
           <a:p>
             <a:fld id="{3E102D2E-813C-461C-9963-687A650C48C0}" type="datetimeFigureOut">
               <a:rPr lang="en-US" smtClean="0"/>
-              <a:t>5/23/2025</a:t>
+              <a:t>6/2/2025</a:t>
             </a:fld>
             <a:endParaRPr lang="en-US"/>
           </a:p>
@@ -459,7 +469,7 @@
           <a:p>
             <a:fld id="{3E102D2E-813C-461C-9963-687A650C48C0}" type="datetimeFigureOut">
               <a:rPr lang="en-US" smtClean="0"/>
-              <a:t>5/23/2025</a:t>
+              <a:t>6/2/2025</a:t>
             </a:fld>
             <a:endParaRPr lang="en-US"/>
           </a:p>
@@ -667,7 +677,7 @@
           <a:p>
             <a:fld id="{3E102D2E-813C-461C-9963-687A650C48C0}" type="datetimeFigureOut">
               <a:rPr lang="en-US" smtClean="0"/>
-              <a:t>5/23/2025</a:t>
+              <a:t>6/2/2025</a:t>
             </a:fld>
             <a:endParaRPr lang="en-US"/>
           </a:p>
@@ -865,7 +875,7 @@
           <a:p>
             <a:fld id="{3E102D2E-813C-461C-9963-687A650C48C0}" type="datetimeFigureOut">
               <a:rPr lang="en-US" smtClean="0"/>
-              <a:t>5/23/2025</a:t>
+              <a:t>6/2/2025</a:t>
             </a:fld>
             <a:endParaRPr lang="en-US"/>
           </a:p>
@@ -1140,7 +1150,7 @@
           <a:p>
             <a:fld id="{3E102D2E-813C-461C-9963-687A650C48C0}" type="datetimeFigureOut">
               <a:rPr lang="en-US" smtClean="0"/>
-              <a:t>5/23/2025</a:t>
+              <a:t>6/2/2025</a:t>
             </a:fld>
             <a:endParaRPr lang="en-US"/>
           </a:p>
@@ -1405,7 +1415,7 @@
           <a:p>
             <a:fld id="{3E102D2E-813C-461C-9963-687A650C48C0}" type="datetimeFigureOut">
               <a:rPr lang="en-US" smtClean="0"/>
-              <a:t>5/23/2025</a:t>
+              <a:t>6/2/2025</a:t>
             </a:fld>
             <a:endParaRPr lang="en-US"/>
           </a:p>
@@ -1817,7 +1827,7 @@
           <a:p>
             <a:fld id="{3E102D2E-813C-461C-9963-687A650C48C0}" type="datetimeFigureOut">
               <a:rPr lang="en-US" smtClean="0"/>
-              <a:t>5/23/2025</a:t>
+              <a:t>6/2/2025</a:t>
             </a:fld>
             <a:endParaRPr lang="en-US"/>
           </a:p>
@@ -1958,7 +1968,7 @@
           <a:p>
             <a:fld id="{3E102D2E-813C-461C-9963-687A650C48C0}" type="datetimeFigureOut">
               <a:rPr lang="en-US" smtClean="0"/>
-              <a:t>5/23/2025</a:t>
+              <a:t>6/2/2025</a:t>
             </a:fld>
             <a:endParaRPr lang="en-US"/>
           </a:p>
@@ -2071,7 +2081,7 @@
           <a:p>
             <a:fld id="{3E102D2E-813C-461C-9963-687A650C48C0}" type="datetimeFigureOut">
               <a:rPr lang="en-US" smtClean="0"/>
-              <a:t>5/23/2025</a:t>
+              <a:t>6/2/2025</a:t>
             </a:fld>
             <a:endParaRPr lang="en-US"/>
           </a:p>
@@ -2382,7 +2392,7 @@
           <a:p>
             <a:fld id="{3E102D2E-813C-461C-9963-687A650C48C0}" type="datetimeFigureOut">
               <a:rPr lang="en-US" smtClean="0"/>
-              <a:t>5/23/2025</a:t>
+              <a:t>6/2/2025</a:t>
             </a:fld>
             <a:endParaRPr lang="en-US"/>
           </a:p>
@@ -2670,7 +2680,7 @@
           <a:p>
             <a:fld id="{3E102D2E-813C-461C-9963-687A650C48C0}" type="datetimeFigureOut">
               <a:rPr lang="en-US" smtClean="0"/>
-              <a:t>5/23/2025</a:t>
+              <a:t>6/2/2025</a:t>
             </a:fld>
             <a:endParaRPr lang="en-US"/>
           </a:p>
@@ -2911,7 +2921,7 @@
           <a:p>
             <a:fld id="{3E102D2E-813C-461C-9963-687A650C48C0}" type="datetimeFigureOut">
               <a:rPr lang="en-US" smtClean="0"/>
-              <a:t>5/23/2025</a:t>
+              <a:t>6/2/2025</a:t>
             </a:fld>
             <a:endParaRPr lang="en-US"/>
           </a:p>
@@ -3319,6 +3329,685 @@
         <p:cNvPr id="1" name="">
           <a:extLst>
             <a:ext uri="{FF2B5EF4-FFF2-40B4-BE49-F238E27FC236}">
+              <a16:creationId xmlns:a16="http://schemas.microsoft.com/office/drawing/2014/main" id="{F6C13FCC-E5C4-2350-20C6-89DF22D1F3E0}"/>
+            </a:ext>
+          </a:extLst>
+        </p:cNvPr>
+        <p:cNvGrpSpPr/>
+        <p:nvPr/>
+      </p:nvGrpSpPr>
+      <p:grpSpPr>
+        <a:xfrm>
+          <a:off x="0" y="0"/>
+          <a:ext cx="0" cy="0"/>
+          <a:chOff x="0" y="0"/>
+          <a:chExt cx="0" cy="0"/>
+        </a:xfrm>
+      </p:grpSpPr>
+      <p:sp>
+        <p:nvSpPr>
+          <p:cNvPr id="3" name="TextBox 2">
+            <a:extLst>
+              <a:ext uri="{FF2B5EF4-FFF2-40B4-BE49-F238E27FC236}">
+                <a16:creationId xmlns:a16="http://schemas.microsoft.com/office/drawing/2014/main" id="{81782941-0DB4-B0DA-A36A-31CA5EC69992}"/>
+              </a:ext>
+            </a:extLst>
+          </p:cNvPr>
+          <p:cNvSpPr txBox="1"/>
+          <p:nvPr/>
+        </p:nvSpPr>
+        <p:spPr>
+          <a:xfrm>
+            <a:off x="217715" y="255046"/>
+            <a:ext cx="5878286" cy="655436"/>
+          </a:xfrm>
+          <a:prstGeom prst="rect">
+            <a:avLst/>
+          </a:prstGeom>
+          <a:noFill/>
+        </p:spPr>
+        <p:txBody>
+          <a:bodyPr wrap="square">
+            <a:spAutoFit/>
+          </a:bodyPr>
+          <a:lstStyle/>
+          <a:p>
+            <a:pPr>
+              <a:lnSpc>
+                <a:spcPct val="150000"/>
+              </a:lnSpc>
+              <a:buNone/>
+            </a:pPr>
+            <a:r>
+              <a:rPr lang="az-Latn-AZ" altLang="en-US" sz="1300">
+                <a:latin typeface="Arial" panose="020B0604020202020204" pitchFamily="34" charset="0"/>
+              </a:rPr>
+              <a:t>Bu dərsə başlamadan, `</a:t>
+            </a:r>
+            <a:r>
+              <a:rPr lang="az-Latn-AZ" altLang="en-US" sz="1300" b="1">
+                <a:latin typeface="Arial" panose="020B0604020202020204" pitchFamily="34" charset="0"/>
+              </a:rPr>
+              <a:t>app\Providers\AuthServiceProvider.php</a:t>
+            </a:r>
+            <a:r>
+              <a:rPr lang="az-Latn-AZ" altLang="en-US" sz="1300">
+                <a:latin typeface="Arial" panose="020B0604020202020204" pitchFamily="34" charset="0"/>
+              </a:rPr>
+              <a:t>` faylındakı əvvəl yazdığımız kodları kommentə alırıq. </a:t>
+            </a:r>
+            <a:endParaRPr kumimoji="0" lang="en-US" altLang="en-US" sz="1300" b="0" i="0" u="none" strike="noStrike" cap="none" normalizeH="0" baseline="0">
+              <a:ln>
+                <a:noFill/>
+              </a:ln>
+              <a:solidFill>
+                <a:schemeClr val="tx1"/>
+              </a:solidFill>
+              <a:effectLst/>
+              <a:latin typeface="Arial" panose="020B0604020202020204" pitchFamily="34" charset="0"/>
+            </a:endParaRPr>
+          </a:p>
+        </p:txBody>
+      </p:sp>
+      <p:pic>
+        <p:nvPicPr>
+          <p:cNvPr id="4" name="Picture 3">
+            <a:extLst>
+              <a:ext uri="{FF2B5EF4-FFF2-40B4-BE49-F238E27FC236}">
+                <a16:creationId xmlns:a16="http://schemas.microsoft.com/office/drawing/2014/main" id="{4A16CD41-F97A-9B43-CBA6-63EC09AF18BF}"/>
+              </a:ext>
+            </a:extLst>
+          </p:cNvPr>
+          <p:cNvPicPr>
+            <a:picLocks noChangeAspect="1"/>
+          </p:cNvPicPr>
+          <p:nvPr/>
+        </p:nvPicPr>
+        <p:blipFill>
+          <a:blip r:embed="rId2"/>
+          <a:stretch>
+            <a:fillRect/>
+          </a:stretch>
+        </p:blipFill>
+        <p:spPr>
+          <a:xfrm>
+            <a:off x="6446538" y="0"/>
+            <a:ext cx="5745462" cy="6858000"/>
+          </a:xfrm>
+          <a:prstGeom prst="rect">
+            <a:avLst/>
+          </a:prstGeom>
+        </p:spPr>
+      </p:pic>
+    </p:spTree>
+    <p:extLst>
+      <p:ext uri="{BB962C8B-B14F-4D97-AF65-F5344CB8AC3E}">
+        <p14:creationId xmlns:p14="http://schemas.microsoft.com/office/powerpoint/2010/main" val="2667607345"/>
+      </p:ext>
+    </p:extLst>
+  </p:cSld>
+  <p:clrMapOvr>
+    <a:masterClrMapping/>
+  </p:clrMapOvr>
+</p:sld>
+</file>
+
+<file path=ppt/slides/slide10.xml><?xml version="1.0" encoding="utf-8"?>
+<p:sld xmlns:a="http://schemas.openxmlformats.org/drawingml/2006/main" xmlns:r="http://schemas.openxmlformats.org/officeDocument/2006/relationships" xmlns:p="http://schemas.openxmlformats.org/presentationml/2006/main">
+  <p:cSld>
+    <p:spTree>
+      <p:nvGrpSpPr>
+        <p:cNvPr id="1" name="">
+          <a:extLst>
+            <a:ext uri="{FF2B5EF4-FFF2-40B4-BE49-F238E27FC236}">
+              <a16:creationId xmlns:a16="http://schemas.microsoft.com/office/drawing/2014/main" id="{F7712AE9-2BAD-EE2D-B4AA-D5BFE8C1C91E}"/>
+            </a:ext>
+          </a:extLst>
+        </p:cNvPr>
+        <p:cNvGrpSpPr/>
+        <p:nvPr/>
+      </p:nvGrpSpPr>
+      <p:grpSpPr>
+        <a:xfrm>
+          <a:off x="0" y="0"/>
+          <a:ext cx="0" cy="0"/>
+          <a:chOff x="0" y="0"/>
+          <a:chExt cx="0" cy="0"/>
+        </a:xfrm>
+      </p:grpSpPr>
+      <p:sp>
+        <p:nvSpPr>
+          <p:cNvPr id="3" name="TextBox 2">
+            <a:extLst>
+              <a:ext uri="{FF2B5EF4-FFF2-40B4-BE49-F238E27FC236}">
+                <a16:creationId xmlns:a16="http://schemas.microsoft.com/office/drawing/2014/main" id="{5BFE0F2D-99F8-35C8-33A1-C706508B31E7}"/>
+              </a:ext>
+            </a:extLst>
+          </p:cNvPr>
+          <p:cNvSpPr txBox="1"/>
+          <p:nvPr/>
+        </p:nvSpPr>
+        <p:spPr>
+          <a:xfrm>
+            <a:off x="217714" y="255046"/>
+            <a:ext cx="11756571" cy="355354"/>
+          </a:xfrm>
+          <a:prstGeom prst="rect">
+            <a:avLst/>
+          </a:prstGeom>
+          <a:noFill/>
+        </p:spPr>
+        <p:txBody>
+          <a:bodyPr wrap="square">
+            <a:spAutoFit/>
+          </a:bodyPr>
+          <a:lstStyle/>
+          <a:p>
+            <a:pPr>
+              <a:lnSpc>
+                <a:spcPct val="150000"/>
+              </a:lnSpc>
+              <a:buNone/>
+            </a:pPr>
+            <a:r>
+              <a:rPr kumimoji="0" lang="en-US" altLang="en-US" sz="1300" b="0" i="0" u="none" strike="noStrike" cap="none" normalizeH="0" baseline="0">
+                <a:ln>
+                  <a:noFill/>
+                </a:ln>
+                <a:solidFill>
+                  <a:schemeClr val="tx1"/>
+                </a:solidFill>
+                <a:effectLst/>
+                <a:latin typeface="Arial" panose="020B0604020202020204" pitchFamily="34" charset="0"/>
+              </a:rPr>
+              <a:t>.</a:t>
+            </a:r>
+          </a:p>
+        </p:txBody>
+      </p:sp>
+      <p:pic>
+        <p:nvPicPr>
+          <p:cNvPr id="6" name="Picture 5">
+            <a:extLst>
+              <a:ext uri="{FF2B5EF4-FFF2-40B4-BE49-F238E27FC236}">
+                <a16:creationId xmlns:a16="http://schemas.microsoft.com/office/drawing/2014/main" id="{94C36675-9504-AF9A-09D2-44FAB1785133}"/>
+              </a:ext>
+            </a:extLst>
+          </p:cNvPr>
+          <p:cNvPicPr>
+            <a:picLocks noChangeAspect="1"/>
+          </p:cNvPicPr>
+          <p:nvPr/>
+        </p:nvPicPr>
+        <p:blipFill>
+          <a:blip r:embed="rId2"/>
+          <a:stretch>
+            <a:fillRect/>
+          </a:stretch>
+        </p:blipFill>
+        <p:spPr>
+          <a:xfrm>
+            <a:off x="-1" y="0"/>
+            <a:ext cx="12192000" cy="2444051"/>
+          </a:xfrm>
+          <a:prstGeom prst="rect">
+            <a:avLst/>
+          </a:prstGeom>
+          <a:ln w="38100" cap="sq">
+            <a:solidFill>
+              <a:srgbClr val="000000"/>
+            </a:solidFill>
+            <a:prstDash val="solid"/>
+            <a:miter lim="800000"/>
+          </a:ln>
+          <a:effectLst>
+            <a:outerShdw blurRad="50800" dist="38100" dir="2700000" algn="tl" rotWithShape="0">
+              <a:srgbClr val="000000">
+                <a:alpha val="43000"/>
+              </a:srgbClr>
+            </a:outerShdw>
+          </a:effectLst>
+        </p:spPr>
+      </p:pic>
+      <p:pic>
+        <p:nvPicPr>
+          <p:cNvPr id="8" name="Picture 7">
+            <a:extLst>
+              <a:ext uri="{FF2B5EF4-FFF2-40B4-BE49-F238E27FC236}">
+                <a16:creationId xmlns:a16="http://schemas.microsoft.com/office/drawing/2014/main" id="{609FD201-D3E5-817D-B1E2-857329D5ECC0}"/>
+              </a:ext>
+            </a:extLst>
+          </p:cNvPr>
+          <p:cNvPicPr>
+            <a:picLocks noChangeAspect="1"/>
+          </p:cNvPicPr>
+          <p:nvPr/>
+        </p:nvPicPr>
+        <p:blipFill>
+          <a:blip r:embed="rId3"/>
+          <a:stretch>
+            <a:fillRect/>
+          </a:stretch>
+        </p:blipFill>
+        <p:spPr>
+          <a:xfrm>
+            <a:off x="3104403" y="2922953"/>
+            <a:ext cx="9087596" cy="3935047"/>
+          </a:xfrm>
+          <a:prstGeom prst="rect">
+            <a:avLst/>
+          </a:prstGeom>
+          <a:ln w="38100" cap="sq">
+            <a:solidFill>
+              <a:srgbClr val="000000"/>
+            </a:solidFill>
+            <a:prstDash val="solid"/>
+            <a:miter lim="800000"/>
+          </a:ln>
+          <a:effectLst>
+            <a:outerShdw blurRad="50800" dist="38100" dir="2700000" algn="tl" rotWithShape="0">
+              <a:srgbClr val="000000">
+                <a:alpha val="43000"/>
+              </a:srgbClr>
+            </a:outerShdw>
+          </a:effectLst>
+        </p:spPr>
+      </p:pic>
+    </p:spTree>
+    <p:extLst>
+      <p:ext uri="{BB962C8B-B14F-4D97-AF65-F5344CB8AC3E}">
+        <p14:creationId xmlns:p14="http://schemas.microsoft.com/office/powerpoint/2010/main" val="1621073773"/>
+      </p:ext>
+    </p:extLst>
+  </p:cSld>
+  <p:clrMapOvr>
+    <a:masterClrMapping/>
+  </p:clrMapOvr>
+</p:sld>
+</file>
+
+<file path=ppt/slides/slide11.xml><?xml version="1.0" encoding="utf-8"?>
+<p:sld xmlns:a="http://schemas.openxmlformats.org/drawingml/2006/main" xmlns:r="http://schemas.openxmlformats.org/officeDocument/2006/relationships" xmlns:p="http://schemas.openxmlformats.org/presentationml/2006/main">
+  <p:cSld>
+    <p:spTree>
+      <p:nvGrpSpPr>
+        <p:cNvPr id="1" name="">
+          <a:extLst>
+            <a:ext uri="{FF2B5EF4-FFF2-40B4-BE49-F238E27FC236}">
+              <a16:creationId xmlns:a16="http://schemas.microsoft.com/office/drawing/2014/main" id="{C9617AB6-4AA9-7735-7363-A162168F156B}"/>
+            </a:ext>
+          </a:extLst>
+        </p:cNvPr>
+        <p:cNvGrpSpPr/>
+        <p:nvPr/>
+      </p:nvGrpSpPr>
+      <p:grpSpPr>
+        <a:xfrm>
+          <a:off x="0" y="0"/>
+          <a:ext cx="0" cy="0"/>
+          <a:chOff x="0" y="0"/>
+          <a:chExt cx="0" cy="0"/>
+        </a:xfrm>
+      </p:grpSpPr>
+      <p:sp>
+        <p:nvSpPr>
+          <p:cNvPr id="3" name="TextBox 2">
+            <a:extLst>
+              <a:ext uri="{FF2B5EF4-FFF2-40B4-BE49-F238E27FC236}">
+                <a16:creationId xmlns:a16="http://schemas.microsoft.com/office/drawing/2014/main" id="{800EB384-ADDB-F25C-C3F7-FAD14B6E3B54}"/>
+              </a:ext>
+            </a:extLst>
+          </p:cNvPr>
+          <p:cNvSpPr txBox="1"/>
+          <p:nvPr/>
+        </p:nvSpPr>
+        <p:spPr>
+          <a:xfrm>
+            <a:off x="217713" y="255046"/>
+            <a:ext cx="11756571" cy="1555682"/>
+          </a:xfrm>
+          <a:prstGeom prst="rect">
+            <a:avLst/>
+          </a:prstGeom>
+          <a:noFill/>
+        </p:spPr>
+        <p:txBody>
+          <a:bodyPr wrap="square">
+            <a:spAutoFit/>
+          </a:bodyPr>
+          <a:lstStyle/>
+          <a:p>
+            <a:pPr>
+              <a:lnSpc>
+                <a:spcPct val="150000"/>
+              </a:lnSpc>
+              <a:buNone/>
+            </a:pPr>
+            <a:r>
+              <a:rPr kumimoji="0" lang="az-Latn-AZ" altLang="en-US" sz="1300" b="0" i="0" u="none" strike="noStrike" cap="none" normalizeH="0" baseline="0">
+                <a:ln>
+                  <a:noFill/>
+                </a:ln>
+                <a:solidFill>
+                  <a:schemeClr val="tx1"/>
+                </a:solidFill>
+                <a:effectLst/>
+                <a:latin typeface="Arial" panose="020B0604020202020204" pitchFamily="34" charset="0"/>
+              </a:rPr>
+              <a:t>Bu arada hal</a:t>
+            </a:r>
+            <a:r>
+              <a:rPr lang="az-Latn-AZ" altLang="en-US" sz="1300">
+                <a:latin typeface="Arial" panose="020B0604020202020204" pitchFamily="34" charset="0"/>
+              </a:rPr>
+              <a:t>-hazırki mövzudan kənar qeyd etmək istədiyim bir nöqtə var ki, əgər DELETE düyməsini klikləsəz proqram datanı siləcək acnaq həmin data cari səhifədə görsənməyə dəvam edəcək. </a:t>
+            </a:r>
+          </a:p>
+          <a:p>
+            <a:pPr>
+              <a:lnSpc>
+                <a:spcPct val="150000"/>
+              </a:lnSpc>
+              <a:buNone/>
+            </a:pPr>
+            <a:endParaRPr kumimoji="0" lang="az-Latn-AZ" altLang="en-US" sz="1300" b="0" i="0" u="none" strike="noStrike" cap="none" normalizeH="0" baseline="0">
+              <a:ln>
+                <a:noFill/>
+              </a:ln>
+              <a:solidFill>
+                <a:schemeClr val="tx1"/>
+              </a:solidFill>
+              <a:effectLst/>
+              <a:latin typeface="Arial" panose="020B0604020202020204" pitchFamily="34" charset="0"/>
+            </a:endParaRPr>
+          </a:p>
+          <a:p>
+            <a:pPr>
+              <a:lnSpc>
+                <a:spcPct val="150000"/>
+              </a:lnSpc>
+              <a:buNone/>
+            </a:pPr>
+            <a:r>
+              <a:rPr lang="az-Latn-AZ" altLang="en-US" sz="1300">
+                <a:latin typeface="Arial" panose="020B0604020202020204" pitchFamily="34" charset="0"/>
+              </a:rPr>
+              <a:t>Bunun səbəbi bizim dataları keşləməyimiz ilə əlaqədardır. İstəsəniz elə edə bilərsiniz ki, </a:t>
+            </a:r>
+            <a:r>
+              <a:rPr lang="az-Latn-AZ" altLang="en-US" sz="1300" b="1">
+                <a:latin typeface="Arial" panose="020B0604020202020204" pitchFamily="34" charset="0"/>
+              </a:rPr>
+              <a:t>data</a:t>
+            </a:r>
+            <a:r>
+              <a:rPr lang="az-Latn-AZ" altLang="en-US" sz="1300">
+                <a:latin typeface="Arial" panose="020B0604020202020204" pitchFamily="34" charset="0"/>
+              </a:rPr>
+              <a:t> silindikdən sonra </a:t>
+            </a:r>
+            <a:r>
+              <a:rPr lang="az-Latn-AZ" altLang="en-US" sz="1300" b="1">
+                <a:latin typeface="Arial" panose="020B0604020202020204" pitchFamily="34" charset="0"/>
+              </a:rPr>
+              <a:t>keş</a:t>
+            </a:r>
+            <a:r>
+              <a:rPr lang="az-Latn-AZ" altLang="en-US" sz="1300">
+                <a:latin typeface="Arial" panose="020B0604020202020204" pitchFamily="34" charset="0"/>
+              </a:rPr>
+              <a:t> təmizlənsin və yeniliklər qüvvəyə minsin. Mən indi bunu etməyə ehtiyac duymuram. Sadəcə bu məqam haqqında bildirmək istədim.</a:t>
+            </a:r>
+            <a:endParaRPr kumimoji="0" lang="en-US" altLang="en-US" sz="1300" b="0" i="0" u="none" strike="noStrike" cap="none" normalizeH="0" baseline="0">
+              <a:ln>
+                <a:noFill/>
+              </a:ln>
+              <a:solidFill>
+                <a:schemeClr val="tx1"/>
+              </a:solidFill>
+              <a:effectLst/>
+              <a:latin typeface="Arial" panose="020B0604020202020204" pitchFamily="34" charset="0"/>
+            </a:endParaRPr>
+          </a:p>
+        </p:txBody>
+      </p:sp>
+      <p:pic>
+        <p:nvPicPr>
+          <p:cNvPr id="4" name="Picture 3">
+            <a:extLst>
+              <a:ext uri="{FF2B5EF4-FFF2-40B4-BE49-F238E27FC236}">
+                <a16:creationId xmlns:a16="http://schemas.microsoft.com/office/drawing/2014/main" id="{B2A253D4-6589-F9DA-820D-5673F56CAF52}"/>
+              </a:ext>
+            </a:extLst>
+          </p:cNvPr>
+          <p:cNvPicPr>
+            <a:picLocks noChangeAspect="1"/>
+          </p:cNvPicPr>
+          <p:nvPr/>
+        </p:nvPicPr>
+        <p:blipFill>
+          <a:blip r:embed="rId2"/>
+          <a:stretch>
+            <a:fillRect/>
+          </a:stretch>
+        </p:blipFill>
+        <p:spPr>
+          <a:xfrm>
+            <a:off x="-1" y="4273489"/>
+            <a:ext cx="12192000" cy="2584511"/>
+          </a:xfrm>
+          <a:prstGeom prst="rect">
+            <a:avLst/>
+          </a:prstGeom>
+          <a:ln w="38100" cap="sq">
+            <a:solidFill>
+              <a:srgbClr val="000000"/>
+            </a:solidFill>
+            <a:prstDash val="solid"/>
+            <a:miter lim="800000"/>
+          </a:ln>
+          <a:effectLst>
+            <a:outerShdw blurRad="50800" dist="38100" dir="2700000" algn="tl" rotWithShape="0">
+              <a:srgbClr val="000000">
+                <a:alpha val="43000"/>
+              </a:srgbClr>
+            </a:outerShdw>
+          </a:effectLst>
+        </p:spPr>
+      </p:pic>
+    </p:spTree>
+    <p:extLst>
+      <p:ext uri="{BB962C8B-B14F-4D97-AF65-F5344CB8AC3E}">
+        <p14:creationId xmlns:p14="http://schemas.microsoft.com/office/powerpoint/2010/main" val="2095044250"/>
+      </p:ext>
+    </p:extLst>
+  </p:cSld>
+  <p:clrMapOvr>
+    <a:masterClrMapping/>
+  </p:clrMapOvr>
+</p:sld>
+</file>
+
+<file path=ppt/slides/slide12.xml><?xml version="1.0" encoding="utf-8"?>
+<p:sld xmlns:a="http://schemas.openxmlformats.org/drawingml/2006/main" xmlns:r="http://schemas.openxmlformats.org/officeDocument/2006/relationships" xmlns:p="http://schemas.openxmlformats.org/presentationml/2006/main">
+  <p:cSld>
+    <p:spTree>
+      <p:nvGrpSpPr>
+        <p:cNvPr id="1" name="">
+          <a:extLst>
+            <a:ext uri="{FF2B5EF4-FFF2-40B4-BE49-F238E27FC236}">
+              <a16:creationId xmlns:a16="http://schemas.microsoft.com/office/drawing/2014/main" id="{A0E63BB8-C43D-B6CE-1253-53F6E80DF762}"/>
+            </a:ext>
+          </a:extLst>
+        </p:cNvPr>
+        <p:cNvGrpSpPr/>
+        <p:nvPr/>
+      </p:nvGrpSpPr>
+      <p:grpSpPr>
+        <a:xfrm>
+          <a:off x="0" y="0"/>
+          <a:ext cx="0" cy="0"/>
+          <a:chOff x="0" y="0"/>
+          <a:chExt cx="0" cy="0"/>
+        </a:xfrm>
+      </p:grpSpPr>
+      <p:sp>
+        <p:nvSpPr>
+          <p:cNvPr id="3" name="TextBox 2">
+            <a:extLst>
+              <a:ext uri="{FF2B5EF4-FFF2-40B4-BE49-F238E27FC236}">
+                <a16:creationId xmlns:a16="http://schemas.microsoft.com/office/drawing/2014/main" id="{FE32EF0D-AE96-2673-9527-15B02BC7859C}"/>
+              </a:ext>
+            </a:extLst>
+          </p:cNvPr>
+          <p:cNvSpPr txBox="1"/>
+          <p:nvPr/>
+        </p:nvSpPr>
+        <p:spPr>
+          <a:xfrm>
+            <a:off x="217714" y="255046"/>
+            <a:ext cx="11756571" cy="355354"/>
+          </a:xfrm>
+          <a:prstGeom prst="rect">
+            <a:avLst/>
+          </a:prstGeom>
+          <a:noFill/>
+        </p:spPr>
+        <p:txBody>
+          <a:bodyPr wrap="square">
+            <a:spAutoFit/>
+          </a:bodyPr>
+          <a:lstStyle/>
+          <a:p>
+            <a:pPr>
+              <a:lnSpc>
+                <a:spcPct val="150000"/>
+              </a:lnSpc>
+              <a:buNone/>
+            </a:pPr>
+            <a:r>
+              <a:rPr kumimoji="0" lang="en-US" altLang="en-US" sz="1300" b="0" i="0" u="none" strike="noStrike" cap="none" normalizeH="0" baseline="0">
+                <a:ln>
+                  <a:noFill/>
+                </a:ln>
+                <a:solidFill>
+                  <a:schemeClr val="tx1"/>
+                </a:solidFill>
+                <a:effectLst/>
+                <a:latin typeface="Arial" panose="020B0604020202020204" pitchFamily="34" charset="0"/>
+              </a:rPr>
+              <a:t>.</a:t>
+            </a:r>
+          </a:p>
+        </p:txBody>
+      </p:sp>
+    </p:spTree>
+    <p:extLst>
+      <p:ext uri="{BB962C8B-B14F-4D97-AF65-F5344CB8AC3E}">
+        <p14:creationId xmlns:p14="http://schemas.microsoft.com/office/powerpoint/2010/main" val="2447383101"/>
+      </p:ext>
+    </p:extLst>
+  </p:cSld>
+  <p:clrMapOvr>
+    <a:masterClrMapping/>
+  </p:clrMapOvr>
+</p:sld>
+</file>
+
+<file path=ppt/slides/slide13.xml><?xml version="1.0" encoding="utf-8"?>
+<p:sld xmlns:a="http://schemas.openxmlformats.org/drawingml/2006/main" xmlns:r="http://schemas.openxmlformats.org/officeDocument/2006/relationships" xmlns:p="http://schemas.openxmlformats.org/presentationml/2006/main">
+  <p:cSld>
+    <p:spTree>
+      <p:nvGrpSpPr>
+        <p:cNvPr id="1" name="">
+          <a:extLst>
+            <a:ext uri="{FF2B5EF4-FFF2-40B4-BE49-F238E27FC236}">
+              <a16:creationId xmlns:a16="http://schemas.microsoft.com/office/drawing/2014/main" id="{991C94F5-8CA5-562E-1F45-95A981956FE9}"/>
+            </a:ext>
+          </a:extLst>
+        </p:cNvPr>
+        <p:cNvGrpSpPr/>
+        <p:nvPr/>
+      </p:nvGrpSpPr>
+      <p:grpSpPr>
+        <a:xfrm>
+          <a:off x="0" y="0"/>
+          <a:ext cx="0" cy="0"/>
+          <a:chOff x="0" y="0"/>
+          <a:chExt cx="0" cy="0"/>
+        </a:xfrm>
+      </p:grpSpPr>
+      <p:sp>
+        <p:nvSpPr>
+          <p:cNvPr id="3" name="TextBox 2">
+            <a:extLst>
+              <a:ext uri="{FF2B5EF4-FFF2-40B4-BE49-F238E27FC236}">
+                <a16:creationId xmlns:a16="http://schemas.microsoft.com/office/drawing/2014/main" id="{8709721E-C847-042C-9C58-5304173D2532}"/>
+              </a:ext>
+            </a:extLst>
+          </p:cNvPr>
+          <p:cNvSpPr txBox="1"/>
+          <p:nvPr/>
+        </p:nvSpPr>
+        <p:spPr>
+          <a:xfrm>
+            <a:off x="217714" y="255046"/>
+            <a:ext cx="11756571" cy="355354"/>
+          </a:xfrm>
+          <a:prstGeom prst="rect">
+            <a:avLst/>
+          </a:prstGeom>
+          <a:noFill/>
+        </p:spPr>
+        <p:txBody>
+          <a:bodyPr wrap="square">
+            <a:spAutoFit/>
+          </a:bodyPr>
+          <a:lstStyle/>
+          <a:p>
+            <a:pPr>
+              <a:lnSpc>
+                <a:spcPct val="150000"/>
+              </a:lnSpc>
+              <a:buNone/>
+            </a:pPr>
+            <a:r>
+              <a:rPr kumimoji="0" lang="en-US" altLang="en-US" sz="1300" b="0" i="0" u="none" strike="noStrike" cap="none" normalizeH="0" baseline="0">
+                <a:ln>
+                  <a:noFill/>
+                </a:ln>
+                <a:solidFill>
+                  <a:schemeClr val="tx1"/>
+                </a:solidFill>
+                <a:effectLst/>
+                <a:latin typeface="Arial" panose="020B0604020202020204" pitchFamily="34" charset="0"/>
+              </a:rPr>
+              <a:t>.</a:t>
+            </a:r>
+          </a:p>
+        </p:txBody>
+      </p:sp>
+    </p:spTree>
+    <p:extLst>
+      <p:ext uri="{BB962C8B-B14F-4D97-AF65-F5344CB8AC3E}">
+        <p14:creationId xmlns:p14="http://schemas.microsoft.com/office/powerpoint/2010/main" val="1702556593"/>
+      </p:ext>
+    </p:extLst>
+  </p:cSld>
+  <p:clrMapOvr>
+    <a:masterClrMapping/>
+  </p:clrMapOvr>
+</p:sld>
+</file>
+
+<file path=ppt/slides/slide2.xml><?xml version="1.0" encoding="utf-8"?>
+<p:sld xmlns:a="http://schemas.openxmlformats.org/drawingml/2006/main" xmlns:r="http://schemas.openxmlformats.org/officeDocument/2006/relationships" xmlns:p="http://schemas.openxmlformats.org/presentationml/2006/main">
+  <p:cSld>
+    <p:spTree>
+      <p:nvGrpSpPr>
+        <p:cNvPr id="1" name="">
+          <a:extLst>
+            <a:ext uri="{FF2B5EF4-FFF2-40B4-BE49-F238E27FC236}">
               <a16:creationId xmlns:a16="http://schemas.microsoft.com/office/drawing/2014/main" id="{4881AB92-A397-BC65-20DF-C145E27445B8}"/>
             </a:ext>
           </a:extLst>
@@ -3348,8 +4037,8 @@
         </p:nvSpPr>
         <p:spPr>
           <a:xfrm>
-            <a:off x="217714" y="255046"/>
-            <a:ext cx="11756571" cy="355354"/>
+            <a:off x="92364" y="255046"/>
+            <a:ext cx="4692072" cy="6408870"/>
           </a:xfrm>
           <a:prstGeom prst="rect">
             <a:avLst/>
@@ -3369,7 +4058,167 @@
               <a:buNone/>
             </a:pPr>
             <a:r>
-              <a:rPr kumimoji="0" lang="en-US" altLang="en-US" sz="1300" b="0" i="0" u="none" strike="noStrike" cap="none" normalizeH="0" baseline="0">
+              <a:rPr lang="az-Latn-AZ" altLang="en-US" sz="1100" b="1">
+                <a:latin typeface="Arial" panose="020B0604020202020204" pitchFamily="34" charset="0"/>
+              </a:rPr>
+              <a:t>Sonra yazırıq</a:t>
+            </a:r>
+            <a:r>
+              <a:rPr lang="az-Latn-AZ" altLang="en-US" sz="1100">
+                <a:latin typeface="Arial" panose="020B0604020202020204" pitchFamily="34" charset="0"/>
+              </a:rPr>
+              <a:t>: </a:t>
+            </a:r>
+            <a:r>
+              <a:rPr lang="az-Latn-AZ" altLang="en-US" sz="1100" b="1">
+                <a:solidFill>
+                  <a:srgbClr val="FF0000"/>
+                </a:solidFill>
+                <a:latin typeface="Arial" panose="020B0604020202020204" pitchFamily="34" charset="0"/>
+              </a:rPr>
+              <a:t>php artisan make:policy PostPolicy --model=Post</a:t>
+            </a:r>
+          </a:p>
+          <a:p>
+            <a:pPr>
+              <a:lnSpc>
+                <a:spcPct val="150000"/>
+              </a:lnSpc>
+              <a:buNone/>
+            </a:pPr>
+            <a:endParaRPr kumimoji="0" lang="az-Latn-AZ" altLang="en-US" sz="1100" b="0" i="0" u="none" strike="noStrike" cap="none" normalizeH="0" baseline="0">
+              <a:ln>
+                <a:noFill/>
+              </a:ln>
+              <a:solidFill>
+                <a:schemeClr val="tx1"/>
+              </a:solidFill>
+              <a:effectLst/>
+              <a:latin typeface="Arial" panose="020B0604020202020204" pitchFamily="34" charset="0"/>
+            </a:endParaRPr>
+          </a:p>
+          <a:p>
+            <a:pPr>
+              <a:lnSpc>
+                <a:spcPct val="150000"/>
+              </a:lnSpc>
+              <a:buNone/>
+            </a:pPr>
+            <a:r>
+              <a:rPr lang="az-Latn-AZ" altLang="en-US" sz="1100" b="1">
+                <a:latin typeface="Arial" panose="020B0604020202020204" pitchFamily="34" charset="0"/>
+              </a:rPr>
+              <a:t>Bu komanda Laravel-ə deyir</a:t>
+            </a:r>
+            <a:r>
+              <a:rPr lang="az-Latn-AZ" altLang="en-US" sz="1100">
+                <a:latin typeface="Arial" panose="020B0604020202020204" pitchFamily="34" charset="0"/>
+              </a:rPr>
+              <a:t>:</a:t>
+            </a:r>
+          </a:p>
+          <a:p>
+            <a:pPr>
+              <a:lnSpc>
+                <a:spcPct val="150000"/>
+              </a:lnSpc>
+              <a:buNone/>
+            </a:pPr>
+            <a:r>
+              <a:rPr lang="az-Latn-AZ" altLang="en-US" sz="1100">
+                <a:latin typeface="Arial" panose="020B0604020202020204" pitchFamily="34" charset="0"/>
+              </a:rPr>
+              <a:t>✅ Yeni </a:t>
+            </a:r>
+            <a:r>
+              <a:rPr lang="az-Latn-AZ" altLang="en-US" sz="1100" b="1">
+                <a:latin typeface="Arial" panose="020B0604020202020204" pitchFamily="34" charset="0"/>
+              </a:rPr>
+              <a:t>Policy</a:t>
+            </a:r>
+            <a:r>
+              <a:rPr lang="az-Latn-AZ" altLang="en-US" sz="1100">
+                <a:latin typeface="Arial" panose="020B0604020202020204" pitchFamily="34" charset="0"/>
+              </a:rPr>
+              <a:t> faylı yarat – adı: </a:t>
+            </a:r>
+            <a:r>
+              <a:rPr lang="az-Latn-AZ" altLang="en-US" sz="1100" b="1">
+                <a:latin typeface="Arial" panose="020B0604020202020204" pitchFamily="34" charset="0"/>
+              </a:rPr>
+              <a:t>PostPolicy</a:t>
+            </a:r>
+            <a:r>
+              <a:rPr lang="az-Latn-AZ" altLang="en-US" sz="1100">
+                <a:latin typeface="Arial" panose="020B0604020202020204" pitchFamily="34" charset="0"/>
+              </a:rPr>
+              <a:t> olsun</a:t>
+            </a:r>
+          </a:p>
+          <a:p>
+            <a:pPr>
+              <a:lnSpc>
+                <a:spcPct val="150000"/>
+              </a:lnSpc>
+              <a:buNone/>
+            </a:pPr>
+            <a:r>
+              <a:rPr lang="az-Latn-AZ" altLang="en-US" sz="1100">
+                <a:latin typeface="Arial" panose="020B0604020202020204" pitchFamily="34" charset="0"/>
+              </a:rPr>
+              <a:t>✅ Bu Policy </a:t>
+            </a:r>
+            <a:r>
+              <a:rPr lang="az-Latn-AZ" altLang="en-US" sz="1100" b="1">
+                <a:latin typeface="Arial" panose="020B0604020202020204" pitchFamily="34" charset="0"/>
+              </a:rPr>
+              <a:t>Post</a:t>
+            </a:r>
+            <a:r>
+              <a:rPr lang="az-Latn-AZ" altLang="en-US" sz="1100">
+                <a:latin typeface="Arial" panose="020B0604020202020204" pitchFamily="34" charset="0"/>
+              </a:rPr>
+              <a:t> modelinə bağlı olsun</a:t>
+            </a:r>
+          </a:p>
+          <a:p>
+            <a:pPr>
+              <a:lnSpc>
+                <a:spcPct val="150000"/>
+              </a:lnSpc>
+              <a:buNone/>
+            </a:pPr>
+            <a:endParaRPr kumimoji="0" lang="az-Latn-AZ" altLang="en-US" sz="1100" b="0" i="0" u="none" strike="noStrike" cap="none" normalizeH="0" baseline="0">
+              <a:ln>
+                <a:noFill/>
+              </a:ln>
+              <a:solidFill>
+                <a:schemeClr val="tx1"/>
+              </a:solidFill>
+              <a:effectLst/>
+              <a:latin typeface="Arial" panose="020B0604020202020204" pitchFamily="34" charset="0"/>
+            </a:endParaRPr>
+          </a:p>
+          <a:p>
+            <a:pPr>
+              <a:lnSpc>
+                <a:spcPct val="150000"/>
+              </a:lnSpc>
+              <a:buNone/>
+            </a:pPr>
+            <a:endParaRPr lang="az-Latn-AZ" altLang="en-US" sz="1100">
+              <a:latin typeface="Arial" panose="020B0604020202020204" pitchFamily="34" charset="0"/>
+            </a:endParaRPr>
+          </a:p>
+          <a:p>
+            <a:pPr>
+              <a:lnSpc>
+                <a:spcPct val="150000"/>
+              </a:lnSpc>
+              <a:buNone/>
+            </a:pPr>
+            <a:r>
+              <a:rPr kumimoji="0" lang="az-Latn-AZ" altLang="en-US" sz="1100" b="1" i="0" u="none" strike="noStrike" cap="none" normalizeH="0" baseline="0">
                 <a:ln>
                   <a:noFill/>
                 </a:ln>
@@ -3379,101 +4228,497 @@
                 <a:effectLst/>
                 <a:latin typeface="Arial" panose="020B0604020202020204" pitchFamily="34" charset="0"/>
               </a:rPr>
-              <a:t>.</a:t>
+              <a:t>Nəticədə</a:t>
+            </a:r>
+            <a:r>
+              <a:rPr kumimoji="0" lang="az-Latn-AZ" altLang="en-US" sz="1100" b="0" i="0" u="none" strike="noStrike" cap="none" normalizeH="0" baseline="0">
+                <a:ln>
+                  <a:noFill/>
+                </a:ln>
+                <a:solidFill>
+                  <a:schemeClr val="tx1"/>
+                </a:solidFill>
+                <a:effectLst/>
+                <a:latin typeface="Arial" panose="020B0604020202020204" pitchFamily="34" charset="0"/>
+              </a:rPr>
+              <a:t>: Laravel avtomatik olaraq bu faylı yaradacaq:  </a:t>
+            </a:r>
+            <a:r>
+              <a:rPr kumimoji="0" lang="az-Latn-AZ" altLang="en-US" sz="1100" b="0" i="0" u="sng" strike="noStrike" cap="none" normalizeH="0" baseline="0">
+                <a:ln>
+                  <a:noFill/>
+                </a:ln>
+                <a:solidFill>
+                  <a:srgbClr val="00B0F0"/>
+                </a:solidFill>
+                <a:effectLst/>
+                <a:latin typeface="Arial" panose="020B0604020202020204" pitchFamily="34" charset="0"/>
+              </a:rPr>
+              <a:t>app/Policies/PostPolicy.php</a:t>
+            </a:r>
+            <a:r>
+              <a:rPr kumimoji="0" lang="az-Latn-AZ" altLang="en-US" sz="1100" b="0" i="0" u="none" strike="noStrike" cap="none" normalizeH="0" baseline="0">
+                <a:ln>
+                  <a:noFill/>
+                </a:ln>
+                <a:solidFill>
+                  <a:schemeClr val="tx1"/>
+                </a:solidFill>
+                <a:effectLst/>
+                <a:latin typeface="Arial" panose="020B0604020202020204" pitchFamily="34" charset="0"/>
+              </a:rPr>
+              <a:t> və içində sağ şəkildəki kimi method skeletləri olacaq.</a:t>
+            </a:r>
+          </a:p>
+          <a:p>
+            <a:pPr>
+              <a:lnSpc>
+                <a:spcPct val="150000"/>
+              </a:lnSpc>
+              <a:buNone/>
+            </a:pPr>
+            <a:endParaRPr kumimoji="0" lang="az-Latn-AZ" altLang="en-US" sz="1100" b="0" i="0" u="none" strike="noStrike" cap="none" normalizeH="0" baseline="0">
+              <a:ln>
+                <a:noFill/>
+              </a:ln>
+              <a:solidFill>
+                <a:schemeClr val="tx1"/>
+              </a:solidFill>
+              <a:effectLst/>
+              <a:latin typeface="Arial" panose="020B0604020202020204" pitchFamily="34" charset="0"/>
+            </a:endParaRPr>
+          </a:p>
+          <a:p>
+            <a:pPr>
+              <a:lnSpc>
+                <a:spcPct val="150000"/>
+              </a:lnSpc>
+              <a:buNone/>
+            </a:pPr>
+            <a:r>
+              <a:rPr kumimoji="0" lang="en-US" altLang="en-US" sz="1100" b="0" i="0" u="none" strike="noStrike" cap="none" normalizeH="0" baseline="0">
+                <a:ln>
+                  <a:noFill/>
+                </a:ln>
+                <a:solidFill>
+                  <a:schemeClr val="tx1"/>
+                </a:solidFill>
+                <a:effectLst/>
+                <a:latin typeface="Arial" panose="020B0604020202020204" pitchFamily="34" charset="0"/>
+              </a:rPr>
+              <a:t>Bu method-lar, </a:t>
+            </a:r>
+            <a:r>
+              <a:rPr kumimoji="0" lang="en-US" altLang="en-US" sz="1100" b="1" i="0" u="none" strike="noStrike" cap="none" normalizeH="0" baseline="0">
+                <a:ln>
+                  <a:noFill/>
+                </a:ln>
+                <a:solidFill>
+                  <a:srgbClr val="00B050"/>
+                </a:solidFill>
+                <a:effectLst/>
+                <a:latin typeface="Arial" panose="020B0604020202020204" pitchFamily="34" charset="0"/>
+              </a:rPr>
+              <a:t>Post</a:t>
+            </a:r>
+            <a:r>
+              <a:rPr kumimoji="0" lang="en-US" altLang="en-US" sz="1100" b="0" i="0" u="none" strike="noStrike" cap="none" normalizeH="0" baseline="0">
+                <a:ln>
+                  <a:noFill/>
+                </a:ln>
+                <a:solidFill>
+                  <a:schemeClr val="tx1"/>
+                </a:solidFill>
+                <a:effectLst/>
+                <a:latin typeface="Arial" panose="020B0604020202020204" pitchFamily="34" charset="0"/>
+              </a:rPr>
+              <a:t> </a:t>
+            </a:r>
+            <a:r>
+              <a:rPr kumimoji="0" lang="en-US" altLang="en-US" sz="1100" b="1" i="0" u="none" strike="noStrike" cap="none" normalizeH="0" baseline="0">
+                <a:ln>
+                  <a:noFill/>
+                </a:ln>
+                <a:solidFill>
+                  <a:schemeClr val="tx1"/>
+                </a:solidFill>
+                <a:effectLst/>
+                <a:latin typeface="Arial" panose="020B0604020202020204" pitchFamily="34" charset="0"/>
+              </a:rPr>
+              <a:t>modeli</a:t>
+            </a:r>
+            <a:r>
+              <a:rPr kumimoji="0" lang="en-US" altLang="en-US" sz="1100" b="0" i="0" u="none" strike="noStrike" cap="none" normalizeH="0" baseline="0">
+                <a:ln>
+                  <a:noFill/>
+                </a:ln>
+                <a:solidFill>
+                  <a:schemeClr val="tx1"/>
+                </a:solidFill>
+                <a:effectLst/>
+                <a:latin typeface="Arial" panose="020B0604020202020204" pitchFamily="34" charset="0"/>
+              </a:rPr>
+              <a:t> üçün icazə yoxlamalarını təyin etmək üçündür.</a:t>
+            </a:r>
+            <a:endParaRPr kumimoji="0" lang="ru-RU" altLang="en-US" sz="1100" b="0" i="0" u="none" strike="noStrike" cap="none" normalizeH="0" baseline="0">
+              <a:ln>
+                <a:noFill/>
+              </a:ln>
+              <a:solidFill>
+                <a:schemeClr val="tx1"/>
+              </a:solidFill>
+              <a:effectLst/>
+              <a:latin typeface="Arial" panose="020B0604020202020204" pitchFamily="34" charset="0"/>
+            </a:endParaRPr>
+          </a:p>
+          <a:p>
+            <a:pPr>
+              <a:lnSpc>
+                <a:spcPct val="150000"/>
+              </a:lnSpc>
+              <a:buNone/>
+            </a:pPr>
+            <a:endParaRPr kumimoji="0" lang="ru-RU" altLang="en-US" sz="1100" b="0" i="0" u="none" strike="noStrike" cap="none" normalizeH="0" baseline="0">
+              <a:ln>
+                <a:noFill/>
+              </a:ln>
+              <a:solidFill>
+                <a:schemeClr val="tx1"/>
+              </a:solidFill>
+              <a:effectLst/>
+              <a:latin typeface="Arial" panose="020B0604020202020204" pitchFamily="34" charset="0"/>
+            </a:endParaRPr>
+          </a:p>
+          <a:p>
+            <a:pPr>
+              <a:lnSpc>
+                <a:spcPct val="150000"/>
+              </a:lnSpc>
+              <a:buNone/>
+            </a:pPr>
+            <a:endParaRPr lang="ru-RU" altLang="en-US" sz="1100">
+              <a:latin typeface="Arial" panose="020B0604020202020204" pitchFamily="34" charset="0"/>
+            </a:endParaRPr>
+          </a:p>
+          <a:p>
+            <a:pPr>
+              <a:lnSpc>
+                <a:spcPct val="150000"/>
+              </a:lnSpc>
+              <a:buNone/>
+            </a:pPr>
+            <a:endParaRPr lang="ru-RU" altLang="en-US" sz="1100">
+              <a:latin typeface="Arial" panose="020B0604020202020204" pitchFamily="34" charset="0"/>
+            </a:endParaRPr>
+          </a:p>
+          <a:p>
+            <a:pPr>
+              <a:lnSpc>
+                <a:spcPct val="150000"/>
+              </a:lnSpc>
+              <a:buNone/>
+            </a:pPr>
+            <a:endParaRPr kumimoji="0" lang="ru-RU" altLang="en-US" sz="1100" b="0" i="0" u="none" strike="noStrike" cap="none" normalizeH="0" baseline="0">
+              <a:ln>
+                <a:noFill/>
+              </a:ln>
+              <a:solidFill>
+                <a:schemeClr val="tx1"/>
+              </a:solidFill>
+              <a:effectLst/>
+              <a:latin typeface="Arial" panose="020B0604020202020204" pitchFamily="34" charset="0"/>
+            </a:endParaRPr>
+          </a:p>
+          <a:p>
+            <a:pPr>
+              <a:lnSpc>
+                <a:spcPct val="150000"/>
+              </a:lnSpc>
+              <a:buNone/>
+            </a:pPr>
+            <a:r>
+              <a:rPr kumimoji="0" lang="en-US" altLang="en-US" sz="1100" b="1" i="0" u="none" strike="noStrike" cap="none" normalizeH="0" baseline="0">
+                <a:ln>
+                  <a:noFill/>
+                </a:ln>
+                <a:solidFill>
+                  <a:srgbClr val="FF0000"/>
+                </a:solidFill>
+                <a:effectLst/>
+                <a:latin typeface="Arial" panose="020B0604020202020204" pitchFamily="34" charset="0"/>
+              </a:rPr>
+              <a:t>PostPolicy faylının izahı</a:t>
+            </a:r>
+            <a:r>
+              <a:rPr lang="ru-RU" altLang="en-US" sz="1100">
+                <a:latin typeface="Arial" panose="020B0604020202020204" pitchFamily="34" charset="0"/>
+              </a:rPr>
+              <a:t>: </a:t>
+            </a:r>
+            <a:r>
+              <a:rPr lang="en-US" altLang="en-US" sz="1100">
+                <a:latin typeface="Arial" panose="020B0604020202020204" pitchFamily="34" charset="0"/>
+              </a:rPr>
+              <a:t>Bu </a:t>
+            </a:r>
+            <a:r>
+              <a:rPr lang="en-US" altLang="en-US" sz="1100" b="1">
+                <a:latin typeface="Arial" panose="020B0604020202020204" pitchFamily="34" charset="0"/>
+              </a:rPr>
+              <a:t>class</a:t>
+            </a:r>
+            <a:r>
+              <a:rPr lang="en-US" altLang="en-US" sz="1100">
+                <a:latin typeface="Arial" panose="020B0604020202020204" pitchFamily="34" charset="0"/>
+              </a:rPr>
+              <a:t>, </a:t>
+            </a:r>
+            <a:r>
+              <a:rPr lang="en-US" altLang="en-US" sz="1100" b="1">
+                <a:solidFill>
+                  <a:srgbClr val="00B050"/>
+                </a:solidFill>
+                <a:latin typeface="Arial" panose="020B0604020202020204" pitchFamily="34" charset="0"/>
+              </a:rPr>
+              <a:t>Post modeli üçün </a:t>
+            </a:r>
+            <a:r>
+              <a:rPr lang="en-US" altLang="en-US" sz="1100">
+                <a:latin typeface="Arial" panose="020B0604020202020204" pitchFamily="34" charset="0"/>
+              </a:rPr>
+              <a:t>"kim nə edə bilər" sualını cavablayır.</a:t>
+            </a:r>
+            <a:endParaRPr lang="ru-RU" altLang="en-US" sz="1100">
+              <a:latin typeface="Arial" panose="020B0604020202020204" pitchFamily="34" charset="0"/>
+            </a:endParaRPr>
+          </a:p>
+          <a:p>
+            <a:pPr>
+              <a:lnSpc>
+                <a:spcPct val="150000"/>
+              </a:lnSpc>
+              <a:buNone/>
+            </a:pPr>
+            <a:endParaRPr kumimoji="0" lang="ru-RU" altLang="en-US" sz="1100" b="0" i="0" u="none" strike="noStrike" cap="none" normalizeH="0" baseline="0">
+              <a:ln>
+                <a:noFill/>
+              </a:ln>
+              <a:solidFill>
+                <a:schemeClr val="tx1"/>
+              </a:solidFill>
+              <a:effectLst/>
+              <a:latin typeface="Arial" panose="020B0604020202020204" pitchFamily="34" charset="0"/>
+            </a:endParaRPr>
+          </a:p>
+          <a:p>
+            <a:pPr>
+              <a:lnSpc>
+                <a:spcPct val="150000"/>
+              </a:lnSpc>
+              <a:buNone/>
+            </a:pPr>
+            <a:endParaRPr lang="ru-RU" altLang="en-US" sz="1100">
+              <a:latin typeface="Arial" panose="020B0604020202020204" pitchFamily="34" charset="0"/>
+            </a:endParaRPr>
+          </a:p>
+          <a:p>
+            <a:pPr>
+              <a:lnSpc>
+                <a:spcPct val="150000"/>
+              </a:lnSpc>
+              <a:buNone/>
+            </a:pPr>
+            <a:endParaRPr lang="ru-RU" altLang="en-US" sz="1100">
+              <a:latin typeface="Arial" panose="020B0604020202020204" pitchFamily="34" charset="0"/>
+            </a:endParaRPr>
+          </a:p>
+          <a:p>
+            <a:pPr>
+              <a:lnSpc>
+                <a:spcPct val="150000"/>
+              </a:lnSpc>
+              <a:buNone/>
+            </a:pPr>
+            <a:endParaRPr lang="ru-RU" altLang="en-US" sz="1100">
+              <a:latin typeface="Arial" panose="020B0604020202020204" pitchFamily="34" charset="0"/>
+            </a:endParaRPr>
+          </a:p>
+          <a:p>
+            <a:pPr>
+              <a:lnSpc>
+                <a:spcPct val="150000"/>
+              </a:lnSpc>
+              <a:buNone/>
+            </a:pPr>
+            <a:endParaRPr kumimoji="0" lang="ru-RU" altLang="en-US" sz="1100" b="0" i="0" u="none" strike="noStrike" cap="none" normalizeH="0" baseline="0">
+              <a:ln>
+                <a:noFill/>
+              </a:ln>
+              <a:solidFill>
+                <a:schemeClr val="tx1"/>
+              </a:solidFill>
+              <a:effectLst/>
+              <a:latin typeface="Arial" panose="020B0604020202020204" pitchFamily="34" charset="0"/>
+            </a:endParaRPr>
+          </a:p>
+          <a:p>
+            <a:pPr>
+              <a:lnSpc>
+                <a:spcPct val="150000"/>
+              </a:lnSpc>
+              <a:buNone/>
+            </a:pPr>
+            <a:r>
+              <a:rPr kumimoji="0" lang="en-US" altLang="en-US" sz="1100" b="0" i="0" u="none" strike="noStrike" cap="none" normalizeH="0" baseline="0">
+                <a:ln>
+                  <a:noFill/>
+                </a:ln>
+                <a:solidFill>
+                  <a:schemeClr val="tx1"/>
+                </a:solidFill>
+                <a:effectLst/>
+                <a:latin typeface="Arial" panose="020B0604020202020204" pitchFamily="34" charset="0"/>
+              </a:rPr>
+              <a:t>Bu kod </a:t>
+            </a:r>
+            <a:r>
+              <a:rPr lang="en-US" altLang="en-US" sz="1100">
+                <a:latin typeface="Arial" panose="020B0604020202020204" pitchFamily="34" charset="0"/>
+              </a:rPr>
+              <a:t>o </a:t>
+            </a:r>
+            <a:r>
+              <a:rPr kumimoji="0" lang="en-US" altLang="en-US" sz="1100" b="0" i="0" u="none" strike="noStrike" cap="none" normalizeH="0" baseline="0">
+                <a:ln>
+                  <a:noFill/>
+                </a:ln>
+                <a:solidFill>
+                  <a:schemeClr val="tx1"/>
+                </a:solidFill>
+                <a:effectLst/>
+                <a:latin typeface="Arial" panose="020B0604020202020204" pitchFamily="34" charset="0"/>
+              </a:rPr>
+              <a:t>deməkdir ki, yalnız </a:t>
+            </a:r>
+            <a:r>
+              <a:rPr kumimoji="0" lang="en-US" altLang="en-US" sz="1100" b="1" i="0" u="none" strike="noStrike" cap="none" normalizeH="0" baseline="0">
+                <a:ln>
+                  <a:noFill/>
+                </a:ln>
+                <a:solidFill>
+                  <a:schemeClr val="tx1"/>
+                </a:solidFill>
+                <a:effectLst/>
+                <a:latin typeface="Arial" panose="020B0604020202020204" pitchFamily="34" charset="0"/>
+              </a:rPr>
+              <a:t>admin</a:t>
+            </a:r>
+            <a:r>
+              <a:rPr kumimoji="0" lang="en-US" altLang="en-US" sz="1100" b="0" i="0" u="none" strike="noStrike" cap="none" normalizeH="0" baseline="0">
+                <a:ln>
+                  <a:noFill/>
+                </a:ln>
+                <a:solidFill>
+                  <a:schemeClr val="tx1"/>
+                </a:solidFill>
+                <a:effectLst/>
+                <a:latin typeface="Arial" panose="020B0604020202020204" pitchFamily="34" charset="0"/>
+              </a:rPr>
+              <a:t> olan istifadəçilər </a:t>
+            </a:r>
+            <a:r>
+              <a:rPr kumimoji="0" lang="en-US" altLang="en-US" sz="1100" b="1" i="0" u="none" strike="noStrike" cap="none" normalizeH="0" baseline="0">
+                <a:ln>
+                  <a:noFill/>
+                </a:ln>
+                <a:solidFill>
+                  <a:schemeClr val="tx1"/>
+                </a:solidFill>
+                <a:effectLst/>
+                <a:latin typeface="Arial" panose="020B0604020202020204" pitchFamily="34" charset="0"/>
+              </a:rPr>
+              <a:t>post</a:t>
+            </a:r>
+            <a:r>
+              <a:rPr kumimoji="0" lang="en-US" altLang="en-US" sz="1100" b="0" i="0" u="none" strike="noStrike" cap="none" normalizeH="0" baseline="0">
+                <a:ln>
+                  <a:noFill/>
+                </a:ln>
+                <a:solidFill>
+                  <a:schemeClr val="tx1"/>
+                </a:solidFill>
+                <a:effectLst/>
+                <a:latin typeface="Arial" panose="020B0604020202020204" pitchFamily="34" charset="0"/>
+              </a:rPr>
+              <a:t> yarada bilər.</a:t>
             </a:r>
           </a:p>
         </p:txBody>
       </p:sp>
+      <p:pic>
+        <p:nvPicPr>
+          <p:cNvPr id="4" name="Picture 3">
+            <a:extLst>
+              <a:ext uri="{FF2B5EF4-FFF2-40B4-BE49-F238E27FC236}">
+                <a16:creationId xmlns:a16="http://schemas.microsoft.com/office/drawing/2014/main" id="{3BDF7ED7-3362-5BAB-3A2E-01843AF89D2D}"/>
+              </a:ext>
+            </a:extLst>
+          </p:cNvPr>
+          <p:cNvPicPr>
+            <a:picLocks noChangeAspect="1"/>
+          </p:cNvPicPr>
+          <p:nvPr/>
+        </p:nvPicPr>
+        <p:blipFill>
+          <a:blip r:embed="rId2"/>
+          <a:stretch>
+            <a:fillRect/>
+          </a:stretch>
+        </p:blipFill>
+        <p:spPr>
+          <a:xfrm>
+            <a:off x="4857645" y="0"/>
+            <a:ext cx="7334355" cy="6858000"/>
+          </a:xfrm>
+          <a:prstGeom prst="rect">
+            <a:avLst/>
+          </a:prstGeom>
+        </p:spPr>
+      </p:pic>
+      <p:pic>
+        <p:nvPicPr>
+          <p:cNvPr id="6" name="Picture 5">
+            <a:extLst>
+              <a:ext uri="{FF2B5EF4-FFF2-40B4-BE49-F238E27FC236}">
+                <a16:creationId xmlns:a16="http://schemas.microsoft.com/office/drawing/2014/main" id="{0487C465-7015-2B1D-509F-75F3E98D43A7}"/>
+              </a:ext>
+            </a:extLst>
+          </p:cNvPr>
+          <p:cNvPicPr>
+            <a:picLocks noChangeAspect="1"/>
+          </p:cNvPicPr>
+          <p:nvPr/>
+        </p:nvPicPr>
+        <p:blipFill>
+          <a:blip r:embed="rId3"/>
+          <a:stretch>
+            <a:fillRect/>
+          </a:stretch>
+        </p:blipFill>
+        <p:spPr>
+          <a:xfrm>
+            <a:off x="92364" y="5217766"/>
+            <a:ext cx="3086531" cy="905001"/>
+          </a:xfrm>
+          <a:prstGeom prst="rect">
+            <a:avLst/>
+          </a:prstGeom>
+        </p:spPr>
+      </p:pic>
     </p:spTree>
     <p:extLst>
       <p:ext uri="{BB962C8B-B14F-4D97-AF65-F5344CB8AC3E}">
         <p14:creationId xmlns:p14="http://schemas.microsoft.com/office/powerpoint/2010/main" val="2486611332"/>
-      </p:ext>
-    </p:extLst>
-  </p:cSld>
-  <p:clrMapOvr>
-    <a:masterClrMapping/>
-  </p:clrMapOvr>
-</p:sld>
-</file>
-
-<file path=ppt/slides/slide2.xml><?xml version="1.0" encoding="utf-8"?>
-<p:sld xmlns:a="http://schemas.openxmlformats.org/drawingml/2006/main" xmlns:r="http://schemas.openxmlformats.org/officeDocument/2006/relationships" xmlns:p="http://schemas.openxmlformats.org/presentationml/2006/main">
-  <p:cSld>
-    <p:spTree>
-      <p:nvGrpSpPr>
-        <p:cNvPr id="1" name="">
-          <a:extLst>
-            <a:ext uri="{FF2B5EF4-FFF2-40B4-BE49-F238E27FC236}">
-              <a16:creationId xmlns:a16="http://schemas.microsoft.com/office/drawing/2014/main" id="{F6C13FCC-E5C4-2350-20C6-89DF22D1F3E0}"/>
-            </a:ext>
-          </a:extLst>
-        </p:cNvPr>
-        <p:cNvGrpSpPr/>
-        <p:nvPr/>
-      </p:nvGrpSpPr>
-      <p:grpSpPr>
-        <a:xfrm>
-          <a:off x="0" y="0"/>
-          <a:ext cx="0" cy="0"/>
-          <a:chOff x="0" y="0"/>
-          <a:chExt cx="0" cy="0"/>
-        </a:xfrm>
-      </p:grpSpPr>
-      <p:sp>
-        <p:nvSpPr>
-          <p:cNvPr id="3" name="TextBox 2">
-            <a:extLst>
-              <a:ext uri="{FF2B5EF4-FFF2-40B4-BE49-F238E27FC236}">
-                <a16:creationId xmlns:a16="http://schemas.microsoft.com/office/drawing/2014/main" id="{81782941-0DB4-B0DA-A36A-31CA5EC69992}"/>
-              </a:ext>
-            </a:extLst>
-          </p:cNvPr>
-          <p:cNvSpPr txBox="1"/>
-          <p:nvPr/>
-        </p:nvSpPr>
-        <p:spPr>
-          <a:xfrm>
-            <a:off x="217714" y="255046"/>
-            <a:ext cx="11756571" cy="355354"/>
-          </a:xfrm>
-          <a:prstGeom prst="rect">
-            <a:avLst/>
-          </a:prstGeom>
-          <a:noFill/>
-        </p:spPr>
-        <p:txBody>
-          <a:bodyPr wrap="square">
-            <a:spAutoFit/>
-          </a:bodyPr>
-          <a:lstStyle/>
-          <a:p>
-            <a:pPr>
-              <a:lnSpc>
-                <a:spcPct val="150000"/>
-              </a:lnSpc>
-              <a:buNone/>
-            </a:pPr>
-            <a:r>
-              <a:rPr kumimoji="0" lang="en-US" altLang="en-US" sz="1300" b="0" i="0" u="none" strike="noStrike" cap="none" normalizeH="0" baseline="0">
-                <a:ln>
-                  <a:noFill/>
-                </a:ln>
-                <a:solidFill>
-                  <a:schemeClr val="tx1"/>
-                </a:solidFill>
-                <a:effectLst/>
-                <a:latin typeface="Arial" panose="020B0604020202020204" pitchFamily="34" charset="0"/>
-              </a:rPr>
-              <a:t>.</a:t>
-            </a:r>
-          </a:p>
-        </p:txBody>
-      </p:sp>
-    </p:spTree>
-    <p:extLst>
-      <p:ext uri="{BB962C8B-B14F-4D97-AF65-F5344CB8AC3E}">
-        <p14:creationId xmlns:p14="http://schemas.microsoft.com/office/powerpoint/2010/main" val="2667607345"/>
       </p:ext>
     </p:extLst>
   </p:cSld>
@@ -3520,6 +4765,3876 @@
         </p:nvSpPr>
         <p:spPr>
           <a:xfrm>
+            <a:off x="217714" y="107264"/>
+            <a:ext cx="11756571" cy="355354"/>
+          </a:xfrm>
+          <a:prstGeom prst="rect">
+            <a:avLst/>
+          </a:prstGeom>
+          <a:noFill/>
+        </p:spPr>
+        <p:txBody>
+          <a:bodyPr wrap="square">
+            <a:spAutoFit/>
+          </a:bodyPr>
+          <a:lstStyle/>
+          <a:p>
+            <a:pPr>
+              <a:lnSpc>
+                <a:spcPct val="150000"/>
+              </a:lnSpc>
+              <a:buNone/>
+            </a:pPr>
+            <a:r>
+              <a:rPr lang="az-Latn-AZ" altLang="en-US" sz="1300">
+                <a:latin typeface="Arial" panose="020B0604020202020204" pitchFamily="34" charset="0"/>
+              </a:rPr>
+              <a:t>Ümumi kod strukturu bu cürdür. </a:t>
+            </a:r>
+            <a:r>
+              <a:rPr lang="az-Latn-AZ" altLang="en-US" sz="1300" b="1">
+                <a:latin typeface="Arial" panose="020B0604020202020204" pitchFamily="34" charset="0"/>
+              </a:rPr>
+              <a:t>PostController</a:t>
+            </a:r>
+            <a:r>
+              <a:rPr lang="az-Latn-AZ" altLang="en-US" sz="1300">
+                <a:latin typeface="Arial" panose="020B0604020202020204" pitchFamily="34" charset="0"/>
+              </a:rPr>
+              <a:t> -in ardı var. Sadəcə uzun olduğu üçün sığmadı. </a:t>
+            </a:r>
+            <a:endParaRPr kumimoji="0" lang="en-US" altLang="en-US" sz="1300" b="0" i="0" u="none" strike="noStrike" cap="none" normalizeH="0" baseline="0">
+              <a:ln>
+                <a:noFill/>
+              </a:ln>
+              <a:solidFill>
+                <a:schemeClr val="tx1"/>
+              </a:solidFill>
+              <a:effectLst/>
+              <a:latin typeface="Arial" panose="020B0604020202020204" pitchFamily="34" charset="0"/>
+            </a:endParaRPr>
+          </a:p>
+        </p:txBody>
+      </p:sp>
+      <p:pic>
+        <p:nvPicPr>
+          <p:cNvPr id="4" name="Picture 3">
+            <a:extLst>
+              <a:ext uri="{FF2B5EF4-FFF2-40B4-BE49-F238E27FC236}">
+                <a16:creationId xmlns:a16="http://schemas.microsoft.com/office/drawing/2014/main" id="{E24CD0B2-3AEC-6304-870D-6CB58363EC45}"/>
+              </a:ext>
+            </a:extLst>
+          </p:cNvPr>
+          <p:cNvPicPr>
+            <a:picLocks noChangeAspect="1"/>
+          </p:cNvPicPr>
+          <p:nvPr/>
+        </p:nvPicPr>
+        <p:blipFill>
+          <a:blip r:embed="rId2"/>
+          <a:stretch>
+            <a:fillRect/>
+          </a:stretch>
+        </p:blipFill>
+        <p:spPr>
+          <a:xfrm>
+            <a:off x="0" y="532145"/>
+            <a:ext cx="12192000" cy="6325855"/>
+          </a:xfrm>
+          <a:prstGeom prst="rect">
+            <a:avLst/>
+          </a:prstGeom>
+        </p:spPr>
+      </p:pic>
+    </p:spTree>
+    <p:extLst>
+      <p:ext uri="{BB962C8B-B14F-4D97-AF65-F5344CB8AC3E}">
+        <p14:creationId xmlns:p14="http://schemas.microsoft.com/office/powerpoint/2010/main" val="3095838342"/>
+      </p:ext>
+    </p:extLst>
+  </p:cSld>
+  <p:clrMapOvr>
+    <a:masterClrMapping/>
+  </p:clrMapOvr>
+</p:sld>
+</file>
+
+<file path=ppt/slides/slide4.xml><?xml version="1.0" encoding="utf-8"?>
+<p:sld xmlns:a="http://schemas.openxmlformats.org/drawingml/2006/main" xmlns:r="http://schemas.openxmlformats.org/officeDocument/2006/relationships" xmlns:p="http://schemas.openxmlformats.org/presentationml/2006/main">
+  <p:cSld>
+    <p:spTree>
+      <p:nvGrpSpPr>
+        <p:cNvPr id="1" name="">
+          <a:extLst>
+            <a:ext uri="{FF2B5EF4-FFF2-40B4-BE49-F238E27FC236}">
+              <a16:creationId xmlns:a16="http://schemas.microsoft.com/office/drawing/2014/main" id="{001643DE-700D-6C36-6863-2B3C9764B176}"/>
+            </a:ext>
+          </a:extLst>
+        </p:cNvPr>
+        <p:cNvGrpSpPr/>
+        <p:nvPr/>
+      </p:nvGrpSpPr>
+      <p:grpSpPr>
+        <a:xfrm>
+          <a:off x="0" y="0"/>
+          <a:ext cx="0" cy="0"/>
+          <a:chOff x="0" y="0"/>
+          <a:chExt cx="0" cy="0"/>
+        </a:xfrm>
+      </p:grpSpPr>
+      <p:sp>
+        <p:nvSpPr>
+          <p:cNvPr id="3" name="TextBox 2">
+            <a:extLst>
+              <a:ext uri="{FF2B5EF4-FFF2-40B4-BE49-F238E27FC236}">
+                <a16:creationId xmlns:a16="http://schemas.microsoft.com/office/drawing/2014/main" id="{346E34F6-00C0-C62D-8924-26DAC0F849F8}"/>
+              </a:ext>
+            </a:extLst>
+          </p:cNvPr>
+          <p:cNvSpPr txBox="1"/>
+          <p:nvPr/>
+        </p:nvSpPr>
+        <p:spPr>
+          <a:xfrm>
+            <a:off x="92364" y="255046"/>
+            <a:ext cx="12053454" cy="2854051"/>
+          </a:xfrm>
+          <a:prstGeom prst="rect">
+            <a:avLst/>
+          </a:prstGeom>
+          <a:noFill/>
+        </p:spPr>
+        <p:txBody>
+          <a:bodyPr wrap="square">
+            <a:spAutoFit/>
+          </a:bodyPr>
+          <a:lstStyle/>
+          <a:p>
+            <a:pPr>
+              <a:lnSpc>
+                <a:spcPct val="150000"/>
+              </a:lnSpc>
+              <a:buNone/>
+            </a:pPr>
+            <a:r>
+              <a:rPr kumimoji="0" lang="en-US" altLang="en-US" sz="1100" b="1" i="0" u="none" strike="noStrike" cap="none" normalizeH="0" baseline="0">
+                <a:ln>
+                  <a:noFill/>
+                </a:ln>
+                <a:solidFill>
+                  <a:srgbClr val="FF0000"/>
+                </a:solidFill>
+                <a:effectLst/>
+                <a:latin typeface="Arial" panose="020B0604020202020204" pitchFamily="34" charset="0"/>
+              </a:rPr>
+              <a:t>PostPolicy faylının izahı</a:t>
+            </a:r>
+            <a:r>
+              <a:rPr lang="ru-RU" altLang="en-US" sz="1100">
+                <a:latin typeface="Arial" panose="020B0604020202020204" pitchFamily="34" charset="0"/>
+              </a:rPr>
+              <a:t>: </a:t>
+            </a:r>
+            <a:r>
+              <a:rPr lang="en-US" altLang="en-US" sz="1100">
+                <a:latin typeface="Arial" panose="020B0604020202020204" pitchFamily="34" charset="0"/>
+              </a:rPr>
+              <a:t>Bu </a:t>
+            </a:r>
+            <a:r>
+              <a:rPr lang="en-US" altLang="en-US" sz="1100" b="1">
+                <a:latin typeface="Arial" panose="020B0604020202020204" pitchFamily="34" charset="0"/>
+              </a:rPr>
+              <a:t>class</a:t>
+            </a:r>
+            <a:r>
+              <a:rPr lang="en-US" altLang="en-US" sz="1100">
+                <a:latin typeface="Arial" panose="020B0604020202020204" pitchFamily="34" charset="0"/>
+              </a:rPr>
+              <a:t>, </a:t>
+            </a:r>
+            <a:r>
+              <a:rPr lang="en-US" altLang="en-US" sz="1100" b="1">
+                <a:solidFill>
+                  <a:srgbClr val="00B050"/>
+                </a:solidFill>
+                <a:latin typeface="Arial" panose="020B0604020202020204" pitchFamily="34" charset="0"/>
+              </a:rPr>
+              <a:t>Post modeli üçün </a:t>
+            </a:r>
+            <a:r>
+              <a:rPr lang="en-US" altLang="en-US" sz="1100">
+                <a:latin typeface="Arial" panose="020B0604020202020204" pitchFamily="34" charset="0"/>
+              </a:rPr>
+              <a:t>"kim nə edə bilər" sualını cavablayır.</a:t>
+            </a:r>
+            <a:endParaRPr lang="ru-RU" altLang="en-US" sz="1100">
+              <a:latin typeface="Arial" panose="020B0604020202020204" pitchFamily="34" charset="0"/>
+            </a:endParaRPr>
+          </a:p>
+          <a:p>
+            <a:pPr>
+              <a:lnSpc>
+                <a:spcPct val="150000"/>
+              </a:lnSpc>
+              <a:buNone/>
+            </a:pPr>
+            <a:endParaRPr kumimoji="0" lang="ru-RU" altLang="en-US" sz="1100" b="0" i="0" u="none" strike="noStrike" cap="none" normalizeH="0" baseline="0">
+              <a:ln>
+                <a:noFill/>
+              </a:ln>
+              <a:solidFill>
+                <a:schemeClr val="tx1"/>
+              </a:solidFill>
+              <a:effectLst/>
+              <a:latin typeface="Arial" panose="020B0604020202020204" pitchFamily="34" charset="0"/>
+            </a:endParaRPr>
+          </a:p>
+          <a:p>
+            <a:pPr>
+              <a:lnSpc>
+                <a:spcPct val="150000"/>
+              </a:lnSpc>
+              <a:buNone/>
+            </a:pPr>
+            <a:endParaRPr lang="ru-RU" altLang="en-US" sz="1100">
+              <a:latin typeface="Arial" panose="020B0604020202020204" pitchFamily="34" charset="0"/>
+            </a:endParaRPr>
+          </a:p>
+          <a:p>
+            <a:pPr>
+              <a:lnSpc>
+                <a:spcPct val="150000"/>
+              </a:lnSpc>
+              <a:buNone/>
+            </a:pPr>
+            <a:endParaRPr lang="ru-RU" altLang="en-US" sz="1100">
+              <a:latin typeface="Arial" panose="020B0604020202020204" pitchFamily="34" charset="0"/>
+            </a:endParaRPr>
+          </a:p>
+          <a:p>
+            <a:pPr>
+              <a:lnSpc>
+                <a:spcPct val="150000"/>
+              </a:lnSpc>
+              <a:buNone/>
+            </a:pPr>
+            <a:endParaRPr lang="ru-RU" altLang="en-US" sz="1100">
+              <a:latin typeface="Arial" panose="020B0604020202020204" pitchFamily="34" charset="0"/>
+            </a:endParaRPr>
+          </a:p>
+          <a:p>
+            <a:pPr>
+              <a:lnSpc>
+                <a:spcPct val="150000"/>
+              </a:lnSpc>
+              <a:buNone/>
+            </a:pPr>
+            <a:endParaRPr kumimoji="0" lang="ru-RU" altLang="en-US" sz="1100" b="0" i="0" u="none" strike="noStrike" cap="none" normalizeH="0" baseline="0">
+              <a:ln>
+                <a:noFill/>
+              </a:ln>
+              <a:solidFill>
+                <a:schemeClr val="tx1"/>
+              </a:solidFill>
+              <a:effectLst/>
+              <a:latin typeface="Arial" panose="020B0604020202020204" pitchFamily="34" charset="0"/>
+            </a:endParaRPr>
+          </a:p>
+          <a:p>
+            <a:pPr>
+              <a:lnSpc>
+                <a:spcPct val="150000"/>
+              </a:lnSpc>
+              <a:buNone/>
+            </a:pPr>
+            <a:r>
+              <a:rPr kumimoji="0" lang="en-US" altLang="en-US" sz="1100" b="0" i="0" u="none" strike="noStrike" cap="none" normalizeH="0" baseline="0">
+                <a:ln>
+                  <a:noFill/>
+                </a:ln>
+                <a:solidFill>
+                  <a:schemeClr val="tx1"/>
+                </a:solidFill>
+                <a:effectLst/>
+                <a:latin typeface="Arial" panose="020B0604020202020204" pitchFamily="34" charset="0"/>
+              </a:rPr>
+              <a:t>Bu kod </a:t>
+            </a:r>
+            <a:r>
+              <a:rPr lang="en-US" altLang="en-US" sz="1100">
+                <a:latin typeface="Arial" panose="020B0604020202020204" pitchFamily="34" charset="0"/>
+              </a:rPr>
+              <a:t>o </a:t>
+            </a:r>
+            <a:r>
+              <a:rPr kumimoji="0" lang="en-US" altLang="en-US" sz="1100" b="0" i="0" u="none" strike="noStrike" cap="none" normalizeH="0" baseline="0">
+                <a:ln>
+                  <a:noFill/>
+                </a:ln>
+                <a:solidFill>
+                  <a:schemeClr val="tx1"/>
+                </a:solidFill>
+                <a:effectLst/>
+                <a:latin typeface="Arial" panose="020B0604020202020204" pitchFamily="34" charset="0"/>
+              </a:rPr>
+              <a:t>deməkdir ki, yalnız </a:t>
+            </a:r>
+            <a:r>
+              <a:rPr kumimoji="0" lang="en-US" altLang="en-US" sz="1100" b="1" i="0" u="none" strike="noStrike" cap="none" normalizeH="0" baseline="0">
+                <a:ln>
+                  <a:noFill/>
+                </a:ln>
+                <a:solidFill>
+                  <a:schemeClr val="tx1"/>
+                </a:solidFill>
+                <a:effectLst/>
+                <a:latin typeface="Arial" panose="020B0604020202020204" pitchFamily="34" charset="0"/>
+              </a:rPr>
+              <a:t>admin</a:t>
+            </a:r>
+            <a:r>
+              <a:rPr kumimoji="0" lang="en-US" altLang="en-US" sz="1100" b="0" i="0" u="none" strike="noStrike" cap="none" normalizeH="0" baseline="0">
+                <a:ln>
+                  <a:noFill/>
+                </a:ln>
+                <a:solidFill>
+                  <a:schemeClr val="tx1"/>
+                </a:solidFill>
+                <a:effectLst/>
+                <a:latin typeface="Arial" panose="020B0604020202020204" pitchFamily="34" charset="0"/>
+              </a:rPr>
+              <a:t> olan istifadəçilər </a:t>
+            </a:r>
+            <a:r>
+              <a:rPr kumimoji="0" lang="en-US" altLang="en-US" sz="1100" b="1" i="0" u="none" strike="noStrike" cap="none" normalizeH="0" baseline="0">
+                <a:ln>
+                  <a:noFill/>
+                </a:ln>
+                <a:solidFill>
+                  <a:schemeClr val="tx1"/>
+                </a:solidFill>
+                <a:effectLst/>
+                <a:latin typeface="Arial" panose="020B0604020202020204" pitchFamily="34" charset="0"/>
+              </a:rPr>
+              <a:t>post</a:t>
+            </a:r>
+            <a:r>
+              <a:rPr kumimoji="0" lang="en-US" altLang="en-US" sz="1100" b="0" i="0" u="none" strike="noStrike" cap="none" normalizeH="0" baseline="0">
+                <a:ln>
+                  <a:noFill/>
+                </a:ln>
+                <a:solidFill>
+                  <a:schemeClr val="tx1"/>
+                </a:solidFill>
+                <a:effectLst/>
+                <a:latin typeface="Arial" panose="020B0604020202020204" pitchFamily="34" charset="0"/>
+              </a:rPr>
+              <a:t> yarada bilər.</a:t>
+            </a:r>
+            <a:endParaRPr kumimoji="0" lang="az-Latn-AZ" altLang="en-US" sz="1100" b="0" i="0" u="none" strike="noStrike" cap="none" normalizeH="0" baseline="0">
+              <a:ln>
+                <a:noFill/>
+              </a:ln>
+              <a:solidFill>
+                <a:schemeClr val="tx1"/>
+              </a:solidFill>
+              <a:effectLst/>
+              <a:latin typeface="Arial" panose="020B0604020202020204" pitchFamily="34" charset="0"/>
+            </a:endParaRPr>
+          </a:p>
+          <a:p>
+            <a:pPr>
+              <a:lnSpc>
+                <a:spcPct val="150000"/>
+              </a:lnSpc>
+              <a:buNone/>
+            </a:pPr>
+            <a:endParaRPr lang="az-Latn-AZ" altLang="en-US" sz="1100">
+              <a:latin typeface="Arial" panose="020B0604020202020204" pitchFamily="34" charset="0"/>
+            </a:endParaRPr>
+          </a:p>
+          <a:p>
+            <a:pPr>
+              <a:lnSpc>
+                <a:spcPct val="150000"/>
+              </a:lnSpc>
+              <a:buNone/>
+            </a:pPr>
+            <a:endParaRPr lang="az-Latn-AZ" altLang="en-US" sz="1100">
+              <a:latin typeface="Arial" panose="020B0604020202020204" pitchFamily="34" charset="0"/>
+            </a:endParaRPr>
+          </a:p>
+          <a:p>
+            <a:pPr>
+              <a:lnSpc>
+                <a:spcPct val="150000"/>
+              </a:lnSpc>
+              <a:buNone/>
+            </a:pPr>
+            <a:endParaRPr lang="az-Latn-AZ" altLang="en-US" sz="1100">
+              <a:latin typeface="Arial" panose="020B0604020202020204" pitchFamily="34" charset="0"/>
+            </a:endParaRPr>
+          </a:p>
+          <a:p>
+            <a:pPr>
+              <a:lnSpc>
+                <a:spcPct val="150000"/>
+              </a:lnSpc>
+              <a:buNone/>
+            </a:pPr>
+            <a:r>
+              <a:rPr kumimoji="0" lang="en-US" altLang="en-US" sz="1100" b="1" i="0" u="none" strike="noStrike" cap="none" normalizeH="0" baseline="0">
+                <a:ln>
+                  <a:noFill/>
+                </a:ln>
+                <a:solidFill>
+                  <a:schemeClr val="tx1"/>
+                </a:solidFill>
+                <a:effectLst/>
+                <a:latin typeface="Arial" panose="020B0604020202020204" pitchFamily="34" charset="0"/>
+              </a:rPr>
+              <a:t>Bütün method-ların funksiyası</a:t>
+            </a:r>
+            <a:r>
+              <a:rPr kumimoji="0" lang="en-US" altLang="en-US" sz="1100" b="0" i="0" u="none" strike="noStrike" cap="none" normalizeH="0" baseline="0">
+                <a:ln>
+                  <a:noFill/>
+                </a:ln>
+                <a:solidFill>
+                  <a:schemeClr val="tx1"/>
+                </a:solidFill>
+                <a:effectLst/>
+                <a:latin typeface="Arial" panose="020B0604020202020204" pitchFamily="34" charset="0"/>
+              </a:rPr>
+              <a:t>:</a:t>
+            </a:r>
+          </a:p>
+        </p:txBody>
+      </p:sp>
+      <p:pic>
+        <p:nvPicPr>
+          <p:cNvPr id="6" name="Picture 5">
+            <a:extLst>
+              <a:ext uri="{FF2B5EF4-FFF2-40B4-BE49-F238E27FC236}">
+                <a16:creationId xmlns:a16="http://schemas.microsoft.com/office/drawing/2014/main" id="{EF09875F-6487-C62D-CF88-525387EEB078}"/>
+              </a:ext>
+            </a:extLst>
+          </p:cNvPr>
+          <p:cNvPicPr>
+            <a:picLocks noChangeAspect="1"/>
+          </p:cNvPicPr>
+          <p:nvPr/>
+        </p:nvPicPr>
+        <p:blipFill>
+          <a:blip r:embed="rId2"/>
+          <a:stretch>
+            <a:fillRect/>
+          </a:stretch>
+        </p:blipFill>
+        <p:spPr>
+          <a:xfrm>
+            <a:off x="92364" y="721739"/>
+            <a:ext cx="3086531" cy="905001"/>
+          </a:xfrm>
+          <a:prstGeom prst="rect">
+            <a:avLst/>
+          </a:prstGeom>
+        </p:spPr>
+      </p:pic>
+      <p:graphicFrame>
+        <p:nvGraphicFramePr>
+          <p:cNvPr id="2" name="Table 1">
+            <a:extLst>
+              <a:ext uri="{FF2B5EF4-FFF2-40B4-BE49-F238E27FC236}">
+                <a16:creationId xmlns:a16="http://schemas.microsoft.com/office/drawing/2014/main" id="{661CF685-7A55-626B-1F3B-AB1440ED7E91}"/>
+              </a:ext>
+            </a:extLst>
+          </p:cNvPr>
+          <p:cNvGraphicFramePr>
+            <a:graphicFrameLocks noGrp="1"/>
+          </p:cNvGraphicFramePr>
+          <p:nvPr>
+            <p:extLst>
+              <p:ext uri="{D42A27DB-BD31-4B8C-83A1-F6EECF244321}">
+                <p14:modId xmlns:p14="http://schemas.microsoft.com/office/powerpoint/2010/main" val="498888489"/>
+              </p:ext>
+            </p:extLst>
+          </p:nvPr>
+        </p:nvGraphicFramePr>
+        <p:xfrm>
+          <a:off x="92364" y="3135440"/>
+          <a:ext cx="5784596" cy="3150210"/>
+        </p:xfrm>
+        <a:graphic>
+          <a:graphicData uri="http://schemas.openxmlformats.org/drawingml/2006/table">
+            <a:tbl>
+              <a:tblPr/>
+              <a:tblGrid>
+                <a:gridCol w="1930400">
+                  <a:extLst>
+                    <a:ext uri="{9D8B030D-6E8A-4147-A177-3AD203B41FA5}">
+                      <a16:colId xmlns:a16="http://schemas.microsoft.com/office/drawing/2014/main" val="1255299776"/>
+                    </a:ext>
+                  </a:extLst>
+                </a:gridCol>
+                <a:gridCol w="3854196">
+                  <a:extLst>
+                    <a:ext uri="{9D8B030D-6E8A-4147-A177-3AD203B41FA5}">
+                      <a16:colId xmlns:a16="http://schemas.microsoft.com/office/drawing/2014/main" val="1149491574"/>
+                    </a:ext>
+                  </a:extLst>
+                </a:gridCol>
+              </a:tblGrid>
+              <a:tr h="589890">
+                <a:tc>
+                  <a:txBody>
+                    <a:bodyPr/>
+                    <a:lstStyle/>
+                    <a:p>
+                      <a:r>
+                        <a:rPr lang="en-US" b="1"/>
+                        <a:t>Method</a:t>
+                      </a:r>
+                    </a:p>
+                  </a:txBody>
+                  <a:tcPr anchor="ctr">
+                    <a:lnL w="12700" cap="flat" cmpd="sng" algn="ctr">
+                      <a:solidFill>
+                        <a:schemeClr val="tx1"/>
+                      </a:solidFill>
+                      <a:prstDash val="solid"/>
+                      <a:round/>
+                      <a:headEnd type="none" w="med" len="med"/>
+                      <a:tailEnd type="none" w="med" len="med"/>
+                    </a:lnL>
+                    <a:lnR w="12700" cap="flat" cmpd="sng" algn="ctr">
+                      <a:solidFill>
+                        <a:schemeClr val="tx1"/>
+                      </a:solidFill>
+                      <a:prstDash val="solid"/>
+                      <a:round/>
+                      <a:headEnd type="none" w="med" len="med"/>
+                      <a:tailEnd type="none" w="med" len="med"/>
+                    </a:lnR>
+                    <a:lnT w="12700" cap="flat" cmpd="sng" algn="ctr">
+                      <a:solidFill>
+                        <a:schemeClr val="tx1"/>
+                      </a:solidFill>
+                      <a:prstDash val="solid"/>
+                      <a:round/>
+                      <a:headEnd type="none" w="med" len="med"/>
+                      <a:tailEnd type="none" w="med" len="med"/>
+                    </a:lnT>
+                    <a:lnB w="12700" cap="flat" cmpd="sng" algn="ctr">
+                      <a:solidFill>
+                        <a:schemeClr val="tx1"/>
+                      </a:solidFill>
+                      <a:prstDash val="solid"/>
+                      <a:round/>
+                      <a:headEnd type="none" w="med" len="med"/>
+                      <a:tailEnd type="none" w="med" len="med"/>
+                    </a:lnB>
+                    <a:solidFill>
+                      <a:schemeClr val="accent2"/>
+                    </a:solidFill>
+                  </a:tcPr>
+                </a:tc>
+                <a:tc>
+                  <a:txBody>
+                    <a:bodyPr/>
+                    <a:lstStyle/>
+                    <a:p>
+                      <a:r>
+                        <a:rPr lang="en-US" b="1"/>
+                        <a:t>İcazə yoxlaması üçün istifadə olunur</a:t>
+                      </a:r>
+                    </a:p>
+                  </a:txBody>
+                  <a:tcPr anchor="ctr">
+                    <a:lnL w="12700" cap="flat" cmpd="sng" algn="ctr">
+                      <a:solidFill>
+                        <a:schemeClr val="tx1"/>
+                      </a:solidFill>
+                      <a:prstDash val="solid"/>
+                      <a:round/>
+                      <a:headEnd type="none" w="med" len="med"/>
+                      <a:tailEnd type="none" w="med" len="med"/>
+                    </a:lnL>
+                    <a:lnR w="12700" cap="flat" cmpd="sng" algn="ctr">
+                      <a:solidFill>
+                        <a:schemeClr val="tx1"/>
+                      </a:solidFill>
+                      <a:prstDash val="solid"/>
+                      <a:round/>
+                      <a:headEnd type="none" w="med" len="med"/>
+                      <a:tailEnd type="none" w="med" len="med"/>
+                    </a:lnR>
+                    <a:lnT w="12700" cap="flat" cmpd="sng" algn="ctr">
+                      <a:solidFill>
+                        <a:schemeClr val="tx1"/>
+                      </a:solidFill>
+                      <a:prstDash val="solid"/>
+                      <a:round/>
+                      <a:headEnd type="none" w="med" len="med"/>
+                      <a:tailEnd type="none" w="med" len="med"/>
+                    </a:lnT>
+                    <a:lnB w="12700" cap="flat" cmpd="sng" algn="ctr">
+                      <a:solidFill>
+                        <a:schemeClr val="tx1"/>
+                      </a:solidFill>
+                      <a:prstDash val="solid"/>
+                      <a:round/>
+                      <a:headEnd type="none" w="med" len="med"/>
+                      <a:tailEnd type="none" w="med" len="med"/>
+                    </a:lnB>
+                    <a:solidFill>
+                      <a:schemeClr val="accent2"/>
+                    </a:solidFill>
+                  </a:tcPr>
+                </a:tc>
+                <a:extLst>
+                  <a:ext uri="{0D108BD9-81ED-4DB2-BD59-A6C34878D82A}">
+                    <a16:rowId xmlns:a16="http://schemas.microsoft.com/office/drawing/2014/main" val="2295203132"/>
+                  </a:ext>
+                </a:extLst>
+              </a:tr>
+              <a:tr h="0">
+                <a:tc>
+                  <a:txBody>
+                    <a:bodyPr/>
+                    <a:lstStyle/>
+                    <a:p>
+                      <a:r>
+                        <a:rPr lang="en-US" b="1"/>
+                        <a:t>viewAny</a:t>
+                      </a:r>
+                    </a:p>
+                  </a:txBody>
+                  <a:tcPr anchor="ctr">
+                    <a:lnL w="12700" cap="flat" cmpd="sng" algn="ctr">
+                      <a:solidFill>
+                        <a:schemeClr val="tx1"/>
+                      </a:solidFill>
+                      <a:prstDash val="solid"/>
+                      <a:round/>
+                      <a:headEnd type="none" w="med" len="med"/>
+                      <a:tailEnd type="none" w="med" len="med"/>
+                    </a:lnL>
+                    <a:lnR w="12700" cap="flat" cmpd="sng" algn="ctr">
+                      <a:solidFill>
+                        <a:schemeClr val="tx1"/>
+                      </a:solidFill>
+                      <a:prstDash val="solid"/>
+                      <a:round/>
+                      <a:headEnd type="none" w="med" len="med"/>
+                      <a:tailEnd type="none" w="med" len="med"/>
+                    </a:lnR>
+                    <a:lnT w="12700" cap="flat" cmpd="sng" algn="ctr">
+                      <a:solidFill>
+                        <a:schemeClr val="tx1"/>
+                      </a:solidFill>
+                      <a:prstDash val="solid"/>
+                      <a:round/>
+                      <a:headEnd type="none" w="med" len="med"/>
+                      <a:tailEnd type="none" w="med" len="med"/>
+                    </a:lnT>
+                    <a:lnB w="12700" cap="flat" cmpd="sng" algn="ctr">
+                      <a:solidFill>
+                        <a:schemeClr val="tx1"/>
+                      </a:solidFill>
+                      <a:prstDash val="solid"/>
+                      <a:round/>
+                      <a:headEnd type="none" w="med" len="med"/>
+                      <a:tailEnd type="none" w="med" len="med"/>
+                    </a:lnB>
+                    <a:noFill/>
+                  </a:tcPr>
+                </a:tc>
+                <a:tc>
+                  <a:txBody>
+                    <a:bodyPr/>
+                    <a:lstStyle/>
+                    <a:p>
+                      <a:r>
+                        <a:rPr lang="en-US"/>
+                        <a:t>Bütün postları görmək icazəsi</a:t>
+                      </a:r>
+                    </a:p>
+                  </a:txBody>
+                  <a:tcPr anchor="ctr">
+                    <a:lnL w="12700" cap="flat" cmpd="sng" algn="ctr">
+                      <a:solidFill>
+                        <a:schemeClr val="tx1"/>
+                      </a:solidFill>
+                      <a:prstDash val="solid"/>
+                      <a:round/>
+                      <a:headEnd type="none" w="med" len="med"/>
+                      <a:tailEnd type="none" w="med" len="med"/>
+                    </a:lnL>
+                    <a:lnR w="12700" cap="flat" cmpd="sng" algn="ctr">
+                      <a:solidFill>
+                        <a:schemeClr val="tx1"/>
+                      </a:solidFill>
+                      <a:prstDash val="solid"/>
+                      <a:round/>
+                      <a:headEnd type="none" w="med" len="med"/>
+                      <a:tailEnd type="none" w="med" len="med"/>
+                    </a:lnR>
+                    <a:lnT w="12700" cap="flat" cmpd="sng" algn="ctr">
+                      <a:solidFill>
+                        <a:schemeClr val="tx1"/>
+                      </a:solidFill>
+                      <a:prstDash val="solid"/>
+                      <a:round/>
+                      <a:headEnd type="none" w="med" len="med"/>
+                      <a:tailEnd type="none" w="med" len="med"/>
+                    </a:lnT>
+                    <a:lnB w="12700" cap="flat" cmpd="sng" algn="ctr">
+                      <a:solidFill>
+                        <a:schemeClr val="tx1"/>
+                      </a:solidFill>
+                      <a:prstDash val="solid"/>
+                      <a:round/>
+                      <a:headEnd type="none" w="med" len="med"/>
+                      <a:tailEnd type="none" w="med" len="med"/>
+                    </a:lnB>
+                    <a:noFill/>
+                  </a:tcPr>
+                </a:tc>
+                <a:extLst>
+                  <a:ext uri="{0D108BD9-81ED-4DB2-BD59-A6C34878D82A}">
+                    <a16:rowId xmlns:a16="http://schemas.microsoft.com/office/drawing/2014/main" val="4055335981"/>
+                  </a:ext>
+                </a:extLst>
+              </a:tr>
+              <a:tr h="0">
+                <a:tc>
+                  <a:txBody>
+                    <a:bodyPr/>
+                    <a:lstStyle/>
+                    <a:p>
+                      <a:r>
+                        <a:rPr lang="en-US" b="1"/>
+                        <a:t>view</a:t>
+                      </a:r>
+                    </a:p>
+                  </a:txBody>
+                  <a:tcPr anchor="ctr">
+                    <a:lnL w="12700" cap="flat" cmpd="sng" algn="ctr">
+                      <a:solidFill>
+                        <a:schemeClr val="tx1"/>
+                      </a:solidFill>
+                      <a:prstDash val="solid"/>
+                      <a:round/>
+                      <a:headEnd type="none" w="med" len="med"/>
+                      <a:tailEnd type="none" w="med" len="med"/>
+                    </a:lnL>
+                    <a:lnR w="12700" cap="flat" cmpd="sng" algn="ctr">
+                      <a:solidFill>
+                        <a:schemeClr val="tx1"/>
+                      </a:solidFill>
+                      <a:prstDash val="solid"/>
+                      <a:round/>
+                      <a:headEnd type="none" w="med" len="med"/>
+                      <a:tailEnd type="none" w="med" len="med"/>
+                    </a:lnR>
+                    <a:lnT w="12700" cap="flat" cmpd="sng" algn="ctr">
+                      <a:solidFill>
+                        <a:schemeClr val="tx1"/>
+                      </a:solidFill>
+                      <a:prstDash val="solid"/>
+                      <a:round/>
+                      <a:headEnd type="none" w="med" len="med"/>
+                      <a:tailEnd type="none" w="med" len="med"/>
+                    </a:lnT>
+                    <a:lnB w="12700" cap="flat" cmpd="sng" algn="ctr">
+                      <a:solidFill>
+                        <a:schemeClr val="tx1"/>
+                      </a:solidFill>
+                      <a:prstDash val="solid"/>
+                      <a:round/>
+                      <a:headEnd type="none" w="med" len="med"/>
+                      <a:tailEnd type="none" w="med" len="med"/>
+                    </a:lnB>
+                    <a:noFill/>
+                  </a:tcPr>
+                </a:tc>
+                <a:tc>
+                  <a:txBody>
+                    <a:bodyPr/>
+                    <a:lstStyle/>
+                    <a:p>
+                      <a:r>
+                        <a:rPr lang="en-US"/>
+                        <a:t>Müəyyən postu görmək icazəsi</a:t>
+                      </a:r>
+                    </a:p>
+                  </a:txBody>
+                  <a:tcPr anchor="ctr">
+                    <a:lnL w="12700" cap="flat" cmpd="sng" algn="ctr">
+                      <a:solidFill>
+                        <a:schemeClr val="tx1"/>
+                      </a:solidFill>
+                      <a:prstDash val="solid"/>
+                      <a:round/>
+                      <a:headEnd type="none" w="med" len="med"/>
+                      <a:tailEnd type="none" w="med" len="med"/>
+                    </a:lnL>
+                    <a:lnR w="12700" cap="flat" cmpd="sng" algn="ctr">
+                      <a:solidFill>
+                        <a:schemeClr val="tx1"/>
+                      </a:solidFill>
+                      <a:prstDash val="solid"/>
+                      <a:round/>
+                      <a:headEnd type="none" w="med" len="med"/>
+                      <a:tailEnd type="none" w="med" len="med"/>
+                    </a:lnR>
+                    <a:lnT w="12700" cap="flat" cmpd="sng" algn="ctr">
+                      <a:solidFill>
+                        <a:schemeClr val="tx1"/>
+                      </a:solidFill>
+                      <a:prstDash val="solid"/>
+                      <a:round/>
+                      <a:headEnd type="none" w="med" len="med"/>
+                      <a:tailEnd type="none" w="med" len="med"/>
+                    </a:lnT>
+                    <a:lnB w="12700" cap="flat" cmpd="sng" algn="ctr">
+                      <a:solidFill>
+                        <a:schemeClr val="tx1"/>
+                      </a:solidFill>
+                      <a:prstDash val="solid"/>
+                      <a:round/>
+                      <a:headEnd type="none" w="med" len="med"/>
+                      <a:tailEnd type="none" w="med" len="med"/>
+                    </a:lnB>
+                    <a:noFill/>
+                  </a:tcPr>
+                </a:tc>
+                <a:extLst>
+                  <a:ext uri="{0D108BD9-81ED-4DB2-BD59-A6C34878D82A}">
+                    <a16:rowId xmlns:a16="http://schemas.microsoft.com/office/drawing/2014/main" val="338101939"/>
+                  </a:ext>
+                </a:extLst>
+              </a:tr>
+              <a:tr h="0">
+                <a:tc>
+                  <a:txBody>
+                    <a:bodyPr/>
+                    <a:lstStyle/>
+                    <a:p>
+                      <a:r>
+                        <a:rPr lang="en-US" b="1"/>
+                        <a:t>create</a:t>
+                      </a:r>
+                    </a:p>
+                  </a:txBody>
+                  <a:tcPr anchor="ctr">
+                    <a:lnL w="12700" cap="flat" cmpd="sng" algn="ctr">
+                      <a:solidFill>
+                        <a:schemeClr val="tx1"/>
+                      </a:solidFill>
+                      <a:prstDash val="solid"/>
+                      <a:round/>
+                      <a:headEnd type="none" w="med" len="med"/>
+                      <a:tailEnd type="none" w="med" len="med"/>
+                    </a:lnL>
+                    <a:lnR w="12700" cap="flat" cmpd="sng" algn="ctr">
+                      <a:solidFill>
+                        <a:schemeClr val="tx1"/>
+                      </a:solidFill>
+                      <a:prstDash val="solid"/>
+                      <a:round/>
+                      <a:headEnd type="none" w="med" len="med"/>
+                      <a:tailEnd type="none" w="med" len="med"/>
+                    </a:lnR>
+                    <a:lnT w="12700" cap="flat" cmpd="sng" algn="ctr">
+                      <a:solidFill>
+                        <a:schemeClr val="tx1"/>
+                      </a:solidFill>
+                      <a:prstDash val="solid"/>
+                      <a:round/>
+                      <a:headEnd type="none" w="med" len="med"/>
+                      <a:tailEnd type="none" w="med" len="med"/>
+                    </a:lnT>
+                    <a:lnB w="12700" cap="flat" cmpd="sng" algn="ctr">
+                      <a:solidFill>
+                        <a:schemeClr val="tx1"/>
+                      </a:solidFill>
+                      <a:prstDash val="solid"/>
+                      <a:round/>
+                      <a:headEnd type="none" w="med" len="med"/>
+                      <a:tailEnd type="none" w="med" len="med"/>
+                    </a:lnB>
+                    <a:noFill/>
+                  </a:tcPr>
+                </a:tc>
+                <a:tc>
+                  <a:txBody>
+                    <a:bodyPr/>
+                    <a:lstStyle/>
+                    <a:p>
+                      <a:r>
+                        <a:rPr lang="en-US"/>
+                        <a:t>Yeni post yaratmaq icazəsi</a:t>
+                      </a:r>
+                    </a:p>
+                  </a:txBody>
+                  <a:tcPr anchor="ctr">
+                    <a:lnL w="12700" cap="flat" cmpd="sng" algn="ctr">
+                      <a:solidFill>
+                        <a:schemeClr val="tx1"/>
+                      </a:solidFill>
+                      <a:prstDash val="solid"/>
+                      <a:round/>
+                      <a:headEnd type="none" w="med" len="med"/>
+                      <a:tailEnd type="none" w="med" len="med"/>
+                    </a:lnL>
+                    <a:lnR w="12700" cap="flat" cmpd="sng" algn="ctr">
+                      <a:solidFill>
+                        <a:schemeClr val="tx1"/>
+                      </a:solidFill>
+                      <a:prstDash val="solid"/>
+                      <a:round/>
+                      <a:headEnd type="none" w="med" len="med"/>
+                      <a:tailEnd type="none" w="med" len="med"/>
+                    </a:lnR>
+                    <a:lnT w="12700" cap="flat" cmpd="sng" algn="ctr">
+                      <a:solidFill>
+                        <a:schemeClr val="tx1"/>
+                      </a:solidFill>
+                      <a:prstDash val="solid"/>
+                      <a:round/>
+                      <a:headEnd type="none" w="med" len="med"/>
+                      <a:tailEnd type="none" w="med" len="med"/>
+                    </a:lnT>
+                    <a:lnB w="12700" cap="flat" cmpd="sng" algn="ctr">
+                      <a:solidFill>
+                        <a:schemeClr val="tx1"/>
+                      </a:solidFill>
+                      <a:prstDash val="solid"/>
+                      <a:round/>
+                      <a:headEnd type="none" w="med" len="med"/>
+                      <a:tailEnd type="none" w="med" len="med"/>
+                    </a:lnB>
+                    <a:noFill/>
+                  </a:tcPr>
+                </a:tc>
+                <a:extLst>
+                  <a:ext uri="{0D108BD9-81ED-4DB2-BD59-A6C34878D82A}">
+                    <a16:rowId xmlns:a16="http://schemas.microsoft.com/office/drawing/2014/main" val="2525449408"/>
+                  </a:ext>
+                </a:extLst>
+              </a:tr>
+              <a:tr h="0">
+                <a:tc>
+                  <a:txBody>
+                    <a:bodyPr/>
+                    <a:lstStyle/>
+                    <a:p>
+                      <a:r>
+                        <a:rPr lang="en-US" b="1"/>
+                        <a:t>update</a:t>
+                      </a:r>
+                    </a:p>
+                  </a:txBody>
+                  <a:tcPr anchor="ctr">
+                    <a:lnL w="12700" cap="flat" cmpd="sng" algn="ctr">
+                      <a:solidFill>
+                        <a:schemeClr val="tx1"/>
+                      </a:solidFill>
+                      <a:prstDash val="solid"/>
+                      <a:round/>
+                      <a:headEnd type="none" w="med" len="med"/>
+                      <a:tailEnd type="none" w="med" len="med"/>
+                    </a:lnL>
+                    <a:lnR w="12700" cap="flat" cmpd="sng" algn="ctr">
+                      <a:solidFill>
+                        <a:schemeClr val="tx1"/>
+                      </a:solidFill>
+                      <a:prstDash val="solid"/>
+                      <a:round/>
+                      <a:headEnd type="none" w="med" len="med"/>
+                      <a:tailEnd type="none" w="med" len="med"/>
+                    </a:lnR>
+                    <a:lnT w="12700" cap="flat" cmpd="sng" algn="ctr">
+                      <a:solidFill>
+                        <a:schemeClr val="tx1"/>
+                      </a:solidFill>
+                      <a:prstDash val="solid"/>
+                      <a:round/>
+                      <a:headEnd type="none" w="med" len="med"/>
+                      <a:tailEnd type="none" w="med" len="med"/>
+                    </a:lnT>
+                    <a:lnB w="12700" cap="flat" cmpd="sng" algn="ctr">
+                      <a:solidFill>
+                        <a:schemeClr val="tx1"/>
+                      </a:solidFill>
+                      <a:prstDash val="solid"/>
+                      <a:round/>
+                      <a:headEnd type="none" w="med" len="med"/>
+                      <a:tailEnd type="none" w="med" len="med"/>
+                    </a:lnB>
+                    <a:noFill/>
+                  </a:tcPr>
+                </a:tc>
+                <a:tc>
+                  <a:txBody>
+                    <a:bodyPr/>
+                    <a:lstStyle/>
+                    <a:p>
+                      <a:r>
+                        <a:rPr lang="en-US"/>
+                        <a:t>Post redaktə icazəsi</a:t>
+                      </a:r>
+                    </a:p>
+                  </a:txBody>
+                  <a:tcPr anchor="ctr">
+                    <a:lnL w="12700" cap="flat" cmpd="sng" algn="ctr">
+                      <a:solidFill>
+                        <a:schemeClr val="tx1"/>
+                      </a:solidFill>
+                      <a:prstDash val="solid"/>
+                      <a:round/>
+                      <a:headEnd type="none" w="med" len="med"/>
+                      <a:tailEnd type="none" w="med" len="med"/>
+                    </a:lnL>
+                    <a:lnR w="12700" cap="flat" cmpd="sng" algn="ctr">
+                      <a:solidFill>
+                        <a:schemeClr val="tx1"/>
+                      </a:solidFill>
+                      <a:prstDash val="solid"/>
+                      <a:round/>
+                      <a:headEnd type="none" w="med" len="med"/>
+                      <a:tailEnd type="none" w="med" len="med"/>
+                    </a:lnR>
+                    <a:lnT w="12700" cap="flat" cmpd="sng" algn="ctr">
+                      <a:solidFill>
+                        <a:schemeClr val="tx1"/>
+                      </a:solidFill>
+                      <a:prstDash val="solid"/>
+                      <a:round/>
+                      <a:headEnd type="none" w="med" len="med"/>
+                      <a:tailEnd type="none" w="med" len="med"/>
+                    </a:lnT>
+                    <a:lnB w="12700" cap="flat" cmpd="sng" algn="ctr">
+                      <a:solidFill>
+                        <a:schemeClr val="tx1"/>
+                      </a:solidFill>
+                      <a:prstDash val="solid"/>
+                      <a:round/>
+                      <a:headEnd type="none" w="med" len="med"/>
+                      <a:tailEnd type="none" w="med" len="med"/>
+                    </a:lnB>
+                    <a:noFill/>
+                  </a:tcPr>
+                </a:tc>
+                <a:extLst>
+                  <a:ext uri="{0D108BD9-81ED-4DB2-BD59-A6C34878D82A}">
+                    <a16:rowId xmlns:a16="http://schemas.microsoft.com/office/drawing/2014/main" val="1254395701"/>
+                  </a:ext>
+                </a:extLst>
+              </a:tr>
+              <a:tr h="0">
+                <a:tc>
+                  <a:txBody>
+                    <a:bodyPr/>
+                    <a:lstStyle/>
+                    <a:p>
+                      <a:r>
+                        <a:rPr lang="en-US" b="1"/>
+                        <a:t>delete</a:t>
+                      </a:r>
+                    </a:p>
+                  </a:txBody>
+                  <a:tcPr anchor="ctr">
+                    <a:lnL w="12700" cap="flat" cmpd="sng" algn="ctr">
+                      <a:solidFill>
+                        <a:schemeClr val="tx1"/>
+                      </a:solidFill>
+                      <a:prstDash val="solid"/>
+                      <a:round/>
+                      <a:headEnd type="none" w="med" len="med"/>
+                      <a:tailEnd type="none" w="med" len="med"/>
+                    </a:lnL>
+                    <a:lnR w="12700" cap="flat" cmpd="sng" algn="ctr">
+                      <a:solidFill>
+                        <a:schemeClr val="tx1"/>
+                      </a:solidFill>
+                      <a:prstDash val="solid"/>
+                      <a:round/>
+                      <a:headEnd type="none" w="med" len="med"/>
+                      <a:tailEnd type="none" w="med" len="med"/>
+                    </a:lnR>
+                    <a:lnT w="12700" cap="flat" cmpd="sng" algn="ctr">
+                      <a:solidFill>
+                        <a:schemeClr val="tx1"/>
+                      </a:solidFill>
+                      <a:prstDash val="solid"/>
+                      <a:round/>
+                      <a:headEnd type="none" w="med" len="med"/>
+                      <a:tailEnd type="none" w="med" len="med"/>
+                    </a:lnT>
+                    <a:lnB w="12700" cap="flat" cmpd="sng" algn="ctr">
+                      <a:solidFill>
+                        <a:schemeClr val="tx1"/>
+                      </a:solidFill>
+                      <a:prstDash val="solid"/>
+                      <a:round/>
+                      <a:headEnd type="none" w="med" len="med"/>
+                      <a:tailEnd type="none" w="med" len="med"/>
+                    </a:lnB>
+                    <a:noFill/>
+                  </a:tcPr>
+                </a:tc>
+                <a:tc>
+                  <a:txBody>
+                    <a:bodyPr/>
+                    <a:lstStyle/>
+                    <a:p>
+                      <a:r>
+                        <a:rPr lang="en-US"/>
+                        <a:t>Post silmək icazəsi</a:t>
+                      </a:r>
+                    </a:p>
+                  </a:txBody>
+                  <a:tcPr anchor="ctr">
+                    <a:lnL w="12700" cap="flat" cmpd="sng" algn="ctr">
+                      <a:solidFill>
+                        <a:schemeClr val="tx1"/>
+                      </a:solidFill>
+                      <a:prstDash val="solid"/>
+                      <a:round/>
+                      <a:headEnd type="none" w="med" len="med"/>
+                      <a:tailEnd type="none" w="med" len="med"/>
+                    </a:lnL>
+                    <a:lnR w="12700" cap="flat" cmpd="sng" algn="ctr">
+                      <a:solidFill>
+                        <a:schemeClr val="tx1"/>
+                      </a:solidFill>
+                      <a:prstDash val="solid"/>
+                      <a:round/>
+                      <a:headEnd type="none" w="med" len="med"/>
+                      <a:tailEnd type="none" w="med" len="med"/>
+                    </a:lnR>
+                    <a:lnT w="12700" cap="flat" cmpd="sng" algn="ctr">
+                      <a:solidFill>
+                        <a:schemeClr val="tx1"/>
+                      </a:solidFill>
+                      <a:prstDash val="solid"/>
+                      <a:round/>
+                      <a:headEnd type="none" w="med" len="med"/>
+                      <a:tailEnd type="none" w="med" len="med"/>
+                    </a:lnT>
+                    <a:lnB w="12700" cap="flat" cmpd="sng" algn="ctr">
+                      <a:solidFill>
+                        <a:schemeClr val="tx1"/>
+                      </a:solidFill>
+                      <a:prstDash val="solid"/>
+                      <a:round/>
+                      <a:headEnd type="none" w="med" len="med"/>
+                      <a:tailEnd type="none" w="med" len="med"/>
+                    </a:lnB>
+                    <a:noFill/>
+                  </a:tcPr>
+                </a:tc>
+                <a:extLst>
+                  <a:ext uri="{0D108BD9-81ED-4DB2-BD59-A6C34878D82A}">
+                    <a16:rowId xmlns:a16="http://schemas.microsoft.com/office/drawing/2014/main" val="1334756980"/>
+                  </a:ext>
+                </a:extLst>
+              </a:tr>
+              <a:tr h="0">
+                <a:tc>
+                  <a:txBody>
+                    <a:bodyPr/>
+                    <a:lstStyle/>
+                    <a:p>
+                      <a:r>
+                        <a:rPr lang="en-US" b="1"/>
+                        <a:t>restore</a:t>
+                      </a:r>
+                    </a:p>
+                  </a:txBody>
+                  <a:tcPr anchor="ctr">
+                    <a:lnL w="12700" cap="flat" cmpd="sng" algn="ctr">
+                      <a:solidFill>
+                        <a:schemeClr val="tx1"/>
+                      </a:solidFill>
+                      <a:prstDash val="solid"/>
+                      <a:round/>
+                      <a:headEnd type="none" w="med" len="med"/>
+                      <a:tailEnd type="none" w="med" len="med"/>
+                    </a:lnL>
+                    <a:lnR w="12700" cap="flat" cmpd="sng" algn="ctr">
+                      <a:solidFill>
+                        <a:schemeClr val="tx1"/>
+                      </a:solidFill>
+                      <a:prstDash val="solid"/>
+                      <a:round/>
+                      <a:headEnd type="none" w="med" len="med"/>
+                      <a:tailEnd type="none" w="med" len="med"/>
+                    </a:lnR>
+                    <a:lnT w="12700" cap="flat" cmpd="sng" algn="ctr">
+                      <a:solidFill>
+                        <a:schemeClr val="tx1"/>
+                      </a:solidFill>
+                      <a:prstDash val="solid"/>
+                      <a:round/>
+                      <a:headEnd type="none" w="med" len="med"/>
+                      <a:tailEnd type="none" w="med" len="med"/>
+                    </a:lnT>
+                    <a:lnB w="12700" cap="flat" cmpd="sng" algn="ctr">
+                      <a:solidFill>
+                        <a:schemeClr val="tx1"/>
+                      </a:solidFill>
+                      <a:prstDash val="solid"/>
+                      <a:round/>
+                      <a:headEnd type="none" w="med" len="med"/>
+                      <a:tailEnd type="none" w="med" len="med"/>
+                    </a:lnB>
+                    <a:noFill/>
+                  </a:tcPr>
+                </a:tc>
+                <a:tc>
+                  <a:txBody>
+                    <a:bodyPr/>
+                    <a:lstStyle/>
+                    <a:p>
+                      <a:r>
+                        <a:rPr lang="en-US"/>
+                        <a:t>Silinmiş postu bərpa etmək icazəsi</a:t>
+                      </a:r>
+                    </a:p>
+                  </a:txBody>
+                  <a:tcPr anchor="ctr">
+                    <a:lnL w="12700" cap="flat" cmpd="sng" algn="ctr">
+                      <a:solidFill>
+                        <a:schemeClr val="tx1"/>
+                      </a:solidFill>
+                      <a:prstDash val="solid"/>
+                      <a:round/>
+                      <a:headEnd type="none" w="med" len="med"/>
+                      <a:tailEnd type="none" w="med" len="med"/>
+                    </a:lnL>
+                    <a:lnR w="12700" cap="flat" cmpd="sng" algn="ctr">
+                      <a:solidFill>
+                        <a:schemeClr val="tx1"/>
+                      </a:solidFill>
+                      <a:prstDash val="solid"/>
+                      <a:round/>
+                      <a:headEnd type="none" w="med" len="med"/>
+                      <a:tailEnd type="none" w="med" len="med"/>
+                    </a:lnR>
+                    <a:lnT w="12700" cap="flat" cmpd="sng" algn="ctr">
+                      <a:solidFill>
+                        <a:schemeClr val="tx1"/>
+                      </a:solidFill>
+                      <a:prstDash val="solid"/>
+                      <a:round/>
+                      <a:headEnd type="none" w="med" len="med"/>
+                      <a:tailEnd type="none" w="med" len="med"/>
+                    </a:lnT>
+                    <a:lnB w="12700" cap="flat" cmpd="sng" algn="ctr">
+                      <a:solidFill>
+                        <a:schemeClr val="tx1"/>
+                      </a:solidFill>
+                      <a:prstDash val="solid"/>
+                      <a:round/>
+                      <a:headEnd type="none" w="med" len="med"/>
+                      <a:tailEnd type="none" w="med" len="med"/>
+                    </a:lnB>
+                    <a:noFill/>
+                  </a:tcPr>
+                </a:tc>
+                <a:extLst>
+                  <a:ext uri="{0D108BD9-81ED-4DB2-BD59-A6C34878D82A}">
+                    <a16:rowId xmlns:a16="http://schemas.microsoft.com/office/drawing/2014/main" val="2220506109"/>
+                  </a:ext>
+                </a:extLst>
+              </a:tr>
+              <a:tr h="0">
+                <a:tc>
+                  <a:txBody>
+                    <a:bodyPr/>
+                    <a:lstStyle/>
+                    <a:p>
+                      <a:r>
+                        <a:rPr lang="en-US" b="1"/>
+                        <a:t>forceDelete</a:t>
+                      </a:r>
+                    </a:p>
+                  </a:txBody>
+                  <a:tcPr anchor="ctr">
+                    <a:lnL w="12700" cap="flat" cmpd="sng" algn="ctr">
+                      <a:solidFill>
+                        <a:schemeClr val="tx1"/>
+                      </a:solidFill>
+                      <a:prstDash val="solid"/>
+                      <a:round/>
+                      <a:headEnd type="none" w="med" len="med"/>
+                      <a:tailEnd type="none" w="med" len="med"/>
+                    </a:lnL>
+                    <a:lnR w="12700" cap="flat" cmpd="sng" algn="ctr">
+                      <a:solidFill>
+                        <a:schemeClr val="tx1"/>
+                      </a:solidFill>
+                      <a:prstDash val="solid"/>
+                      <a:round/>
+                      <a:headEnd type="none" w="med" len="med"/>
+                      <a:tailEnd type="none" w="med" len="med"/>
+                    </a:lnR>
+                    <a:lnT w="12700" cap="flat" cmpd="sng" algn="ctr">
+                      <a:solidFill>
+                        <a:schemeClr val="tx1"/>
+                      </a:solidFill>
+                      <a:prstDash val="solid"/>
+                      <a:round/>
+                      <a:headEnd type="none" w="med" len="med"/>
+                      <a:tailEnd type="none" w="med" len="med"/>
+                    </a:lnT>
+                    <a:lnB w="12700" cap="flat" cmpd="sng" algn="ctr">
+                      <a:solidFill>
+                        <a:schemeClr val="tx1"/>
+                      </a:solidFill>
+                      <a:prstDash val="solid"/>
+                      <a:round/>
+                      <a:headEnd type="none" w="med" len="med"/>
+                      <a:tailEnd type="none" w="med" len="med"/>
+                    </a:lnB>
+                    <a:noFill/>
+                  </a:tcPr>
+                </a:tc>
+                <a:tc>
+                  <a:txBody>
+                    <a:bodyPr/>
+                    <a:lstStyle/>
+                    <a:p>
+                      <a:r>
+                        <a:rPr lang="en-US"/>
+                        <a:t>Qəti şəkildə postu silmək (DB-dən tam)</a:t>
+                      </a:r>
+                    </a:p>
+                  </a:txBody>
+                  <a:tcPr anchor="ctr">
+                    <a:lnL w="12700" cap="flat" cmpd="sng" algn="ctr">
+                      <a:solidFill>
+                        <a:schemeClr val="tx1"/>
+                      </a:solidFill>
+                      <a:prstDash val="solid"/>
+                      <a:round/>
+                      <a:headEnd type="none" w="med" len="med"/>
+                      <a:tailEnd type="none" w="med" len="med"/>
+                    </a:lnL>
+                    <a:lnR w="12700" cap="flat" cmpd="sng" algn="ctr">
+                      <a:solidFill>
+                        <a:schemeClr val="tx1"/>
+                      </a:solidFill>
+                      <a:prstDash val="solid"/>
+                      <a:round/>
+                      <a:headEnd type="none" w="med" len="med"/>
+                      <a:tailEnd type="none" w="med" len="med"/>
+                    </a:lnR>
+                    <a:lnT w="12700" cap="flat" cmpd="sng" algn="ctr">
+                      <a:solidFill>
+                        <a:schemeClr val="tx1"/>
+                      </a:solidFill>
+                      <a:prstDash val="solid"/>
+                      <a:round/>
+                      <a:headEnd type="none" w="med" len="med"/>
+                      <a:tailEnd type="none" w="med" len="med"/>
+                    </a:lnT>
+                    <a:lnB w="12700" cap="flat" cmpd="sng" algn="ctr">
+                      <a:solidFill>
+                        <a:schemeClr val="tx1"/>
+                      </a:solidFill>
+                      <a:prstDash val="solid"/>
+                      <a:round/>
+                      <a:headEnd type="none" w="med" len="med"/>
+                      <a:tailEnd type="none" w="med" len="med"/>
+                    </a:lnB>
+                    <a:noFill/>
+                  </a:tcPr>
+                </a:tc>
+                <a:extLst>
+                  <a:ext uri="{0D108BD9-81ED-4DB2-BD59-A6C34878D82A}">
+                    <a16:rowId xmlns:a16="http://schemas.microsoft.com/office/drawing/2014/main" val="710519735"/>
+                  </a:ext>
+                </a:extLst>
+              </a:tr>
+            </a:tbl>
+          </a:graphicData>
+        </a:graphic>
+      </p:graphicFrame>
+    </p:spTree>
+    <p:extLst>
+      <p:ext uri="{BB962C8B-B14F-4D97-AF65-F5344CB8AC3E}">
+        <p14:creationId xmlns:p14="http://schemas.microsoft.com/office/powerpoint/2010/main" val="183386313"/>
+      </p:ext>
+    </p:extLst>
+  </p:cSld>
+  <p:clrMapOvr>
+    <a:masterClrMapping/>
+  </p:clrMapOvr>
+</p:sld>
+</file>
+
+<file path=ppt/slides/slide5.xml><?xml version="1.0" encoding="utf-8"?>
+<p:sld xmlns:a="http://schemas.openxmlformats.org/drawingml/2006/main" xmlns:r="http://schemas.openxmlformats.org/officeDocument/2006/relationships" xmlns:p="http://schemas.openxmlformats.org/presentationml/2006/main">
+  <p:cSld>
+    <p:spTree>
+      <p:nvGrpSpPr>
+        <p:cNvPr id="1" name="">
+          <a:extLst>
+            <a:ext uri="{FF2B5EF4-FFF2-40B4-BE49-F238E27FC236}">
+              <a16:creationId xmlns:a16="http://schemas.microsoft.com/office/drawing/2014/main" id="{D71118E2-AF3F-4D8B-CEFF-325A8593F752}"/>
+            </a:ext>
+          </a:extLst>
+        </p:cNvPr>
+        <p:cNvGrpSpPr/>
+        <p:nvPr/>
+      </p:nvGrpSpPr>
+      <p:grpSpPr>
+        <a:xfrm>
+          <a:off x="0" y="0"/>
+          <a:ext cx="0" cy="0"/>
+          <a:chOff x="0" y="0"/>
+          <a:chExt cx="0" cy="0"/>
+        </a:xfrm>
+      </p:grpSpPr>
+      <p:sp>
+        <p:nvSpPr>
+          <p:cNvPr id="3" name="TextBox 2">
+            <a:extLst>
+              <a:ext uri="{FF2B5EF4-FFF2-40B4-BE49-F238E27FC236}">
+                <a16:creationId xmlns:a16="http://schemas.microsoft.com/office/drawing/2014/main" id="{86701C19-F922-A4FE-145E-5152F9ED9B7B}"/>
+              </a:ext>
+            </a:extLst>
+          </p:cNvPr>
+          <p:cNvSpPr txBox="1"/>
+          <p:nvPr/>
+        </p:nvSpPr>
+        <p:spPr>
+          <a:xfrm>
+            <a:off x="217714" y="255046"/>
+            <a:ext cx="11756571" cy="3356175"/>
+          </a:xfrm>
+          <a:prstGeom prst="rect">
+            <a:avLst/>
+          </a:prstGeom>
+          <a:noFill/>
+        </p:spPr>
+        <p:txBody>
+          <a:bodyPr wrap="square">
+            <a:spAutoFit/>
+          </a:bodyPr>
+          <a:lstStyle/>
+          <a:p>
+            <a:pPr>
+              <a:lnSpc>
+                <a:spcPct val="150000"/>
+              </a:lnSpc>
+              <a:buNone/>
+            </a:pPr>
+            <a:r>
+              <a:rPr kumimoji="0" lang="en-US" altLang="en-US" sz="1300" b="1" i="0" u="none" strike="noStrike" cap="none" normalizeH="0" baseline="0">
+                <a:ln>
+                  <a:noFill/>
+                </a:ln>
+                <a:solidFill>
+                  <a:srgbClr val="FF0000"/>
+                </a:solidFill>
+                <a:effectLst/>
+                <a:latin typeface="Arial" panose="020B0604020202020204" pitchFamily="34" charset="0"/>
+              </a:rPr>
+              <a:t>Post::class =&gt; PostPolicy::class - nə deməkdir?</a:t>
+            </a:r>
+            <a:endParaRPr kumimoji="0" lang="az-Latn-AZ" altLang="en-US" sz="1300" b="1" i="0" u="none" strike="noStrike" cap="none" normalizeH="0" baseline="0">
+              <a:ln>
+                <a:noFill/>
+              </a:ln>
+              <a:solidFill>
+                <a:srgbClr val="FF0000"/>
+              </a:solidFill>
+              <a:effectLst/>
+              <a:latin typeface="Arial" panose="020B0604020202020204" pitchFamily="34" charset="0"/>
+            </a:endParaRPr>
+          </a:p>
+          <a:p>
+            <a:pPr>
+              <a:lnSpc>
+                <a:spcPct val="150000"/>
+              </a:lnSpc>
+              <a:buNone/>
+            </a:pPr>
+            <a:endParaRPr lang="az-Latn-AZ" altLang="en-US" sz="1300" b="1">
+              <a:solidFill>
+                <a:srgbClr val="FF0000"/>
+              </a:solidFill>
+              <a:latin typeface="Arial" panose="020B0604020202020204" pitchFamily="34" charset="0"/>
+            </a:endParaRPr>
+          </a:p>
+          <a:p>
+            <a:pPr>
+              <a:lnSpc>
+                <a:spcPct val="150000"/>
+              </a:lnSpc>
+              <a:buNone/>
+            </a:pPr>
+            <a:r>
+              <a:rPr kumimoji="0" lang="en-US" altLang="en-US" sz="1300" b="1" i="0" u="none" strike="noStrike" cap="none" normalizeH="0" baseline="0">
+                <a:ln>
+                  <a:noFill/>
+                </a:ln>
+                <a:solidFill>
+                  <a:schemeClr val="tx1"/>
+                </a:solidFill>
+                <a:effectLst/>
+                <a:latin typeface="Arial" panose="020B0604020202020204" pitchFamily="34" charset="0"/>
+              </a:rPr>
+              <a:t>Yol</a:t>
+            </a:r>
+            <a:r>
+              <a:rPr kumimoji="0" lang="en-US" altLang="en-US" sz="1300" b="0" i="0" u="none" strike="noStrike" cap="none" normalizeH="0" baseline="0">
+                <a:ln>
+                  <a:noFill/>
+                </a:ln>
+                <a:solidFill>
+                  <a:schemeClr val="tx1"/>
+                </a:solidFill>
+                <a:effectLst/>
+                <a:latin typeface="Arial" panose="020B0604020202020204" pitchFamily="34" charset="0"/>
+              </a:rPr>
+              <a:t>: </a:t>
+            </a:r>
+            <a:r>
+              <a:rPr kumimoji="0" lang="en-US" altLang="en-US" sz="1300" b="0" i="0" u="sng" strike="noStrike" cap="none" normalizeH="0" baseline="0">
+                <a:ln>
+                  <a:noFill/>
+                </a:ln>
+                <a:solidFill>
+                  <a:srgbClr val="00B0F0"/>
+                </a:solidFill>
+                <a:effectLst/>
+                <a:latin typeface="Arial" panose="020B0604020202020204" pitchFamily="34" charset="0"/>
+              </a:rPr>
+              <a:t>app\Providers\AuthServiceProvider.php</a:t>
+            </a:r>
+            <a:endParaRPr kumimoji="0" lang="az-Latn-AZ" altLang="en-US" sz="1300" b="0" i="0" u="sng" strike="noStrike" cap="none" normalizeH="0" baseline="0">
+              <a:ln>
+                <a:noFill/>
+              </a:ln>
+              <a:solidFill>
+                <a:srgbClr val="00B0F0"/>
+              </a:solidFill>
+              <a:effectLst/>
+              <a:latin typeface="Arial" panose="020B0604020202020204" pitchFamily="34" charset="0"/>
+            </a:endParaRPr>
+          </a:p>
+          <a:p>
+            <a:pPr>
+              <a:lnSpc>
+                <a:spcPct val="150000"/>
+              </a:lnSpc>
+              <a:buNone/>
+            </a:pPr>
+            <a:endParaRPr kumimoji="0" lang="az-Latn-AZ" altLang="en-US" sz="1300" b="0" i="0" u="none" strike="noStrike" cap="none" normalizeH="0" baseline="0">
+              <a:ln>
+                <a:noFill/>
+              </a:ln>
+              <a:solidFill>
+                <a:schemeClr val="tx1"/>
+              </a:solidFill>
+              <a:effectLst/>
+              <a:latin typeface="Arial" panose="020B0604020202020204" pitchFamily="34" charset="0"/>
+            </a:endParaRPr>
+          </a:p>
+          <a:p>
+            <a:pPr>
+              <a:lnSpc>
+                <a:spcPct val="150000"/>
+              </a:lnSpc>
+              <a:buNone/>
+            </a:pPr>
+            <a:endParaRPr lang="az-Latn-AZ" altLang="en-US" sz="1300">
+              <a:latin typeface="Arial" panose="020B0604020202020204" pitchFamily="34" charset="0"/>
+            </a:endParaRPr>
+          </a:p>
+          <a:p>
+            <a:pPr>
+              <a:lnSpc>
+                <a:spcPct val="150000"/>
+              </a:lnSpc>
+              <a:buNone/>
+            </a:pPr>
+            <a:endParaRPr kumimoji="0" lang="az-Latn-AZ" altLang="en-US" sz="1300" b="0" i="0" u="none" strike="noStrike" cap="none" normalizeH="0" baseline="0">
+              <a:ln>
+                <a:noFill/>
+              </a:ln>
+              <a:solidFill>
+                <a:schemeClr val="tx1"/>
+              </a:solidFill>
+              <a:effectLst/>
+              <a:latin typeface="Arial" panose="020B0604020202020204" pitchFamily="34" charset="0"/>
+            </a:endParaRPr>
+          </a:p>
+          <a:p>
+            <a:pPr>
+              <a:lnSpc>
+                <a:spcPct val="150000"/>
+              </a:lnSpc>
+              <a:buNone/>
+            </a:pPr>
+            <a:endParaRPr lang="az-Latn-AZ" altLang="en-US" sz="1300">
+              <a:latin typeface="Arial" panose="020B0604020202020204" pitchFamily="34" charset="0"/>
+            </a:endParaRPr>
+          </a:p>
+          <a:p>
+            <a:pPr>
+              <a:lnSpc>
+                <a:spcPct val="150000"/>
+              </a:lnSpc>
+              <a:buNone/>
+            </a:pPr>
+            <a:endParaRPr kumimoji="0" lang="az-Latn-AZ" altLang="en-US" sz="1300" b="0" i="0" u="none" strike="noStrike" cap="none" normalizeH="0" baseline="0">
+              <a:ln>
+                <a:noFill/>
+              </a:ln>
+              <a:solidFill>
+                <a:schemeClr val="tx1"/>
+              </a:solidFill>
+              <a:effectLst/>
+              <a:latin typeface="Arial" panose="020B0604020202020204" pitchFamily="34" charset="0"/>
+            </a:endParaRPr>
+          </a:p>
+          <a:p>
+            <a:pPr>
+              <a:lnSpc>
+                <a:spcPct val="150000"/>
+              </a:lnSpc>
+              <a:buNone/>
+            </a:pPr>
+            <a:endParaRPr lang="az-Latn-AZ" altLang="en-US" sz="1300">
+              <a:latin typeface="Arial" panose="020B0604020202020204" pitchFamily="34" charset="0"/>
+            </a:endParaRPr>
+          </a:p>
+          <a:p>
+            <a:pPr>
+              <a:lnSpc>
+                <a:spcPct val="150000"/>
+              </a:lnSpc>
+              <a:buNone/>
+            </a:pPr>
+            <a:r>
+              <a:rPr kumimoji="0" lang="en-US" altLang="en-US" sz="1300" b="1" i="0" u="none" strike="noStrike" cap="none" normalizeH="0" baseline="0">
+                <a:ln>
+                  <a:noFill/>
+                </a:ln>
+                <a:solidFill>
+                  <a:schemeClr val="tx1"/>
+                </a:solidFill>
+                <a:effectLst/>
+                <a:latin typeface="Arial" panose="020B0604020202020204" pitchFamily="34" charset="0"/>
+              </a:rPr>
+              <a:t>Bu sətir Laravel-ə deyir</a:t>
+            </a:r>
+            <a:r>
+              <a:rPr kumimoji="0" lang="en-US" altLang="en-US" sz="1300" b="0" i="0" u="none" strike="noStrike" cap="none" normalizeH="0" baseline="0">
+                <a:ln>
+                  <a:noFill/>
+                </a:ln>
+                <a:solidFill>
+                  <a:schemeClr val="tx1"/>
+                </a:solidFill>
+                <a:effectLst/>
+                <a:latin typeface="Arial" panose="020B0604020202020204" pitchFamily="34" charset="0"/>
+              </a:rPr>
+              <a:t>: "Əgər kimsə </a:t>
+            </a:r>
+            <a:r>
+              <a:rPr kumimoji="0" lang="en-US" altLang="en-US" sz="1300" b="1" i="0" u="none" strike="noStrike" cap="none" normalizeH="0" baseline="0">
+                <a:ln>
+                  <a:noFill/>
+                </a:ln>
+                <a:solidFill>
+                  <a:schemeClr val="tx1"/>
+                </a:solidFill>
+                <a:effectLst/>
+                <a:latin typeface="Arial" panose="020B0604020202020204" pitchFamily="34" charset="0"/>
+              </a:rPr>
+              <a:t>Post</a:t>
+            </a:r>
+            <a:r>
+              <a:rPr kumimoji="0" lang="en-US" altLang="en-US" sz="1300" b="0" i="0" u="none" strike="noStrike" cap="none" normalizeH="0" baseline="0">
+                <a:ln>
+                  <a:noFill/>
+                </a:ln>
+                <a:solidFill>
+                  <a:schemeClr val="tx1"/>
+                </a:solidFill>
+                <a:effectLst/>
+                <a:latin typeface="Arial" panose="020B0604020202020204" pitchFamily="34" charset="0"/>
+              </a:rPr>
+              <a:t> modelinə aid bir əməliyyat üçün </a:t>
+            </a:r>
+            <a:r>
+              <a:rPr kumimoji="0" lang="en-US" altLang="en-US" sz="1300" b="1" i="0" u="none" strike="noStrike" cap="none" normalizeH="0" baseline="0">
+                <a:ln>
+                  <a:noFill/>
+                </a:ln>
+                <a:solidFill>
+                  <a:srgbClr val="FF0000"/>
+                </a:solidFill>
+                <a:effectLst/>
+                <a:latin typeface="Arial" panose="020B0604020202020204" pitchFamily="34" charset="0"/>
+              </a:rPr>
+              <a:t>authorize() </a:t>
+            </a:r>
+            <a:r>
+              <a:rPr kumimoji="0" lang="az-Latn-AZ" altLang="en-US" sz="1300" b="0" i="0" u="none" strike="noStrike" cap="none" normalizeH="0" baseline="0">
+                <a:ln>
+                  <a:noFill/>
+                </a:ln>
+                <a:solidFill>
+                  <a:schemeClr val="tx1"/>
+                </a:solidFill>
+                <a:effectLst/>
+                <a:latin typeface="Arial" panose="020B0604020202020204" pitchFamily="34" charset="0"/>
+              </a:rPr>
+              <a:t>metodunu </a:t>
+            </a:r>
+            <a:r>
+              <a:rPr kumimoji="0" lang="en-US" altLang="en-US" sz="1300" b="0" i="0" u="none" strike="noStrike" cap="none" normalizeH="0" baseline="0">
+                <a:ln>
+                  <a:noFill/>
+                </a:ln>
+                <a:solidFill>
+                  <a:schemeClr val="tx1"/>
+                </a:solidFill>
+                <a:effectLst/>
+                <a:latin typeface="Arial" panose="020B0604020202020204" pitchFamily="34" charset="0"/>
+              </a:rPr>
+              <a:t>çağırırsa, get </a:t>
+            </a:r>
+            <a:r>
+              <a:rPr kumimoji="0" lang="en-US" altLang="en-US" sz="1300" b="1" i="0" u="none" strike="noStrike" cap="none" normalizeH="0" baseline="0">
+                <a:ln>
+                  <a:noFill/>
+                </a:ln>
+                <a:solidFill>
+                  <a:schemeClr val="tx1"/>
+                </a:solidFill>
+                <a:effectLst/>
+                <a:latin typeface="Arial" panose="020B0604020202020204" pitchFamily="34" charset="0"/>
+              </a:rPr>
+              <a:t>PostPolicy</a:t>
+            </a:r>
+            <a:r>
+              <a:rPr kumimoji="0" lang="en-US" altLang="en-US" sz="1300" b="0" i="0" u="none" strike="noStrike" cap="none" normalizeH="0" baseline="0">
+                <a:ln>
+                  <a:noFill/>
+                </a:ln>
+                <a:solidFill>
+                  <a:schemeClr val="tx1"/>
+                </a:solidFill>
+                <a:effectLst/>
+                <a:latin typeface="Arial" panose="020B0604020202020204" pitchFamily="34" charset="0"/>
+              </a:rPr>
+              <a:t> class-ına bax." Yəni </a:t>
+            </a:r>
+            <a:r>
+              <a:rPr kumimoji="0" lang="en-US" altLang="en-US" sz="1300" b="1" i="0" u="none" strike="noStrike" cap="none" normalizeH="0" baseline="0">
+                <a:ln>
+                  <a:noFill/>
+                </a:ln>
+                <a:solidFill>
+                  <a:schemeClr val="tx1"/>
+                </a:solidFill>
+                <a:effectLst/>
+                <a:latin typeface="Arial" panose="020B0604020202020204" pitchFamily="34" charset="0"/>
+              </a:rPr>
+              <a:t>Post</a:t>
+            </a:r>
+            <a:r>
+              <a:rPr kumimoji="0" lang="en-US" altLang="en-US" sz="1300" b="0" i="0" u="none" strike="noStrike" cap="none" normalizeH="0" baseline="0">
+                <a:ln>
+                  <a:noFill/>
+                </a:ln>
+                <a:solidFill>
+                  <a:schemeClr val="tx1"/>
+                </a:solidFill>
+                <a:effectLst/>
+                <a:latin typeface="Arial" panose="020B0604020202020204" pitchFamily="34" charset="0"/>
+              </a:rPr>
+              <a:t> modeli ilə əlaqəli bütün icazələr bu class ilə idarə olunur.</a:t>
+            </a:r>
+          </a:p>
+        </p:txBody>
+      </p:sp>
+      <p:pic>
+        <p:nvPicPr>
+          <p:cNvPr id="4" name="Picture 3">
+            <a:extLst>
+              <a:ext uri="{FF2B5EF4-FFF2-40B4-BE49-F238E27FC236}">
+                <a16:creationId xmlns:a16="http://schemas.microsoft.com/office/drawing/2014/main" id="{2ABFDF36-B074-AF62-EC38-36095CF087B6}"/>
+              </a:ext>
+            </a:extLst>
+          </p:cNvPr>
+          <p:cNvPicPr>
+            <a:picLocks noChangeAspect="1"/>
+          </p:cNvPicPr>
+          <p:nvPr/>
+        </p:nvPicPr>
+        <p:blipFill>
+          <a:blip r:embed="rId2"/>
+          <a:stretch>
+            <a:fillRect/>
+          </a:stretch>
+        </p:blipFill>
+        <p:spPr>
+          <a:xfrm>
+            <a:off x="217714" y="1349159"/>
+            <a:ext cx="3419952" cy="1019317"/>
+          </a:xfrm>
+          <a:prstGeom prst="rect">
+            <a:avLst/>
+          </a:prstGeom>
+        </p:spPr>
+      </p:pic>
+    </p:spTree>
+    <p:extLst>
+      <p:ext uri="{BB962C8B-B14F-4D97-AF65-F5344CB8AC3E}">
+        <p14:creationId xmlns:p14="http://schemas.microsoft.com/office/powerpoint/2010/main" val="3959224657"/>
+      </p:ext>
+    </p:extLst>
+  </p:cSld>
+  <p:clrMapOvr>
+    <a:masterClrMapping/>
+  </p:clrMapOvr>
+</p:sld>
+</file>
+
+<file path=ppt/slides/slide6.xml><?xml version="1.0" encoding="utf-8"?>
+<p:sld xmlns:a="http://schemas.openxmlformats.org/drawingml/2006/main" xmlns:r="http://schemas.openxmlformats.org/officeDocument/2006/relationships" xmlns:p="http://schemas.openxmlformats.org/presentationml/2006/main">
+  <p:cSld>
+    <p:spTree>
+      <p:nvGrpSpPr>
+        <p:cNvPr id="1" name="">
+          <a:extLst>
+            <a:ext uri="{FF2B5EF4-FFF2-40B4-BE49-F238E27FC236}">
+              <a16:creationId xmlns:a16="http://schemas.microsoft.com/office/drawing/2014/main" id="{39C9B50C-5E76-C01E-D360-51A13DEFA2EA}"/>
+            </a:ext>
+          </a:extLst>
+        </p:cNvPr>
+        <p:cNvGrpSpPr/>
+        <p:nvPr/>
+      </p:nvGrpSpPr>
+      <p:grpSpPr>
+        <a:xfrm>
+          <a:off x="0" y="0"/>
+          <a:ext cx="0" cy="0"/>
+          <a:chOff x="0" y="0"/>
+          <a:chExt cx="0" cy="0"/>
+        </a:xfrm>
+      </p:grpSpPr>
+      <p:sp>
+        <p:nvSpPr>
+          <p:cNvPr id="3" name="TextBox 2">
+            <a:extLst>
+              <a:ext uri="{FF2B5EF4-FFF2-40B4-BE49-F238E27FC236}">
+                <a16:creationId xmlns:a16="http://schemas.microsoft.com/office/drawing/2014/main" id="{4AA89BFA-D61C-356F-9A92-8BBD7FADDF4D}"/>
+              </a:ext>
+            </a:extLst>
+          </p:cNvPr>
+          <p:cNvSpPr txBox="1"/>
+          <p:nvPr/>
+        </p:nvSpPr>
+        <p:spPr>
+          <a:xfrm>
+            <a:off x="217714" y="255046"/>
+            <a:ext cx="11756571" cy="3956339"/>
+          </a:xfrm>
+          <a:prstGeom prst="rect">
+            <a:avLst/>
+          </a:prstGeom>
+          <a:noFill/>
+        </p:spPr>
+        <p:txBody>
+          <a:bodyPr wrap="square">
+            <a:spAutoFit/>
+          </a:bodyPr>
+          <a:lstStyle/>
+          <a:p>
+            <a:pPr>
+              <a:lnSpc>
+                <a:spcPct val="150000"/>
+              </a:lnSpc>
+              <a:buNone/>
+            </a:pPr>
+            <a:r>
+              <a:rPr kumimoji="0" lang="en-US" altLang="en-US" sz="1300" b="1" i="0" u="none" strike="noStrike" cap="none" normalizeH="0" baseline="0">
+                <a:ln>
+                  <a:noFill/>
+                </a:ln>
+                <a:solidFill>
+                  <a:srgbClr val="FF0000"/>
+                </a:solidFill>
+                <a:effectLst/>
+                <a:latin typeface="Arial" panose="020B0604020202020204" pitchFamily="34" charset="0"/>
+              </a:rPr>
+              <a:t>$this-&gt;authorize('create', Post::class); nədir?</a:t>
+            </a:r>
+            <a:endParaRPr kumimoji="0" lang="az-Latn-AZ" altLang="en-US" sz="1300" b="1" i="0" u="none" strike="noStrike" cap="none" normalizeH="0" baseline="0">
+              <a:ln>
+                <a:noFill/>
+              </a:ln>
+              <a:solidFill>
+                <a:srgbClr val="FF0000"/>
+              </a:solidFill>
+              <a:effectLst/>
+              <a:latin typeface="Arial" panose="020B0604020202020204" pitchFamily="34" charset="0"/>
+            </a:endParaRPr>
+          </a:p>
+          <a:p>
+            <a:pPr>
+              <a:lnSpc>
+                <a:spcPct val="150000"/>
+              </a:lnSpc>
+              <a:buNone/>
+            </a:pPr>
+            <a:endParaRPr lang="az-Latn-AZ" altLang="en-US" sz="1300">
+              <a:latin typeface="Arial" panose="020B0604020202020204" pitchFamily="34" charset="0"/>
+            </a:endParaRPr>
+          </a:p>
+          <a:p>
+            <a:pPr>
+              <a:lnSpc>
+                <a:spcPct val="150000"/>
+              </a:lnSpc>
+              <a:buNone/>
+            </a:pPr>
+            <a:r>
+              <a:rPr kumimoji="0" lang="az-Latn-AZ" altLang="en-US" sz="1300" b="1" i="0" u="none" strike="noStrike" cap="none" normalizeH="0" baseline="0">
+                <a:ln>
+                  <a:noFill/>
+                </a:ln>
+                <a:solidFill>
+                  <a:schemeClr val="tx1"/>
+                </a:solidFill>
+                <a:effectLst/>
+                <a:latin typeface="Arial" panose="020B0604020202020204" pitchFamily="34" charset="0"/>
+              </a:rPr>
+              <a:t>Yol</a:t>
+            </a:r>
+            <a:r>
+              <a:rPr kumimoji="0" lang="az-Latn-AZ" altLang="en-US" sz="1300" b="0" i="0" u="none" strike="noStrike" cap="none" normalizeH="0" baseline="0">
+                <a:ln>
+                  <a:noFill/>
+                </a:ln>
+                <a:solidFill>
+                  <a:schemeClr val="tx1"/>
+                </a:solidFill>
+                <a:effectLst/>
+                <a:latin typeface="Arial" panose="020B0604020202020204" pitchFamily="34" charset="0"/>
+              </a:rPr>
+              <a:t>: </a:t>
+            </a:r>
+            <a:r>
+              <a:rPr kumimoji="0" lang="az-Latn-AZ" altLang="en-US" sz="1300" b="0" i="0" u="sng" strike="noStrike" cap="none" normalizeH="0" baseline="0">
+                <a:ln>
+                  <a:noFill/>
+                </a:ln>
+                <a:solidFill>
+                  <a:srgbClr val="00B0F0"/>
+                </a:solidFill>
+                <a:effectLst/>
+                <a:latin typeface="Arial" panose="020B0604020202020204" pitchFamily="34" charset="0"/>
+              </a:rPr>
+              <a:t>app\Http\Controllers\PostController.php</a:t>
+            </a:r>
+          </a:p>
+          <a:p>
+            <a:pPr>
+              <a:lnSpc>
+                <a:spcPct val="150000"/>
+              </a:lnSpc>
+              <a:buNone/>
+            </a:pPr>
+            <a:endParaRPr lang="az-Latn-AZ" altLang="en-US" sz="1300">
+              <a:latin typeface="Arial" panose="020B0604020202020204" pitchFamily="34" charset="0"/>
+            </a:endParaRPr>
+          </a:p>
+          <a:p>
+            <a:pPr>
+              <a:lnSpc>
+                <a:spcPct val="150000"/>
+              </a:lnSpc>
+              <a:buNone/>
+            </a:pPr>
+            <a:endParaRPr kumimoji="0" lang="az-Latn-AZ" altLang="en-US" sz="1300" b="0" i="0" u="none" strike="noStrike" cap="none" normalizeH="0" baseline="0">
+              <a:ln>
+                <a:noFill/>
+              </a:ln>
+              <a:solidFill>
+                <a:schemeClr val="tx1"/>
+              </a:solidFill>
+              <a:effectLst/>
+              <a:latin typeface="Arial" panose="020B0604020202020204" pitchFamily="34" charset="0"/>
+            </a:endParaRPr>
+          </a:p>
+          <a:p>
+            <a:pPr>
+              <a:lnSpc>
+                <a:spcPct val="150000"/>
+              </a:lnSpc>
+              <a:buNone/>
+            </a:pPr>
+            <a:endParaRPr lang="az-Latn-AZ" altLang="en-US" sz="1300">
+              <a:latin typeface="Arial" panose="020B0604020202020204" pitchFamily="34" charset="0"/>
+            </a:endParaRPr>
+          </a:p>
+          <a:p>
+            <a:pPr>
+              <a:lnSpc>
+                <a:spcPct val="150000"/>
+              </a:lnSpc>
+              <a:buNone/>
+            </a:pPr>
+            <a:endParaRPr kumimoji="0" lang="az-Latn-AZ" altLang="en-US" sz="1300" b="0" i="0" u="none" strike="noStrike" cap="none" normalizeH="0" baseline="0">
+              <a:ln>
+                <a:noFill/>
+              </a:ln>
+              <a:solidFill>
+                <a:schemeClr val="tx1"/>
+              </a:solidFill>
+              <a:effectLst/>
+              <a:latin typeface="Arial" panose="020B0604020202020204" pitchFamily="34" charset="0"/>
+            </a:endParaRPr>
+          </a:p>
+          <a:p>
+            <a:pPr>
+              <a:lnSpc>
+                <a:spcPct val="150000"/>
+              </a:lnSpc>
+              <a:buNone/>
+            </a:pPr>
+            <a:r>
+              <a:rPr kumimoji="0" lang="en-US" altLang="en-US" sz="1300" b="1" i="0" u="none" strike="noStrike" cap="none" normalizeH="0" baseline="0">
+                <a:ln>
+                  <a:noFill/>
+                </a:ln>
+                <a:solidFill>
+                  <a:schemeClr val="tx1"/>
+                </a:solidFill>
+                <a:effectLst/>
+                <a:latin typeface="Arial" panose="020B0604020202020204" pitchFamily="34" charset="0"/>
+              </a:rPr>
+              <a:t>Bu sətir Laravel-ə deyir</a:t>
+            </a:r>
+            <a:r>
+              <a:rPr kumimoji="0" lang="en-US" altLang="en-US" sz="1300" b="0" i="0" u="none" strike="noStrike" cap="none" normalizeH="0" baseline="0">
+                <a:ln>
+                  <a:noFill/>
+                </a:ln>
+                <a:solidFill>
+                  <a:schemeClr val="tx1"/>
+                </a:solidFill>
+                <a:effectLst/>
+                <a:latin typeface="Arial" panose="020B0604020202020204" pitchFamily="34" charset="0"/>
+              </a:rPr>
+              <a:t>: “Cari istifadəçiyə </a:t>
+            </a:r>
+            <a:r>
+              <a:rPr kumimoji="0" lang="en-US" altLang="en-US" sz="1300" b="1" i="0" u="none" strike="noStrike" cap="none" normalizeH="0" baseline="0">
+                <a:ln>
+                  <a:noFill/>
+                </a:ln>
+                <a:solidFill>
+                  <a:schemeClr val="tx1"/>
+                </a:solidFill>
+                <a:effectLst/>
+                <a:latin typeface="Arial" panose="020B0604020202020204" pitchFamily="34" charset="0"/>
+              </a:rPr>
+              <a:t>PostPolicy::create() </a:t>
+            </a:r>
+            <a:r>
+              <a:rPr kumimoji="0" lang="en-US" altLang="en-US" sz="1300" b="0" i="0" u="none" strike="noStrike" cap="none" normalizeH="0" baseline="0">
+                <a:ln>
+                  <a:noFill/>
+                </a:ln>
+                <a:solidFill>
+                  <a:schemeClr val="tx1"/>
+                </a:solidFill>
+                <a:effectLst/>
+                <a:latin typeface="Arial" panose="020B0604020202020204" pitchFamily="34" charset="0"/>
+              </a:rPr>
+              <a:t>icazəsi verilibmi?”</a:t>
+            </a:r>
+            <a:endParaRPr lang="az-Latn-AZ" altLang="en-US" sz="1300">
+              <a:latin typeface="Arial" panose="020B0604020202020204" pitchFamily="34" charset="0"/>
+            </a:endParaRPr>
+          </a:p>
+          <a:p>
+            <a:pPr marL="742950" lvl="1" indent="-285750">
+              <a:lnSpc>
+                <a:spcPct val="150000"/>
+              </a:lnSpc>
+              <a:buFont typeface="Wingdings" panose="05000000000000000000" pitchFamily="2" charset="2"/>
+              <a:buChar char="q"/>
+            </a:pPr>
+            <a:r>
+              <a:rPr kumimoji="0" lang="en-US" altLang="en-US" sz="1300" b="1" i="0" u="none" strike="noStrike" cap="none" normalizeH="0" baseline="0">
+                <a:ln>
+                  <a:noFill/>
+                </a:ln>
+                <a:solidFill>
+                  <a:schemeClr val="tx1"/>
+                </a:solidFill>
+                <a:effectLst/>
+                <a:latin typeface="Arial" panose="020B0604020202020204" pitchFamily="34" charset="0"/>
+              </a:rPr>
+              <a:t>'create</a:t>
+            </a:r>
+            <a:r>
+              <a:rPr kumimoji="0" lang="en-US" altLang="en-US" sz="1300" b="0" i="0" u="none" strike="noStrike" cap="none" normalizeH="0" baseline="0">
+                <a:ln>
+                  <a:noFill/>
+                </a:ln>
+                <a:solidFill>
+                  <a:schemeClr val="tx1"/>
+                </a:solidFill>
+                <a:effectLst/>
+                <a:latin typeface="Arial" panose="020B0604020202020204" pitchFamily="34" charset="0"/>
+              </a:rPr>
+              <a:t>’ → </a:t>
+            </a:r>
+            <a:r>
+              <a:rPr kumimoji="0" lang="az-Latn-AZ" altLang="en-US" sz="1300" b="1" i="0" u="none" strike="noStrike" cap="none" normalizeH="0" baseline="0">
+                <a:ln>
+                  <a:noFill/>
+                </a:ln>
+                <a:solidFill>
+                  <a:schemeClr val="tx1"/>
+                </a:solidFill>
+                <a:effectLst/>
+                <a:latin typeface="Arial" panose="020B0604020202020204" pitchFamily="34" charset="0"/>
+              </a:rPr>
+              <a:t>Post</a:t>
+            </a:r>
+            <a:r>
+              <a:rPr kumimoji="0" lang="en-US" altLang="en-US" sz="1300" b="1" i="0" u="none" strike="noStrike" cap="none" normalizeH="0" baseline="0">
+                <a:ln>
+                  <a:noFill/>
+                </a:ln>
+                <a:solidFill>
+                  <a:schemeClr val="tx1"/>
+                </a:solidFill>
+                <a:effectLst/>
+                <a:latin typeface="Arial" panose="020B0604020202020204" pitchFamily="34" charset="0"/>
+              </a:rPr>
+              <a:t>Policy</a:t>
+            </a:r>
+            <a:r>
+              <a:rPr kumimoji="0" lang="en-US" altLang="en-US" sz="1300" b="0" i="0" u="none" strike="noStrike" cap="none" normalizeH="0" baseline="0">
+                <a:ln>
+                  <a:noFill/>
+                </a:ln>
+                <a:solidFill>
+                  <a:schemeClr val="tx1"/>
+                </a:solidFill>
+                <a:effectLst/>
+                <a:latin typeface="Arial" panose="020B0604020202020204" pitchFamily="34" charset="0"/>
+              </a:rPr>
+              <a:t> içindəki method adıdır.</a:t>
+            </a:r>
+          </a:p>
+          <a:p>
+            <a:pPr marL="742950" lvl="1" indent="-285750">
+              <a:lnSpc>
+                <a:spcPct val="150000"/>
+              </a:lnSpc>
+              <a:buFont typeface="Wingdings" panose="05000000000000000000" pitchFamily="2" charset="2"/>
+              <a:buChar char="q"/>
+            </a:pPr>
+            <a:r>
+              <a:rPr kumimoji="0" lang="en-US" altLang="en-US" sz="1300" b="1" i="0" u="none" strike="noStrike" cap="none" normalizeH="0" baseline="0">
+                <a:ln>
+                  <a:noFill/>
+                </a:ln>
+                <a:solidFill>
+                  <a:schemeClr val="tx1"/>
+                </a:solidFill>
+                <a:effectLst/>
+                <a:latin typeface="Arial" panose="020B0604020202020204" pitchFamily="34" charset="0"/>
+              </a:rPr>
+              <a:t>Post::class </a:t>
+            </a:r>
+            <a:r>
+              <a:rPr kumimoji="0" lang="en-US" altLang="en-US" sz="1300" b="0" i="0" u="none" strike="noStrike" cap="none" normalizeH="0" baseline="0">
+                <a:ln>
+                  <a:noFill/>
+                </a:ln>
+                <a:solidFill>
+                  <a:schemeClr val="tx1"/>
+                </a:solidFill>
+                <a:effectLst/>
+                <a:latin typeface="Arial" panose="020B0604020202020204" pitchFamily="34" charset="0"/>
+              </a:rPr>
+              <a:t>→ Yəni bu Policy</a:t>
+            </a:r>
+            <a:r>
+              <a:rPr kumimoji="0" lang="az-Latn-AZ" altLang="en-US" sz="1300" b="0" i="0" u="none" strike="noStrike" cap="none" normalizeH="0" baseline="0">
+                <a:ln>
+                  <a:noFill/>
+                </a:ln>
+                <a:solidFill>
+                  <a:schemeClr val="tx1"/>
+                </a:solidFill>
+                <a:effectLst/>
+                <a:latin typeface="Arial" panose="020B0604020202020204" pitchFamily="34" charset="0"/>
+              </a:rPr>
+              <a:t>, sadəcə</a:t>
+            </a:r>
+            <a:r>
+              <a:rPr kumimoji="0" lang="en-US" altLang="en-US" sz="1300" b="0" i="0" u="none" strike="noStrike" cap="none" normalizeH="0" baseline="0">
+                <a:ln>
+                  <a:noFill/>
+                </a:ln>
+                <a:solidFill>
+                  <a:schemeClr val="tx1"/>
+                </a:solidFill>
+                <a:effectLst/>
+                <a:latin typeface="Arial" panose="020B0604020202020204" pitchFamily="34" charset="0"/>
+              </a:rPr>
+              <a:t> </a:t>
+            </a:r>
+            <a:r>
+              <a:rPr kumimoji="0" lang="en-US" altLang="en-US" sz="1300" b="1" i="0" u="none" strike="noStrike" cap="none" normalizeH="0" baseline="0">
+                <a:ln>
+                  <a:noFill/>
+                </a:ln>
+                <a:solidFill>
+                  <a:schemeClr val="tx1"/>
+                </a:solidFill>
+                <a:effectLst/>
+                <a:latin typeface="Arial" panose="020B0604020202020204" pitchFamily="34" charset="0"/>
+              </a:rPr>
+              <a:t>Post</a:t>
+            </a:r>
+            <a:r>
+              <a:rPr kumimoji="0" lang="en-US" altLang="en-US" sz="1300" b="0" i="0" u="none" strike="noStrike" cap="none" normalizeH="0" baseline="0">
+                <a:ln>
+                  <a:noFill/>
+                </a:ln>
+                <a:solidFill>
+                  <a:schemeClr val="tx1"/>
+                </a:solidFill>
+                <a:effectLst/>
+                <a:latin typeface="Arial" panose="020B0604020202020204" pitchFamily="34" charset="0"/>
+              </a:rPr>
+              <a:t> modelinə aiddir.</a:t>
+            </a:r>
+            <a:endParaRPr kumimoji="0" lang="az-Latn-AZ" altLang="en-US" sz="1300" b="0" i="0" u="none" strike="noStrike" cap="none" normalizeH="0" baseline="0">
+              <a:ln>
+                <a:noFill/>
+              </a:ln>
+              <a:solidFill>
+                <a:schemeClr val="tx1"/>
+              </a:solidFill>
+              <a:effectLst/>
+              <a:latin typeface="Arial" panose="020B0604020202020204" pitchFamily="34" charset="0"/>
+            </a:endParaRPr>
+          </a:p>
+          <a:p>
+            <a:pPr>
+              <a:lnSpc>
+                <a:spcPct val="150000"/>
+              </a:lnSpc>
+              <a:buNone/>
+            </a:pPr>
+            <a:endParaRPr lang="az-Latn-AZ" altLang="en-US" sz="1300">
+              <a:latin typeface="Arial" panose="020B0604020202020204" pitchFamily="34" charset="0"/>
+            </a:endParaRPr>
+          </a:p>
+          <a:p>
+            <a:pPr>
+              <a:lnSpc>
+                <a:spcPct val="150000"/>
+              </a:lnSpc>
+              <a:buNone/>
+            </a:pPr>
+            <a:endParaRPr kumimoji="0" lang="az-Latn-AZ" altLang="en-US" sz="1300" b="0" i="0" u="none" strike="noStrike" cap="none" normalizeH="0" baseline="0">
+              <a:ln>
+                <a:noFill/>
+              </a:ln>
+              <a:solidFill>
+                <a:schemeClr val="tx1"/>
+              </a:solidFill>
+              <a:effectLst/>
+              <a:latin typeface="Arial" panose="020B0604020202020204" pitchFamily="34" charset="0"/>
+            </a:endParaRPr>
+          </a:p>
+          <a:p>
+            <a:pPr>
+              <a:lnSpc>
+                <a:spcPct val="150000"/>
+              </a:lnSpc>
+              <a:buNone/>
+            </a:pPr>
+            <a:endParaRPr kumimoji="0" lang="en-US" altLang="en-US" sz="1300" b="0" i="0" u="none" strike="noStrike" cap="none" normalizeH="0" baseline="0">
+              <a:ln>
+                <a:noFill/>
+              </a:ln>
+              <a:solidFill>
+                <a:schemeClr val="tx1"/>
+              </a:solidFill>
+              <a:effectLst/>
+              <a:latin typeface="Arial" panose="020B0604020202020204" pitchFamily="34" charset="0"/>
+            </a:endParaRPr>
+          </a:p>
+        </p:txBody>
+      </p:sp>
+      <p:pic>
+        <p:nvPicPr>
+          <p:cNvPr id="4" name="Picture 3">
+            <a:extLst>
+              <a:ext uri="{FF2B5EF4-FFF2-40B4-BE49-F238E27FC236}">
+                <a16:creationId xmlns:a16="http://schemas.microsoft.com/office/drawing/2014/main" id="{74515060-3A6C-7473-8C54-D22C56A35568}"/>
+              </a:ext>
+            </a:extLst>
+          </p:cNvPr>
+          <p:cNvPicPr>
+            <a:picLocks noChangeAspect="1"/>
+          </p:cNvPicPr>
+          <p:nvPr/>
+        </p:nvPicPr>
+        <p:blipFill>
+          <a:blip r:embed="rId2"/>
+          <a:stretch>
+            <a:fillRect/>
+          </a:stretch>
+        </p:blipFill>
+        <p:spPr>
+          <a:xfrm>
+            <a:off x="217714" y="1421643"/>
+            <a:ext cx="3648584" cy="504895"/>
+          </a:xfrm>
+          <a:prstGeom prst="rect">
+            <a:avLst/>
+          </a:prstGeom>
+        </p:spPr>
+      </p:pic>
+    </p:spTree>
+    <p:extLst>
+      <p:ext uri="{BB962C8B-B14F-4D97-AF65-F5344CB8AC3E}">
+        <p14:creationId xmlns:p14="http://schemas.microsoft.com/office/powerpoint/2010/main" val="228436366"/>
+      </p:ext>
+    </p:extLst>
+  </p:cSld>
+  <p:clrMapOvr>
+    <a:masterClrMapping/>
+  </p:clrMapOvr>
+</p:sld>
+</file>
+
+<file path=ppt/slides/slide7.xml><?xml version="1.0" encoding="utf-8"?>
+<p:sld xmlns:a="http://schemas.openxmlformats.org/drawingml/2006/main" xmlns:r="http://schemas.openxmlformats.org/officeDocument/2006/relationships" xmlns:p="http://schemas.openxmlformats.org/presentationml/2006/main">
+  <p:cSld>
+    <p:spTree>
+      <p:nvGrpSpPr>
+        <p:cNvPr id="1" name="">
+          <a:extLst>
+            <a:ext uri="{FF2B5EF4-FFF2-40B4-BE49-F238E27FC236}">
+              <a16:creationId xmlns:a16="http://schemas.microsoft.com/office/drawing/2014/main" id="{99454002-D9DD-E788-78C8-75CB3115D271}"/>
+            </a:ext>
+          </a:extLst>
+        </p:cNvPr>
+        <p:cNvGrpSpPr/>
+        <p:nvPr/>
+      </p:nvGrpSpPr>
+      <p:grpSpPr>
+        <a:xfrm>
+          <a:off x="0" y="0"/>
+          <a:ext cx="0" cy="0"/>
+          <a:chOff x="0" y="0"/>
+          <a:chExt cx="0" cy="0"/>
+        </a:xfrm>
+      </p:grpSpPr>
+      <p:sp>
+        <p:nvSpPr>
+          <p:cNvPr id="3" name="TextBox 2">
+            <a:extLst>
+              <a:ext uri="{FF2B5EF4-FFF2-40B4-BE49-F238E27FC236}">
+                <a16:creationId xmlns:a16="http://schemas.microsoft.com/office/drawing/2014/main" id="{1330A409-6738-4902-D06A-DE109B165B5F}"/>
+              </a:ext>
+            </a:extLst>
+          </p:cNvPr>
+          <p:cNvSpPr txBox="1"/>
+          <p:nvPr/>
+        </p:nvSpPr>
+        <p:spPr>
+          <a:xfrm>
+            <a:off x="217714" y="255046"/>
+            <a:ext cx="11756571" cy="6056915"/>
+          </a:xfrm>
+          <a:prstGeom prst="rect">
+            <a:avLst/>
+          </a:prstGeom>
+          <a:noFill/>
+        </p:spPr>
+        <p:txBody>
+          <a:bodyPr wrap="square">
+            <a:spAutoFit/>
+          </a:bodyPr>
+          <a:lstStyle/>
+          <a:p>
+            <a:pPr>
+              <a:lnSpc>
+                <a:spcPct val="150000"/>
+              </a:lnSpc>
+              <a:buNone/>
+            </a:pPr>
+            <a:r>
+              <a:rPr kumimoji="0" lang="en-US" altLang="en-US" sz="1300" b="1" i="0" u="none" strike="noStrike" cap="none" normalizeH="0" baseline="0">
+                <a:ln>
+                  <a:noFill/>
+                </a:ln>
+                <a:solidFill>
+                  <a:srgbClr val="FF0000"/>
+                </a:solidFill>
+                <a:effectLst/>
+                <a:latin typeface="Arial" panose="020B0604020202020204" pitchFamily="34" charset="0"/>
+              </a:rPr>
+              <a:t>@can('update', $post) – Blade içində icazə yoxlaması</a:t>
+            </a:r>
+            <a:endParaRPr kumimoji="0" lang="az-Latn-AZ" altLang="en-US" sz="1300" b="1" i="0" u="none" strike="noStrike" cap="none" normalizeH="0" baseline="0">
+              <a:ln>
+                <a:noFill/>
+              </a:ln>
+              <a:solidFill>
+                <a:srgbClr val="FF0000"/>
+              </a:solidFill>
+              <a:effectLst/>
+              <a:latin typeface="Arial" panose="020B0604020202020204" pitchFamily="34" charset="0"/>
+            </a:endParaRPr>
+          </a:p>
+          <a:p>
+            <a:pPr>
+              <a:lnSpc>
+                <a:spcPct val="150000"/>
+              </a:lnSpc>
+              <a:buNone/>
+            </a:pPr>
+            <a:endParaRPr lang="az-Latn-AZ" altLang="en-US" sz="1300">
+              <a:latin typeface="Arial" panose="020B0604020202020204" pitchFamily="34" charset="0"/>
+            </a:endParaRPr>
+          </a:p>
+          <a:p>
+            <a:pPr>
+              <a:lnSpc>
+                <a:spcPct val="150000"/>
+              </a:lnSpc>
+              <a:buNone/>
+            </a:pPr>
+            <a:r>
+              <a:rPr kumimoji="0" lang="en-US" altLang="en-US" sz="1300" b="1" i="0" u="none" strike="noStrike" cap="none" normalizeH="0" baseline="0">
+                <a:ln>
+                  <a:noFill/>
+                </a:ln>
+                <a:solidFill>
+                  <a:schemeClr val="tx1"/>
+                </a:solidFill>
+                <a:effectLst/>
+                <a:latin typeface="Arial" panose="020B0604020202020204" pitchFamily="34" charset="0"/>
+              </a:rPr>
+              <a:t>Yol</a:t>
+            </a:r>
+            <a:r>
+              <a:rPr kumimoji="0" lang="en-US" altLang="en-US" sz="1300" b="0" i="0" u="none" strike="noStrike" cap="none" normalizeH="0" baseline="0">
+                <a:ln>
+                  <a:noFill/>
+                </a:ln>
+                <a:solidFill>
+                  <a:schemeClr val="tx1"/>
+                </a:solidFill>
+                <a:effectLst/>
+                <a:latin typeface="Arial" panose="020B0604020202020204" pitchFamily="34" charset="0"/>
+              </a:rPr>
+              <a:t>: </a:t>
+            </a:r>
+            <a:r>
+              <a:rPr kumimoji="0" lang="en-US" altLang="en-US" sz="1300" b="0" i="0" u="sng" strike="noStrike" cap="none" normalizeH="0" baseline="0">
+                <a:ln>
+                  <a:noFill/>
+                </a:ln>
+                <a:solidFill>
+                  <a:srgbClr val="00B0F0"/>
+                </a:solidFill>
+                <a:effectLst/>
+                <a:latin typeface="Arial" panose="020B0604020202020204" pitchFamily="34" charset="0"/>
+              </a:rPr>
+              <a:t>resources\views\index.blade.php</a:t>
+            </a:r>
+            <a:endParaRPr kumimoji="0" lang="az-Latn-AZ" altLang="en-US" sz="1300" b="0" i="0" u="sng" strike="noStrike" cap="none" normalizeH="0" baseline="0">
+              <a:ln>
+                <a:noFill/>
+              </a:ln>
+              <a:solidFill>
+                <a:srgbClr val="00B0F0"/>
+              </a:solidFill>
+              <a:effectLst/>
+              <a:latin typeface="Arial" panose="020B0604020202020204" pitchFamily="34" charset="0"/>
+            </a:endParaRPr>
+          </a:p>
+          <a:p>
+            <a:pPr>
+              <a:lnSpc>
+                <a:spcPct val="150000"/>
+              </a:lnSpc>
+              <a:buNone/>
+            </a:pPr>
+            <a:endParaRPr lang="az-Latn-AZ" altLang="en-US" sz="1300">
+              <a:latin typeface="Arial" panose="020B0604020202020204" pitchFamily="34" charset="0"/>
+            </a:endParaRPr>
+          </a:p>
+          <a:p>
+            <a:pPr>
+              <a:lnSpc>
+                <a:spcPct val="150000"/>
+              </a:lnSpc>
+              <a:buNone/>
+            </a:pPr>
+            <a:endParaRPr kumimoji="0" lang="az-Latn-AZ" altLang="en-US" sz="1300" b="0" i="0" u="none" strike="noStrike" cap="none" normalizeH="0" baseline="0">
+              <a:ln>
+                <a:noFill/>
+              </a:ln>
+              <a:solidFill>
+                <a:schemeClr val="tx1"/>
+              </a:solidFill>
+              <a:effectLst/>
+              <a:latin typeface="Arial" panose="020B0604020202020204" pitchFamily="34" charset="0"/>
+            </a:endParaRPr>
+          </a:p>
+          <a:p>
+            <a:pPr>
+              <a:lnSpc>
+                <a:spcPct val="150000"/>
+              </a:lnSpc>
+              <a:buNone/>
+            </a:pPr>
+            <a:endParaRPr lang="az-Latn-AZ" altLang="en-US" sz="1300">
+              <a:latin typeface="Arial" panose="020B0604020202020204" pitchFamily="34" charset="0"/>
+            </a:endParaRPr>
+          </a:p>
+          <a:p>
+            <a:pPr>
+              <a:lnSpc>
+                <a:spcPct val="150000"/>
+              </a:lnSpc>
+              <a:buNone/>
+            </a:pPr>
+            <a:endParaRPr kumimoji="0" lang="az-Latn-AZ" altLang="en-US" sz="1300" b="0" i="0" u="none" strike="noStrike" cap="none" normalizeH="0" baseline="0">
+              <a:ln>
+                <a:noFill/>
+              </a:ln>
+              <a:solidFill>
+                <a:schemeClr val="tx1"/>
+              </a:solidFill>
+              <a:effectLst/>
+              <a:latin typeface="Arial" panose="020B0604020202020204" pitchFamily="34" charset="0"/>
+            </a:endParaRPr>
+          </a:p>
+          <a:p>
+            <a:pPr>
+              <a:lnSpc>
+                <a:spcPct val="150000"/>
+              </a:lnSpc>
+              <a:buNone/>
+            </a:pPr>
+            <a:endParaRPr lang="az-Latn-AZ" altLang="en-US" sz="1300">
+              <a:latin typeface="Arial" panose="020B0604020202020204" pitchFamily="34" charset="0"/>
+            </a:endParaRPr>
+          </a:p>
+          <a:p>
+            <a:pPr>
+              <a:lnSpc>
+                <a:spcPct val="150000"/>
+              </a:lnSpc>
+              <a:buNone/>
+            </a:pPr>
+            <a:r>
+              <a:rPr kumimoji="0" lang="en-US" altLang="en-US" sz="1300" b="1" i="0" u="none" strike="noStrike" cap="none" normalizeH="0" baseline="0">
+                <a:ln>
+                  <a:noFill/>
+                </a:ln>
+                <a:solidFill>
+                  <a:schemeClr val="tx1"/>
+                </a:solidFill>
+                <a:effectLst/>
+                <a:latin typeface="Arial" panose="020B0604020202020204" pitchFamily="34" charset="0"/>
+              </a:rPr>
+              <a:t>Bu deyir ki</a:t>
+            </a:r>
+            <a:r>
+              <a:rPr kumimoji="0" lang="en-US" altLang="en-US" sz="1300" b="0" i="0" u="none" strike="noStrike" cap="none" normalizeH="0" baseline="0">
+                <a:ln>
+                  <a:noFill/>
+                </a:ln>
+                <a:solidFill>
+                  <a:schemeClr val="tx1"/>
+                </a:solidFill>
+                <a:effectLst/>
+                <a:latin typeface="Arial" panose="020B0604020202020204" pitchFamily="34" charset="0"/>
+              </a:rPr>
+              <a:t>: Əgər cari istifadəçiyə </a:t>
+            </a:r>
+            <a:r>
+              <a:rPr kumimoji="0" lang="en-US" altLang="en-US" sz="1300" b="1" i="0" u="none" strike="noStrike" cap="none" normalizeH="0" baseline="0">
+                <a:ln>
+                  <a:noFill/>
+                </a:ln>
+                <a:solidFill>
+                  <a:schemeClr val="tx1"/>
+                </a:solidFill>
+                <a:effectLst/>
+                <a:latin typeface="Arial" panose="020B0604020202020204" pitchFamily="34" charset="0"/>
+              </a:rPr>
+              <a:t>$post </a:t>
+            </a:r>
+            <a:r>
+              <a:rPr kumimoji="0" lang="en-US" altLang="en-US" sz="1300" b="0" i="0" u="none" strike="noStrike" cap="none" normalizeH="0" baseline="0">
+                <a:ln>
+                  <a:noFill/>
+                </a:ln>
+                <a:solidFill>
+                  <a:schemeClr val="tx1"/>
+                </a:solidFill>
+                <a:effectLst/>
+                <a:latin typeface="Arial" panose="020B0604020202020204" pitchFamily="34" charset="0"/>
+              </a:rPr>
+              <a:t>üzərində </a:t>
+            </a:r>
+            <a:r>
+              <a:rPr kumimoji="0" lang="en-US" altLang="en-US" sz="1300" b="1" i="0" u="none" strike="noStrike" cap="none" normalizeH="0" baseline="0">
+                <a:ln>
+                  <a:noFill/>
+                </a:ln>
+                <a:solidFill>
+                  <a:schemeClr val="tx1"/>
+                </a:solidFill>
+                <a:effectLst/>
+                <a:latin typeface="Arial" panose="020B0604020202020204" pitchFamily="34" charset="0"/>
+              </a:rPr>
+              <a:t>update</a:t>
+            </a:r>
+            <a:r>
+              <a:rPr kumimoji="0" lang="en-US" altLang="en-US" sz="1300" b="0" i="0" u="none" strike="noStrike" cap="none" normalizeH="0" baseline="0">
+                <a:ln>
+                  <a:noFill/>
+                </a:ln>
+                <a:solidFill>
+                  <a:schemeClr val="tx1"/>
+                </a:solidFill>
+                <a:effectLst/>
+                <a:latin typeface="Arial" panose="020B0604020202020204" pitchFamily="34" charset="0"/>
+              </a:rPr>
+              <a:t> əməliyyatı üçün icazə varsa, </a:t>
+            </a:r>
+            <a:r>
+              <a:rPr kumimoji="0" lang="en-US" altLang="en-US" sz="1300" b="1" i="0" u="none" strike="noStrike" cap="none" normalizeH="0" baseline="0">
+                <a:ln>
+                  <a:noFill/>
+                </a:ln>
+                <a:solidFill>
+                  <a:schemeClr val="tx1"/>
+                </a:solidFill>
+                <a:effectLst/>
+                <a:latin typeface="Arial" panose="020B0604020202020204" pitchFamily="34" charset="0"/>
+              </a:rPr>
+              <a:t>button</a:t>
+            </a:r>
+            <a:r>
+              <a:rPr kumimoji="0" lang="en-US" altLang="en-US" sz="1300" b="0" i="0" u="none" strike="noStrike" cap="none" normalizeH="0" baseline="0">
+                <a:ln>
+                  <a:noFill/>
+                </a:ln>
+                <a:solidFill>
+                  <a:schemeClr val="tx1"/>
+                </a:solidFill>
+                <a:effectLst/>
+                <a:latin typeface="Arial" panose="020B0604020202020204" pitchFamily="34" charset="0"/>
+              </a:rPr>
+              <a:t> </a:t>
+            </a:r>
+            <a:r>
+              <a:rPr kumimoji="0" lang="az-Latn-AZ" altLang="en-US" sz="1300" b="0" i="0" u="none" strike="noStrike" cap="none" normalizeH="0" baseline="0">
+                <a:ln>
+                  <a:noFill/>
+                </a:ln>
+                <a:solidFill>
+                  <a:schemeClr val="tx1"/>
+                </a:solidFill>
+                <a:effectLst/>
+                <a:latin typeface="Arial" panose="020B0604020202020204" pitchFamily="34" charset="0"/>
+              </a:rPr>
+              <a:t>-ı </a:t>
+            </a:r>
+            <a:r>
+              <a:rPr kumimoji="0" lang="en-US" altLang="en-US" sz="1300" b="0" i="0" u="none" strike="noStrike" cap="none" normalizeH="0" baseline="0">
+                <a:ln>
+                  <a:noFill/>
+                </a:ln>
+                <a:solidFill>
+                  <a:schemeClr val="tx1"/>
+                </a:solidFill>
+                <a:effectLst/>
+                <a:latin typeface="Arial" panose="020B0604020202020204" pitchFamily="34" charset="0"/>
+              </a:rPr>
+              <a:t>göstər.</a:t>
+            </a:r>
+            <a:endParaRPr kumimoji="0" lang="az-Latn-AZ" altLang="en-US" sz="1300" b="0" i="0" u="none" strike="noStrike" cap="none" normalizeH="0" baseline="0">
+              <a:ln>
+                <a:noFill/>
+              </a:ln>
+              <a:solidFill>
+                <a:schemeClr val="tx1"/>
+              </a:solidFill>
+              <a:effectLst/>
+              <a:latin typeface="Arial" panose="020B0604020202020204" pitchFamily="34" charset="0"/>
+            </a:endParaRPr>
+          </a:p>
+          <a:p>
+            <a:pPr>
+              <a:lnSpc>
+                <a:spcPct val="150000"/>
+              </a:lnSpc>
+              <a:buNone/>
+            </a:pPr>
+            <a:endParaRPr lang="az-Latn-AZ" altLang="en-US" sz="1300">
+              <a:latin typeface="Arial" panose="020B0604020202020204" pitchFamily="34" charset="0"/>
+            </a:endParaRPr>
+          </a:p>
+          <a:p>
+            <a:pPr>
+              <a:lnSpc>
+                <a:spcPct val="150000"/>
+              </a:lnSpc>
+              <a:buNone/>
+            </a:pPr>
+            <a:endParaRPr kumimoji="0" lang="az-Latn-AZ" altLang="en-US" sz="1300" b="0" i="0" u="none" strike="noStrike" cap="none" normalizeH="0" baseline="0">
+              <a:ln>
+                <a:noFill/>
+              </a:ln>
+              <a:solidFill>
+                <a:schemeClr val="tx1"/>
+              </a:solidFill>
+              <a:effectLst/>
+              <a:latin typeface="Arial" panose="020B0604020202020204" pitchFamily="34" charset="0"/>
+            </a:endParaRPr>
+          </a:p>
+          <a:p>
+            <a:pPr>
+              <a:lnSpc>
+                <a:spcPct val="150000"/>
+              </a:lnSpc>
+              <a:buNone/>
+            </a:pPr>
+            <a:endParaRPr lang="az-Latn-AZ" altLang="en-US" sz="1300">
+              <a:latin typeface="Arial" panose="020B0604020202020204" pitchFamily="34" charset="0"/>
+            </a:endParaRPr>
+          </a:p>
+          <a:p>
+            <a:pPr>
+              <a:lnSpc>
+                <a:spcPct val="150000"/>
+              </a:lnSpc>
+              <a:buNone/>
+            </a:pPr>
+            <a:endParaRPr kumimoji="0" lang="az-Latn-AZ" altLang="en-US" sz="1300" b="0" i="0" u="none" strike="noStrike" cap="none" normalizeH="0" baseline="0">
+              <a:ln>
+                <a:noFill/>
+              </a:ln>
+              <a:solidFill>
+                <a:schemeClr val="tx1"/>
+              </a:solidFill>
+              <a:effectLst/>
+              <a:latin typeface="Arial" panose="020B0604020202020204" pitchFamily="34" charset="0"/>
+            </a:endParaRPr>
+          </a:p>
+          <a:p>
+            <a:pPr>
+              <a:lnSpc>
+                <a:spcPct val="150000"/>
+              </a:lnSpc>
+              <a:buNone/>
+            </a:pPr>
+            <a:r>
+              <a:rPr kumimoji="0" lang="en-US" altLang="en-US" sz="1300" b="1" i="0" u="none" strike="noStrike" cap="none" normalizeH="0" baseline="0">
+                <a:ln>
+                  <a:noFill/>
+                </a:ln>
+                <a:solidFill>
+                  <a:srgbClr val="00B050"/>
+                </a:solidFill>
+                <a:effectLst/>
+                <a:latin typeface="Arial" panose="020B0604020202020204" pitchFamily="34" charset="0"/>
+              </a:rPr>
+              <a:t>Niyə $post verilir?</a:t>
+            </a:r>
+            <a:endParaRPr kumimoji="0" lang="az-Latn-AZ" altLang="en-US" sz="1300" b="1" i="0" u="none" strike="noStrike" cap="none" normalizeH="0" baseline="0">
+              <a:ln>
+                <a:noFill/>
+              </a:ln>
+              <a:solidFill>
+                <a:srgbClr val="00B050"/>
+              </a:solidFill>
+              <a:effectLst/>
+              <a:latin typeface="Arial" panose="020B0604020202020204" pitchFamily="34" charset="0"/>
+            </a:endParaRPr>
+          </a:p>
+          <a:p>
+            <a:pPr>
+              <a:lnSpc>
+                <a:spcPct val="150000"/>
+              </a:lnSpc>
+              <a:buNone/>
+            </a:pPr>
+            <a:endParaRPr kumimoji="0" lang="en-US" altLang="en-US" sz="1300" b="1" i="0" u="none" strike="noStrike" cap="none" normalizeH="0" baseline="0">
+              <a:ln>
+                <a:noFill/>
+              </a:ln>
+              <a:solidFill>
+                <a:srgbClr val="00B050"/>
+              </a:solidFill>
+              <a:effectLst/>
+              <a:latin typeface="Arial" panose="020B0604020202020204" pitchFamily="34" charset="0"/>
+            </a:endParaRPr>
+          </a:p>
+          <a:p>
+            <a:pPr>
+              <a:lnSpc>
+                <a:spcPct val="150000"/>
+              </a:lnSpc>
+              <a:buNone/>
+            </a:pPr>
+            <a:r>
+              <a:rPr kumimoji="0" lang="en-US" altLang="en-US" sz="1300" b="0" i="0" u="none" strike="noStrike" cap="none" normalizeH="0" baseline="0">
+                <a:ln>
+                  <a:noFill/>
+                </a:ln>
+                <a:solidFill>
+                  <a:schemeClr val="tx1"/>
+                </a:solidFill>
+                <a:effectLst/>
+                <a:latin typeface="Arial" panose="020B0604020202020204" pitchFamily="34" charset="0"/>
+              </a:rPr>
+              <a:t>Çünki </a:t>
+            </a:r>
+            <a:r>
+              <a:rPr kumimoji="0" lang="en-US" altLang="en-US" sz="1300" b="1" i="0" u="none" strike="noStrike" cap="none" normalizeH="0" baseline="0">
+                <a:ln>
+                  <a:noFill/>
+                </a:ln>
+                <a:solidFill>
+                  <a:schemeClr val="tx1"/>
+                </a:solidFill>
+                <a:effectLst/>
+                <a:latin typeface="Arial" panose="020B0604020202020204" pitchFamily="34" charset="0"/>
+              </a:rPr>
+              <a:t>PostPolicy::update(User $user, Post $post) </a:t>
+            </a:r>
+            <a:r>
+              <a:rPr kumimoji="0" lang="en-US" altLang="en-US" sz="1300" b="0" i="0" u="none" strike="noStrike" cap="none" normalizeH="0" baseline="0">
+                <a:ln>
+                  <a:noFill/>
+                </a:ln>
+                <a:solidFill>
+                  <a:schemeClr val="tx1"/>
+                </a:solidFill>
+                <a:effectLst/>
+                <a:latin typeface="Arial" panose="020B0604020202020204" pitchFamily="34" charset="0"/>
+              </a:rPr>
+              <a:t>bu formada </a:t>
+            </a:r>
+            <a:r>
+              <a:rPr kumimoji="0" lang="en-US" altLang="en-US" sz="1300" b="1" i="0" u="none" strike="noStrike" cap="none" normalizeH="0" baseline="0">
+                <a:ln>
+                  <a:noFill/>
+                </a:ln>
+                <a:solidFill>
+                  <a:schemeClr val="tx1"/>
+                </a:solidFill>
+                <a:effectLst/>
+                <a:latin typeface="Arial" panose="020B0604020202020204" pitchFamily="34" charset="0"/>
+              </a:rPr>
+              <a:t>iki</a:t>
+            </a:r>
+            <a:r>
+              <a:rPr kumimoji="0" lang="en-US" altLang="en-US" sz="1300" b="0" i="0" u="none" strike="noStrike" cap="none" normalizeH="0" baseline="0">
+                <a:ln>
+                  <a:noFill/>
+                </a:ln>
+                <a:solidFill>
+                  <a:schemeClr val="tx1"/>
+                </a:solidFill>
+                <a:effectLst/>
+                <a:latin typeface="Arial" panose="020B0604020202020204" pitchFamily="34" charset="0"/>
+              </a:rPr>
+              <a:t> parametr tələb edir:</a:t>
+            </a:r>
+          </a:p>
+          <a:p>
+            <a:pPr marL="742950" lvl="1" indent="-285750">
+              <a:lnSpc>
+                <a:spcPct val="150000"/>
+              </a:lnSpc>
+              <a:buFont typeface="Wingdings" panose="05000000000000000000" pitchFamily="2" charset="2"/>
+              <a:buChar char="q"/>
+            </a:pPr>
+            <a:r>
+              <a:rPr kumimoji="0" lang="en-US" altLang="en-US" sz="1300" b="0" i="0" u="none" strike="noStrike" cap="none" normalizeH="0" baseline="0">
+                <a:ln>
+                  <a:noFill/>
+                </a:ln>
+                <a:solidFill>
+                  <a:schemeClr val="tx1"/>
+                </a:solidFill>
+                <a:effectLst/>
+                <a:latin typeface="Arial" panose="020B0604020202020204" pitchFamily="34" charset="0"/>
+              </a:rPr>
+              <a:t>Cari istifadəçi</a:t>
+            </a:r>
+          </a:p>
+          <a:p>
+            <a:pPr marL="742950" lvl="1" indent="-285750">
+              <a:lnSpc>
+                <a:spcPct val="150000"/>
+              </a:lnSpc>
+              <a:buFont typeface="Wingdings" panose="05000000000000000000" pitchFamily="2" charset="2"/>
+              <a:buChar char="q"/>
+            </a:pPr>
+            <a:r>
+              <a:rPr kumimoji="0" lang="en-US" altLang="en-US" sz="1300" b="0" i="0" u="none" strike="noStrike" cap="none" normalizeH="0" baseline="0">
+                <a:ln>
+                  <a:noFill/>
+                </a:ln>
+                <a:solidFill>
+                  <a:schemeClr val="tx1"/>
+                </a:solidFill>
+                <a:effectLst/>
+                <a:latin typeface="Arial" panose="020B0604020202020204" pitchFamily="34" charset="0"/>
+              </a:rPr>
+              <a:t>Müəyyən post obyekti</a:t>
+            </a:r>
+          </a:p>
+          <a:p>
+            <a:pPr>
+              <a:lnSpc>
+                <a:spcPct val="150000"/>
+              </a:lnSpc>
+              <a:buNone/>
+            </a:pPr>
+            <a:endParaRPr kumimoji="0" lang="en-US" altLang="en-US" sz="1300" b="0" i="0" u="none" strike="noStrike" cap="none" normalizeH="0" baseline="0">
+              <a:ln>
+                <a:noFill/>
+              </a:ln>
+              <a:solidFill>
+                <a:schemeClr val="tx1"/>
+              </a:solidFill>
+              <a:effectLst/>
+              <a:latin typeface="Arial" panose="020B0604020202020204" pitchFamily="34" charset="0"/>
+            </a:endParaRPr>
+          </a:p>
+          <a:p>
+            <a:pPr>
+              <a:lnSpc>
+                <a:spcPct val="150000"/>
+              </a:lnSpc>
+              <a:buNone/>
+            </a:pPr>
+            <a:r>
+              <a:rPr kumimoji="0" lang="en-US" altLang="en-US" sz="1300" b="0" i="0" u="none" strike="noStrike" cap="none" normalizeH="0" baseline="0">
+                <a:ln>
+                  <a:noFill/>
+                </a:ln>
+                <a:solidFill>
+                  <a:schemeClr val="tx1"/>
+                </a:solidFill>
+                <a:effectLst/>
+                <a:latin typeface="Arial" panose="020B0604020202020204" pitchFamily="34" charset="0"/>
+              </a:rPr>
+              <a:t>Əgər </a:t>
+            </a:r>
+            <a:r>
+              <a:rPr kumimoji="0" lang="en-US" altLang="en-US" sz="1300" b="1" i="0" u="none" strike="noStrike" cap="none" normalizeH="0" baseline="0">
+                <a:ln>
+                  <a:noFill/>
+                </a:ln>
+                <a:solidFill>
+                  <a:schemeClr val="tx1"/>
+                </a:solidFill>
+                <a:effectLst/>
+                <a:latin typeface="Arial" panose="020B0604020202020204" pitchFamily="34" charset="0"/>
+              </a:rPr>
+              <a:t>$post </a:t>
+            </a:r>
+            <a:r>
+              <a:rPr kumimoji="0" lang="en-US" altLang="en-US" sz="1300" b="0" i="0" u="none" strike="noStrike" cap="none" normalizeH="0" baseline="0">
+                <a:ln>
+                  <a:noFill/>
+                </a:ln>
+                <a:solidFill>
+                  <a:schemeClr val="tx1"/>
+                </a:solidFill>
+                <a:effectLst/>
+                <a:latin typeface="Arial" panose="020B0604020202020204" pitchFamily="34" charset="0"/>
+              </a:rPr>
+              <a:t>göndərilməsəydi, Laravel bilməzdi hansı </a:t>
+            </a:r>
+            <a:r>
+              <a:rPr kumimoji="0" lang="en-US" altLang="en-US" sz="1300" b="1" i="0" u="none" strike="noStrike" cap="none" normalizeH="0" baseline="0">
+                <a:ln>
+                  <a:noFill/>
+                </a:ln>
+                <a:solidFill>
+                  <a:schemeClr val="tx1"/>
+                </a:solidFill>
+                <a:effectLst/>
+                <a:latin typeface="Arial" panose="020B0604020202020204" pitchFamily="34" charset="0"/>
+              </a:rPr>
+              <a:t>post</a:t>
+            </a:r>
+            <a:r>
+              <a:rPr kumimoji="0" lang="en-US" altLang="en-US" sz="1300" b="0" i="0" u="none" strike="noStrike" cap="none" normalizeH="0" baseline="0">
+                <a:ln>
+                  <a:noFill/>
+                </a:ln>
+                <a:solidFill>
+                  <a:schemeClr val="tx1"/>
+                </a:solidFill>
+                <a:effectLst/>
+                <a:latin typeface="Arial" panose="020B0604020202020204" pitchFamily="34" charset="0"/>
+              </a:rPr>
+              <a:t> redaktə olunur.</a:t>
+            </a:r>
+          </a:p>
+        </p:txBody>
+      </p:sp>
+      <p:pic>
+        <p:nvPicPr>
+          <p:cNvPr id="4" name="Picture 3">
+            <a:extLst>
+              <a:ext uri="{FF2B5EF4-FFF2-40B4-BE49-F238E27FC236}">
+                <a16:creationId xmlns:a16="http://schemas.microsoft.com/office/drawing/2014/main" id="{95ADE058-2C49-B848-B32C-ED94E97528CB}"/>
+              </a:ext>
+            </a:extLst>
+          </p:cNvPr>
+          <p:cNvPicPr>
+            <a:picLocks noChangeAspect="1"/>
+          </p:cNvPicPr>
+          <p:nvPr/>
+        </p:nvPicPr>
+        <p:blipFill>
+          <a:blip r:embed="rId2"/>
+          <a:stretch>
+            <a:fillRect/>
+          </a:stretch>
+        </p:blipFill>
+        <p:spPr>
+          <a:xfrm>
+            <a:off x="217714" y="1428393"/>
+            <a:ext cx="2372056" cy="971686"/>
+          </a:xfrm>
+          <a:prstGeom prst="rect">
+            <a:avLst/>
+          </a:prstGeom>
+        </p:spPr>
+      </p:pic>
+    </p:spTree>
+    <p:extLst>
+      <p:ext uri="{BB962C8B-B14F-4D97-AF65-F5344CB8AC3E}">
+        <p14:creationId xmlns:p14="http://schemas.microsoft.com/office/powerpoint/2010/main" val="404425056"/>
+      </p:ext>
+    </p:extLst>
+  </p:cSld>
+  <p:clrMapOvr>
+    <a:masterClrMapping/>
+  </p:clrMapOvr>
+</p:sld>
+</file>
+
+<file path=ppt/slides/slide8.xml><?xml version="1.0" encoding="utf-8"?>
+<p:sld xmlns:a="http://schemas.openxmlformats.org/drawingml/2006/main" xmlns:r="http://schemas.openxmlformats.org/officeDocument/2006/relationships" xmlns:p="http://schemas.openxmlformats.org/presentationml/2006/main">
+  <p:cSld>
+    <p:spTree>
+      <p:nvGrpSpPr>
+        <p:cNvPr id="1" name="">
+          <a:extLst>
+            <a:ext uri="{FF2B5EF4-FFF2-40B4-BE49-F238E27FC236}">
+              <a16:creationId xmlns:a16="http://schemas.microsoft.com/office/drawing/2014/main" id="{876C8EC7-D35A-F8C8-DA55-EBE21DF54819}"/>
+            </a:ext>
+          </a:extLst>
+        </p:cNvPr>
+        <p:cNvGrpSpPr/>
+        <p:nvPr/>
+      </p:nvGrpSpPr>
+      <p:grpSpPr>
+        <a:xfrm>
+          <a:off x="0" y="0"/>
+          <a:ext cx="0" cy="0"/>
+          <a:chOff x="0" y="0"/>
+          <a:chExt cx="0" cy="0"/>
+        </a:xfrm>
+      </p:grpSpPr>
+      <p:sp>
+        <p:nvSpPr>
+          <p:cNvPr id="3" name="TextBox 2">
+            <a:extLst>
+              <a:ext uri="{FF2B5EF4-FFF2-40B4-BE49-F238E27FC236}">
+                <a16:creationId xmlns:a16="http://schemas.microsoft.com/office/drawing/2014/main" id="{B6FF1630-D92E-E2D6-C287-F5EFBD4232AD}"/>
+              </a:ext>
+            </a:extLst>
+          </p:cNvPr>
+          <p:cNvSpPr txBox="1"/>
+          <p:nvPr/>
+        </p:nvSpPr>
+        <p:spPr>
+          <a:xfrm>
+            <a:off x="217714" y="255046"/>
+            <a:ext cx="11756571" cy="955518"/>
+          </a:xfrm>
+          <a:prstGeom prst="rect">
+            <a:avLst/>
+          </a:prstGeom>
+          <a:noFill/>
+        </p:spPr>
+        <p:txBody>
+          <a:bodyPr wrap="square">
+            <a:spAutoFit/>
+          </a:bodyPr>
+          <a:lstStyle/>
+          <a:p>
+            <a:pPr>
+              <a:lnSpc>
+                <a:spcPct val="150000"/>
+              </a:lnSpc>
+              <a:buNone/>
+            </a:pPr>
+            <a:r>
+              <a:rPr kumimoji="0" lang="en-US" altLang="en-US" sz="1300" b="1" i="0" u="none" strike="noStrike" cap="none" normalizeH="0" baseline="0">
+                <a:ln>
+                  <a:noFill/>
+                </a:ln>
+                <a:solidFill>
+                  <a:schemeClr val="tx1"/>
+                </a:solidFill>
+                <a:effectLst/>
+                <a:latin typeface="Arial" panose="020B0604020202020204" pitchFamily="34" charset="0"/>
+              </a:rPr>
+              <a:t>Praktiki Yadda Saxla</a:t>
+            </a:r>
+            <a:r>
+              <a:rPr kumimoji="0" lang="en-US" altLang="en-US" sz="1300" b="0" i="0" u="none" strike="noStrike" cap="none" normalizeH="0" baseline="0">
+                <a:ln>
+                  <a:noFill/>
+                </a:ln>
+                <a:solidFill>
+                  <a:schemeClr val="tx1"/>
+                </a:solidFill>
+                <a:effectLst/>
+                <a:latin typeface="Arial" panose="020B0604020202020204" pitchFamily="34" charset="0"/>
+              </a:rPr>
+              <a:t>:</a:t>
+            </a:r>
+            <a:endParaRPr kumimoji="0" lang="az-Latn-AZ" altLang="en-US" sz="1300" b="0" i="0" u="none" strike="noStrike" cap="none" normalizeH="0" baseline="0">
+              <a:ln>
+                <a:noFill/>
+              </a:ln>
+              <a:solidFill>
+                <a:schemeClr val="tx1"/>
+              </a:solidFill>
+              <a:effectLst/>
+              <a:latin typeface="Arial" panose="020B0604020202020204" pitchFamily="34" charset="0"/>
+            </a:endParaRPr>
+          </a:p>
+          <a:p>
+            <a:pPr>
+              <a:lnSpc>
+                <a:spcPct val="150000"/>
+              </a:lnSpc>
+              <a:buNone/>
+            </a:pPr>
+            <a:endParaRPr lang="az-Latn-AZ" altLang="en-US" sz="1300">
+              <a:latin typeface="Arial" panose="020B0604020202020204" pitchFamily="34" charset="0"/>
+            </a:endParaRPr>
+          </a:p>
+          <a:p>
+            <a:pPr>
+              <a:lnSpc>
+                <a:spcPct val="150000"/>
+              </a:lnSpc>
+              <a:buNone/>
+            </a:pPr>
+            <a:endParaRPr kumimoji="0" lang="en-US" altLang="en-US" sz="1300" b="0" i="0" u="none" strike="noStrike" cap="none" normalizeH="0" baseline="0">
+              <a:ln>
+                <a:noFill/>
+              </a:ln>
+              <a:solidFill>
+                <a:schemeClr val="tx1"/>
+              </a:solidFill>
+              <a:effectLst/>
+              <a:latin typeface="Arial" panose="020B0604020202020204" pitchFamily="34" charset="0"/>
+            </a:endParaRPr>
+          </a:p>
+        </p:txBody>
+      </p:sp>
+      <p:graphicFrame>
+        <p:nvGraphicFramePr>
+          <p:cNvPr id="2" name="Table 1">
+            <a:extLst>
+              <a:ext uri="{FF2B5EF4-FFF2-40B4-BE49-F238E27FC236}">
+                <a16:creationId xmlns:a16="http://schemas.microsoft.com/office/drawing/2014/main" id="{07B4A2CE-2276-6383-7034-C97F737A4824}"/>
+              </a:ext>
+            </a:extLst>
+          </p:cNvPr>
+          <p:cNvGraphicFramePr>
+            <a:graphicFrameLocks noGrp="1"/>
+          </p:cNvGraphicFramePr>
+          <p:nvPr>
+            <p:extLst>
+              <p:ext uri="{D42A27DB-BD31-4B8C-83A1-F6EECF244321}">
+                <p14:modId xmlns:p14="http://schemas.microsoft.com/office/powerpoint/2010/main" val="2395001278"/>
+              </p:ext>
+            </p:extLst>
+          </p:nvPr>
+        </p:nvGraphicFramePr>
+        <p:xfrm>
+          <a:off x="217714" y="842457"/>
+          <a:ext cx="7522359" cy="2344090"/>
+        </p:xfrm>
+        <a:graphic>
+          <a:graphicData uri="http://schemas.openxmlformats.org/drawingml/2006/table">
+            <a:tbl>
+              <a:tblPr/>
+              <a:tblGrid>
+                <a:gridCol w="2785670">
+                  <a:extLst>
+                    <a:ext uri="{9D8B030D-6E8A-4147-A177-3AD203B41FA5}">
+                      <a16:colId xmlns:a16="http://schemas.microsoft.com/office/drawing/2014/main" val="306992178"/>
+                    </a:ext>
+                  </a:extLst>
+                </a:gridCol>
+                <a:gridCol w="4736689">
+                  <a:extLst>
+                    <a:ext uri="{9D8B030D-6E8A-4147-A177-3AD203B41FA5}">
+                      <a16:colId xmlns:a16="http://schemas.microsoft.com/office/drawing/2014/main" val="1172055413"/>
+                    </a:ext>
+                  </a:extLst>
+                </a:gridCol>
+              </a:tblGrid>
+              <a:tr h="468818">
+                <a:tc>
+                  <a:txBody>
+                    <a:bodyPr/>
+                    <a:lstStyle/>
+                    <a:p>
+                      <a:r>
+                        <a:rPr lang="en-US" b="1" i="0"/>
+                        <a:t>Əməliyyat</a:t>
+                      </a:r>
+                    </a:p>
+                  </a:txBody>
+                  <a:tcPr anchor="ctr">
+                    <a:lnL w="12700" cap="flat" cmpd="sng" algn="ctr">
+                      <a:solidFill>
+                        <a:schemeClr val="tx1"/>
+                      </a:solidFill>
+                      <a:prstDash val="solid"/>
+                      <a:round/>
+                      <a:headEnd type="none" w="med" len="med"/>
+                      <a:tailEnd type="none" w="med" len="med"/>
+                    </a:lnL>
+                    <a:lnR w="12700" cap="flat" cmpd="sng" algn="ctr">
+                      <a:solidFill>
+                        <a:schemeClr val="tx1"/>
+                      </a:solidFill>
+                      <a:prstDash val="solid"/>
+                      <a:round/>
+                      <a:headEnd type="none" w="med" len="med"/>
+                      <a:tailEnd type="none" w="med" len="med"/>
+                    </a:lnR>
+                    <a:lnT w="12700" cap="flat" cmpd="sng" algn="ctr">
+                      <a:solidFill>
+                        <a:schemeClr val="tx1"/>
+                      </a:solidFill>
+                      <a:prstDash val="solid"/>
+                      <a:round/>
+                      <a:headEnd type="none" w="med" len="med"/>
+                      <a:tailEnd type="none" w="med" len="med"/>
+                    </a:lnT>
+                    <a:lnB w="12700" cap="flat" cmpd="sng" algn="ctr">
+                      <a:solidFill>
+                        <a:schemeClr val="tx1"/>
+                      </a:solidFill>
+                      <a:prstDash val="solid"/>
+                      <a:round/>
+                      <a:headEnd type="none" w="med" len="med"/>
+                      <a:tailEnd type="none" w="med" len="med"/>
+                    </a:lnB>
+                    <a:solidFill>
+                      <a:schemeClr val="accent2"/>
+                    </a:solidFill>
+                  </a:tcPr>
+                </a:tc>
+                <a:tc>
+                  <a:txBody>
+                    <a:bodyPr/>
+                    <a:lstStyle/>
+                    <a:p>
+                      <a:r>
+                        <a:rPr lang="en-US" b="1" i="0"/>
+                        <a:t>Kod</a:t>
+                      </a:r>
+                    </a:p>
+                  </a:txBody>
+                  <a:tcPr anchor="ctr">
+                    <a:lnL w="12700" cap="flat" cmpd="sng" algn="ctr">
+                      <a:solidFill>
+                        <a:schemeClr val="tx1"/>
+                      </a:solidFill>
+                      <a:prstDash val="solid"/>
+                      <a:round/>
+                      <a:headEnd type="none" w="med" len="med"/>
+                      <a:tailEnd type="none" w="med" len="med"/>
+                    </a:lnL>
+                    <a:lnR w="12700" cap="flat" cmpd="sng" algn="ctr">
+                      <a:solidFill>
+                        <a:schemeClr val="tx1"/>
+                      </a:solidFill>
+                      <a:prstDash val="solid"/>
+                      <a:round/>
+                      <a:headEnd type="none" w="med" len="med"/>
+                      <a:tailEnd type="none" w="med" len="med"/>
+                    </a:lnR>
+                    <a:lnT w="12700" cap="flat" cmpd="sng" algn="ctr">
+                      <a:solidFill>
+                        <a:schemeClr val="tx1"/>
+                      </a:solidFill>
+                      <a:prstDash val="solid"/>
+                      <a:round/>
+                      <a:headEnd type="none" w="med" len="med"/>
+                      <a:tailEnd type="none" w="med" len="med"/>
+                    </a:lnT>
+                    <a:lnB w="12700" cap="flat" cmpd="sng" algn="ctr">
+                      <a:solidFill>
+                        <a:schemeClr val="tx1"/>
+                      </a:solidFill>
+                      <a:prstDash val="solid"/>
+                      <a:round/>
+                      <a:headEnd type="none" w="med" len="med"/>
+                      <a:tailEnd type="none" w="med" len="med"/>
+                    </a:lnB>
+                    <a:solidFill>
+                      <a:schemeClr val="accent2"/>
+                    </a:solidFill>
+                  </a:tcPr>
+                </a:tc>
+                <a:extLst>
+                  <a:ext uri="{0D108BD9-81ED-4DB2-BD59-A6C34878D82A}">
+                    <a16:rowId xmlns:a16="http://schemas.microsoft.com/office/drawing/2014/main" val="35407788"/>
+                  </a:ext>
+                </a:extLst>
+              </a:tr>
+              <a:tr h="468818">
+                <a:tc>
+                  <a:txBody>
+                    <a:bodyPr/>
+                    <a:lstStyle/>
+                    <a:p>
+                      <a:r>
+                        <a:rPr lang="en-US"/>
+                        <a:t>Yeni policy yaratmaq</a:t>
+                      </a:r>
+                    </a:p>
+                  </a:txBody>
+                  <a:tcPr anchor="ctr">
+                    <a:lnL w="12700" cap="flat" cmpd="sng" algn="ctr">
+                      <a:solidFill>
+                        <a:schemeClr val="tx1"/>
+                      </a:solidFill>
+                      <a:prstDash val="solid"/>
+                      <a:round/>
+                      <a:headEnd type="none" w="med" len="med"/>
+                      <a:tailEnd type="none" w="med" len="med"/>
+                    </a:lnL>
+                    <a:lnR w="12700" cap="flat" cmpd="sng" algn="ctr">
+                      <a:solidFill>
+                        <a:schemeClr val="tx1"/>
+                      </a:solidFill>
+                      <a:prstDash val="solid"/>
+                      <a:round/>
+                      <a:headEnd type="none" w="med" len="med"/>
+                      <a:tailEnd type="none" w="med" len="med"/>
+                    </a:lnR>
+                    <a:lnT w="12700" cap="flat" cmpd="sng" algn="ctr">
+                      <a:solidFill>
+                        <a:schemeClr val="tx1"/>
+                      </a:solidFill>
+                      <a:prstDash val="solid"/>
+                      <a:round/>
+                      <a:headEnd type="none" w="med" len="med"/>
+                      <a:tailEnd type="none" w="med" len="med"/>
+                    </a:lnT>
+                    <a:lnB w="12700" cap="flat" cmpd="sng" algn="ctr">
+                      <a:solidFill>
+                        <a:schemeClr val="tx1"/>
+                      </a:solidFill>
+                      <a:prstDash val="solid"/>
+                      <a:round/>
+                      <a:headEnd type="none" w="med" len="med"/>
+                      <a:tailEnd type="none" w="med" len="med"/>
+                    </a:lnB>
+                    <a:noFill/>
+                  </a:tcPr>
+                </a:tc>
+                <a:tc>
+                  <a:txBody>
+                    <a:bodyPr/>
+                    <a:lstStyle/>
+                    <a:p>
+                      <a:r>
+                        <a:rPr lang="en-US"/>
+                        <a:t>php artisan make:policy PostPolicy --model=Post</a:t>
+                      </a:r>
+                    </a:p>
+                  </a:txBody>
+                  <a:tcPr anchor="ctr">
+                    <a:lnL w="12700" cap="flat" cmpd="sng" algn="ctr">
+                      <a:solidFill>
+                        <a:schemeClr val="tx1"/>
+                      </a:solidFill>
+                      <a:prstDash val="solid"/>
+                      <a:round/>
+                      <a:headEnd type="none" w="med" len="med"/>
+                      <a:tailEnd type="none" w="med" len="med"/>
+                    </a:lnL>
+                    <a:lnR w="12700" cap="flat" cmpd="sng" algn="ctr">
+                      <a:solidFill>
+                        <a:schemeClr val="tx1"/>
+                      </a:solidFill>
+                      <a:prstDash val="solid"/>
+                      <a:round/>
+                      <a:headEnd type="none" w="med" len="med"/>
+                      <a:tailEnd type="none" w="med" len="med"/>
+                    </a:lnR>
+                    <a:lnT w="12700" cap="flat" cmpd="sng" algn="ctr">
+                      <a:solidFill>
+                        <a:schemeClr val="tx1"/>
+                      </a:solidFill>
+                      <a:prstDash val="solid"/>
+                      <a:round/>
+                      <a:headEnd type="none" w="med" len="med"/>
+                      <a:tailEnd type="none" w="med" len="med"/>
+                    </a:lnT>
+                    <a:lnB w="12700" cap="flat" cmpd="sng" algn="ctr">
+                      <a:solidFill>
+                        <a:schemeClr val="tx1"/>
+                      </a:solidFill>
+                      <a:prstDash val="solid"/>
+                      <a:round/>
+                      <a:headEnd type="none" w="med" len="med"/>
+                      <a:tailEnd type="none" w="med" len="med"/>
+                    </a:lnB>
+                    <a:noFill/>
+                  </a:tcPr>
+                </a:tc>
+                <a:extLst>
+                  <a:ext uri="{0D108BD9-81ED-4DB2-BD59-A6C34878D82A}">
+                    <a16:rowId xmlns:a16="http://schemas.microsoft.com/office/drawing/2014/main" val="300112127"/>
+                  </a:ext>
+                </a:extLst>
+              </a:tr>
+              <a:tr h="468818">
+                <a:tc>
+                  <a:txBody>
+                    <a:bodyPr/>
+                    <a:lstStyle/>
+                    <a:p>
+                      <a:r>
+                        <a:rPr lang="en-US"/>
+                        <a:t>Policy qeydiyyatı</a:t>
+                      </a:r>
+                    </a:p>
+                  </a:txBody>
+                  <a:tcPr anchor="ctr">
+                    <a:lnL w="12700" cap="flat" cmpd="sng" algn="ctr">
+                      <a:solidFill>
+                        <a:schemeClr val="tx1"/>
+                      </a:solidFill>
+                      <a:prstDash val="solid"/>
+                      <a:round/>
+                      <a:headEnd type="none" w="med" len="med"/>
+                      <a:tailEnd type="none" w="med" len="med"/>
+                    </a:lnL>
+                    <a:lnR w="12700" cap="flat" cmpd="sng" algn="ctr">
+                      <a:solidFill>
+                        <a:schemeClr val="tx1"/>
+                      </a:solidFill>
+                      <a:prstDash val="solid"/>
+                      <a:round/>
+                      <a:headEnd type="none" w="med" len="med"/>
+                      <a:tailEnd type="none" w="med" len="med"/>
+                    </a:lnR>
+                    <a:lnT w="12700" cap="flat" cmpd="sng" algn="ctr">
+                      <a:solidFill>
+                        <a:schemeClr val="tx1"/>
+                      </a:solidFill>
+                      <a:prstDash val="solid"/>
+                      <a:round/>
+                      <a:headEnd type="none" w="med" len="med"/>
+                      <a:tailEnd type="none" w="med" len="med"/>
+                    </a:lnT>
+                    <a:lnB w="12700" cap="flat" cmpd="sng" algn="ctr">
+                      <a:solidFill>
+                        <a:schemeClr val="tx1"/>
+                      </a:solidFill>
+                      <a:prstDash val="solid"/>
+                      <a:round/>
+                      <a:headEnd type="none" w="med" len="med"/>
+                      <a:tailEnd type="none" w="med" len="med"/>
+                    </a:lnB>
+                    <a:noFill/>
+                  </a:tcPr>
+                </a:tc>
+                <a:tc>
+                  <a:txBody>
+                    <a:bodyPr/>
+                    <a:lstStyle/>
+                    <a:p>
+                      <a:r>
+                        <a:rPr lang="en-US"/>
+                        <a:t>Post::class =&gt; PostPolicy::class</a:t>
+                      </a:r>
+                    </a:p>
+                  </a:txBody>
+                  <a:tcPr anchor="ctr">
+                    <a:lnL w="12700" cap="flat" cmpd="sng" algn="ctr">
+                      <a:solidFill>
+                        <a:schemeClr val="tx1"/>
+                      </a:solidFill>
+                      <a:prstDash val="solid"/>
+                      <a:round/>
+                      <a:headEnd type="none" w="med" len="med"/>
+                      <a:tailEnd type="none" w="med" len="med"/>
+                    </a:lnL>
+                    <a:lnR w="12700" cap="flat" cmpd="sng" algn="ctr">
+                      <a:solidFill>
+                        <a:schemeClr val="tx1"/>
+                      </a:solidFill>
+                      <a:prstDash val="solid"/>
+                      <a:round/>
+                      <a:headEnd type="none" w="med" len="med"/>
+                      <a:tailEnd type="none" w="med" len="med"/>
+                    </a:lnR>
+                    <a:lnT w="12700" cap="flat" cmpd="sng" algn="ctr">
+                      <a:solidFill>
+                        <a:schemeClr val="tx1"/>
+                      </a:solidFill>
+                      <a:prstDash val="solid"/>
+                      <a:round/>
+                      <a:headEnd type="none" w="med" len="med"/>
+                      <a:tailEnd type="none" w="med" len="med"/>
+                    </a:lnT>
+                    <a:lnB w="12700" cap="flat" cmpd="sng" algn="ctr">
+                      <a:solidFill>
+                        <a:schemeClr val="tx1"/>
+                      </a:solidFill>
+                      <a:prstDash val="solid"/>
+                      <a:round/>
+                      <a:headEnd type="none" w="med" len="med"/>
+                      <a:tailEnd type="none" w="med" len="med"/>
+                    </a:lnB>
+                    <a:noFill/>
+                  </a:tcPr>
+                </a:tc>
+                <a:extLst>
+                  <a:ext uri="{0D108BD9-81ED-4DB2-BD59-A6C34878D82A}">
+                    <a16:rowId xmlns:a16="http://schemas.microsoft.com/office/drawing/2014/main" val="4196419620"/>
+                  </a:ext>
+                </a:extLst>
+              </a:tr>
+              <a:tr h="468818">
+                <a:tc>
+                  <a:txBody>
+                    <a:bodyPr/>
+                    <a:lstStyle/>
+                    <a:p>
+                      <a:r>
+                        <a:rPr lang="en-US"/>
+                        <a:t>Controller icazə yoxlaması</a:t>
+                      </a:r>
+                    </a:p>
+                  </a:txBody>
+                  <a:tcPr anchor="ctr">
+                    <a:lnL w="12700" cap="flat" cmpd="sng" algn="ctr">
+                      <a:solidFill>
+                        <a:schemeClr val="tx1"/>
+                      </a:solidFill>
+                      <a:prstDash val="solid"/>
+                      <a:round/>
+                      <a:headEnd type="none" w="med" len="med"/>
+                      <a:tailEnd type="none" w="med" len="med"/>
+                    </a:lnL>
+                    <a:lnR w="12700" cap="flat" cmpd="sng" algn="ctr">
+                      <a:solidFill>
+                        <a:schemeClr val="tx1"/>
+                      </a:solidFill>
+                      <a:prstDash val="solid"/>
+                      <a:round/>
+                      <a:headEnd type="none" w="med" len="med"/>
+                      <a:tailEnd type="none" w="med" len="med"/>
+                    </a:lnR>
+                    <a:lnT w="12700" cap="flat" cmpd="sng" algn="ctr">
+                      <a:solidFill>
+                        <a:schemeClr val="tx1"/>
+                      </a:solidFill>
+                      <a:prstDash val="solid"/>
+                      <a:round/>
+                      <a:headEnd type="none" w="med" len="med"/>
+                      <a:tailEnd type="none" w="med" len="med"/>
+                    </a:lnT>
+                    <a:lnB w="12700" cap="flat" cmpd="sng" algn="ctr">
+                      <a:solidFill>
+                        <a:schemeClr val="tx1"/>
+                      </a:solidFill>
+                      <a:prstDash val="solid"/>
+                      <a:round/>
+                      <a:headEnd type="none" w="med" len="med"/>
+                      <a:tailEnd type="none" w="med" len="med"/>
+                    </a:lnB>
+                    <a:noFill/>
+                  </a:tcPr>
+                </a:tc>
+                <a:tc>
+                  <a:txBody>
+                    <a:bodyPr/>
+                    <a:lstStyle/>
+                    <a:p>
+                      <a:r>
+                        <a:rPr lang="en-US"/>
+                        <a:t>$this-&gt;authorize('delete', $post);</a:t>
+                      </a:r>
+                    </a:p>
+                  </a:txBody>
+                  <a:tcPr anchor="ctr">
+                    <a:lnL w="12700" cap="flat" cmpd="sng" algn="ctr">
+                      <a:solidFill>
+                        <a:schemeClr val="tx1"/>
+                      </a:solidFill>
+                      <a:prstDash val="solid"/>
+                      <a:round/>
+                      <a:headEnd type="none" w="med" len="med"/>
+                      <a:tailEnd type="none" w="med" len="med"/>
+                    </a:lnL>
+                    <a:lnR w="12700" cap="flat" cmpd="sng" algn="ctr">
+                      <a:solidFill>
+                        <a:schemeClr val="tx1"/>
+                      </a:solidFill>
+                      <a:prstDash val="solid"/>
+                      <a:round/>
+                      <a:headEnd type="none" w="med" len="med"/>
+                      <a:tailEnd type="none" w="med" len="med"/>
+                    </a:lnR>
+                    <a:lnT w="12700" cap="flat" cmpd="sng" algn="ctr">
+                      <a:solidFill>
+                        <a:schemeClr val="tx1"/>
+                      </a:solidFill>
+                      <a:prstDash val="solid"/>
+                      <a:round/>
+                      <a:headEnd type="none" w="med" len="med"/>
+                      <a:tailEnd type="none" w="med" len="med"/>
+                    </a:lnT>
+                    <a:lnB w="12700" cap="flat" cmpd="sng" algn="ctr">
+                      <a:solidFill>
+                        <a:schemeClr val="tx1"/>
+                      </a:solidFill>
+                      <a:prstDash val="solid"/>
+                      <a:round/>
+                      <a:headEnd type="none" w="med" len="med"/>
+                      <a:tailEnd type="none" w="med" len="med"/>
+                    </a:lnB>
+                    <a:noFill/>
+                  </a:tcPr>
+                </a:tc>
+                <a:extLst>
+                  <a:ext uri="{0D108BD9-81ED-4DB2-BD59-A6C34878D82A}">
+                    <a16:rowId xmlns:a16="http://schemas.microsoft.com/office/drawing/2014/main" val="2857810885"/>
+                  </a:ext>
+                </a:extLst>
+              </a:tr>
+              <a:tr h="468818">
+                <a:tc>
+                  <a:txBody>
+                    <a:bodyPr/>
+                    <a:lstStyle/>
+                    <a:p>
+                      <a:r>
+                        <a:rPr lang="en-US"/>
+                        <a:t>View içində icazə yoxlaması</a:t>
+                      </a:r>
+                    </a:p>
+                  </a:txBody>
+                  <a:tcPr anchor="ctr">
+                    <a:lnL w="12700" cap="flat" cmpd="sng" algn="ctr">
+                      <a:solidFill>
+                        <a:schemeClr val="tx1"/>
+                      </a:solidFill>
+                      <a:prstDash val="solid"/>
+                      <a:round/>
+                      <a:headEnd type="none" w="med" len="med"/>
+                      <a:tailEnd type="none" w="med" len="med"/>
+                    </a:lnL>
+                    <a:lnR w="12700" cap="flat" cmpd="sng" algn="ctr">
+                      <a:solidFill>
+                        <a:schemeClr val="tx1"/>
+                      </a:solidFill>
+                      <a:prstDash val="solid"/>
+                      <a:round/>
+                      <a:headEnd type="none" w="med" len="med"/>
+                      <a:tailEnd type="none" w="med" len="med"/>
+                    </a:lnR>
+                    <a:lnT w="12700" cap="flat" cmpd="sng" algn="ctr">
+                      <a:solidFill>
+                        <a:schemeClr val="tx1"/>
+                      </a:solidFill>
+                      <a:prstDash val="solid"/>
+                      <a:round/>
+                      <a:headEnd type="none" w="med" len="med"/>
+                      <a:tailEnd type="none" w="med" len="med"/>
+                    </a:lnT>
+                    <a:lnB w="12700" cap="flat" cmpd="sng" algn="ctr">
+                      <a:solidFill>
+                        <a:schemeClr val="tx1"/>
+                      </a:solidFill>
+                      <a:prstDash val="solid"/>
+                      <a:round/>
+                      <a:headEnd type="none" w="med" len="med"/>
+                      <a:tailEnd type="none" w="med" len="med"/>
+                    </a:lnB>
+                    <a:noFill/>
+                  </a:tcPr>
+                </a:tc>
+                <a:tc>
+                  <a:txBody>
+                    <a:bodyPr/>
+                    <a:lstStyle/>
+                    <a:p>
+                      <a:r>
+                        <a:rPr lang="en-US"/>
+                        <a:t>@can('delete', $post)</a:t>
+                      </a:r>
+                    </a:p>
+                  </a:txBody>
+                  <a:tcPr anchor="ctr">
+                    <a:lnL w="12700" cap="flat" cmpd="sng" algn="ctr">
+                      <a:solidFill>
+                        <a:schemeClr val="tx1"/>
+                      </a:solidFill>
+                      <a:prstDash val="solid"/>
+                      <a:round/>
+                      <a:headEnd type="none" w="med" len="med"/>
+                      <a:tailEnd type="none" w="med" len="med"/>
+                    </a:lnL>
+                    <a:lnR w="12700" cap="flat" cmpd="sng" algn="ctr">
+                      <a:solidFill>
+                        <a:schemeClr val="tx1"/>
+                      </a:solidFill>
+                      <a:prstDash val="solid"/>
+                      <a:round/>
+                      <a:headEnd type="none" w="med" len="med"/>
+                      <a:tailEnd type="none" w="med" len="med"/>
+                    </a:lnR>
+                    <a:lnT w="12700" cap="flat" cmpd="sng" algn="ctr">
+                      <a:solidFill>
+                        <a:schemeClr val="tx1"/>
+                      </a:solidFill>
+                      <a:prstDash val="solid"/>
+                      <a:round/>
+                      <a:headEnd type="none" w="med" len="med"/>
+                      <a:tailEnd type="none" w="med" len="med"/>
+                    </a:lnT>
+                    <a:lnB w="12700" cap="flat" cmpd="sng" algn="ctr">
+                      <a:solidFill>
+                        <a:schemeClr val="tx1"/>
+                      </a:solidFill>
+                      <a:prstDash val="solid"/>
+                      <a:round/>
+                      <a:headEnd type="none" w="med" len="med"/>
+                      <a:tailEnd type="none" w="med" len="med"/>
+                    </a:lnB>
+                    <a:noFill/>
+                  </a:tcPr>
+                </a:tc>
+                <a:extLst>
+                  <a:ext uri="{0D108BD9-81ED-4DB2-BD59-A6C34878D82A}">
+                    <a16:rowId xmlns:a16="http://schemas.microsoft.com/office/drawing/2014/main" val="3534307584"/>
+                  </a:ext>
+                </a:extLst>
+              </a:tr>
+            </a:tbl>
+          </a:graphicData>
+        </a:graphic>
+      </p:graphicFrame>
+    </p:spTree>
+    <p:extLst>
+      <p:ext uri="{BB962C8B-B14F-4D97-AF65-F5344CB8AC3E}">
+        <p14:creationId xmlns:p14="http://schemas.microsoft.com/office/powerpoint/2010/main" val="1028103601"/>
+      </p:ext>
+    </p:extLst>
+  </p:cSld>
+  <p:clrMapOvr>
+    <a:masterClrMapping/>
+  </p:clrMapOvr>
+</p:sld>
+</file>
+
+<file path=ppt/slides/slide9.xml><?xml version="1.0" encoding="utf-8"?>
+<p:sld xmlns:a="http://schemas.openxmlformats.org/drawingml/2006/main" xmlns:r="http://schemas.openxmlformats.org/officeDocument/2006/relationships" xmlns:p="http://schemas.openxmlformats.org/presentationml/2006/main">
+  <p:cSld>
+    <p:spTree>
+      <p:nvGrpSpPr>
+        <p:cNvPr id="1" name="">
+          <a:extLst>
+            <a:ext uri="{FF2B5EF4-FFF2-40B4-BE49-F238E27FC236}">
+              <a16:creationId xmlns:a16="http://schemas.microsoft.com/office/drawing/2014/main" id="{4DF221DF-0C07-A204-8F7E-E8DD91E9AE8C}"/>
+            </a:ext>
+          </a:extLst>
+        </p:cNvPr>
+        <p:cNvGrpSpPr/>
+        <p:nvPr/>
+      </p:nvGrpSpPr>
+      <p:grpSpPr>
+        <a:xfrm>
+          <a:off x="0" y="0"/>
+          <a:ext cx="0" cy="0"/>
+          <a:chOff x="0" y="0"/>
+          <a:chExt cx="0" cy="0"/>
+        </a:xfrm>
+      </p:grpSpPr>
+      <p:sp>
+        <p:nvSpPr>
+          <p:cNvPr id="3" name="TextBox 2">
+            <a:extLst>
+              <a:ext uri="{FF2B5EF4-FFF2-40B4-BE49-F238E27FC236}">
+                <a16:creationId xmlns:a16="http://schemas.microsoft.com/office/drawing/2014/main" id="{76B0A972-1389-D215-6E2A-F568E74A7891}"/>
+              </a:ext>
+            </a:extLst>
+          </p:cNvPr>
+          <p:cNvSpPr txBox="1"/>
+          <p:nvPr/>
+        </p:nvSpPr>
+        <p:spPr>
+          <a:xfrm>
             <a:off x="217714" y="255046"/>
             <a:ext cx="11756571" cy="355354"/>
           </a:xfrm>
@@ -3556,10 +8671,98 @@
           </a:p>
         </p:txBody>
       </p:sp>
+      <p:pic>
+        <p:nvPicPr>
+          <p:cNvPr id="4" name="Picture 3">
+            <a:extLst>
+              <a:ext uri="{FF2B5EF4-FFF2-40B4-BE49-F238E27FC236}">
+                <a16:creationId xmlns:a16="http://schemas.microsoft.com/office/drawing/2014/main" id="{84B67D42-7A9A-3249-A212-DD0EBD03745F}"/>
+              </a:ext>
+            </a:extLst>
+          </p:cNvPr>
+          <p:cNvPicPr>
+            <a:picLocks noChangeAspect="1"/>
+          </p:cNvPicPr>
+          <p:nvPr/>
+        </p:nvPicPr>
+        <p:blipFill>
+          <a:blip r:embed="rId2"/>
+          <a:stretch>
+            <a:fillRect/>
+          </a:stretch>
+        </p:blipFill>
+        <p:spPr>
+          <a:xfrm>
+            <a:off x="0" y="0"/>
+            <a:ext cx="12192000" cy="2398774"/>
+          </a:xfrm>
+          <a:prstGeom prst="rect">
+            <a:avLst/>
+          </a:prstGeom>
+          <a:ln w="38100" cap="sq">
+            <a:solidFill>
+              <a:srgbClr val="000000"/>
+            </a:solidFill>
+            <a:prstDash val="solid"/>
+            <a:miter lim="800000"/>
+          </a:ln>
+          <a:effectLst>
+            <a:outerShdw blurRad="50800" dist="38100" dir="2700000" algn="tl" rotWithShape="0">
+              <a:srgbClr val="000000">
+                <a:alpha val="43000"/>
+              </a:srgbClr>
+            </a:outerShdw>
+          </a:effectLst>
+        </p:spPr>
+      </p:pic>
+      <p:pic>
+        <p:nvPicPr>
+          <p:cNvPr id="5" name="Picture 4">
+            <a:extLst>
+              <a:ext uri="{FF2B5EF4-FFF2-40B4-BE49-F238E27FC236}">
+                <a16:creationId xmlns:a16="http://schemas.microsoft.com/office/drawing/2014/main" id="{B104D577-CDEB-6C97-C83B-16AF5D2F0855}"/>
+              </a:ext>
+            </a:extLst>
+          </p:cNvPr>
+          <p:cNvPicPr>
+            <a:picLocks noChangeAspect="1"/>
+          </p:cNvPicPr>
+          <p:nvPr/>
+        </p:nvPicPr>
+        <p:blipFill>
+          <a:blip r:embed="rId3"/>
+          <a:stretch>
+            <a:fillRect/>
+          </a:stretch>
+        </p:blipFill>
+        <p:spPr>
+          <a:xfrm>
+            <a:off x="3057236" y="2787678"/>
+            <a:ext cx="9134764" cy="3977958"/>
+          </a:xfrm>
+          <a:prstGeom prst="rect">
+            <a:avLst/>
+          </a:prstGeom>
+          <a:ln w="38100" cap="sq">
+            <a:solidFill>
+              <a:srgbClr val="000000"/>
+            </a:solidFill>
+            <a:prstDash val="solid"/>
+            <a:miter lim="800000"/>
+          </a:ln>
+          <a:effectLst>
+            <a:outerShdw blurRad="50800" dist="38100" dir="2700000" algn="tl" rotWithShape="0">
+              <a:srgbClr val="000000">
+                <a:alpha val="43000"/>
+              </a:srgbClr>
+            </a:outerShdw>
+          </a:effectLst>
+        </p:spPr>
+      </p:pic>
     </p:spTree>
     <p:extLst>
       <p:ext uri="{BB962C8B-B14F-4D97-AF65-F5344CB8AC3E}">
-        <p14:creationId xmlns:p14="http://schemas.microsoft.com/office/powerpoint/2010/main" val="3095838342"/>
+        <p14:creationId xmlns:p14="http://schemas.microsoft.com/office/powerpoint/2010/main" val="905715673"/>
       </p:ext>
     </p:extLst>
   </p:cSld>
